--- a/presentation/generated/paper-agent-final-presentation.pptx
+++ b/presentation/generated/paper-agent-final-presentation.pptx
@@ -24,10 +24,9 @@
     <p:sldId id="272" r:id="rId18"/>
     <p:sldId id="273" r:id="rId19"/>
     <p:sldId id="274" r:id="rId20"/>
-    <p:sldId id="275" r:id="rId21"/>
   </p:sldIdLst>
   <p:notesMasterIdLst>
-    <p:notesMasterId r:id="rId22"/>
+    <p:notesMasterId r:id="rId21"/>
   </p:notesMasterIdLst>
   <p:sldSz cx="9144000" cy="5143500"/>
   <p:notesSz cx="5143500" cy="9144000"/>
@@ -1513,94 +1512,6 @@
             <a:fld id="{F7021451-1387-4CA6-816F-3879F97B5CBC}" type="slidenum">
               <a:rPr lang="en-US"/>
               <a:t>2</a:t>
-            </a:fld>
-            <a:endParaRPr lang="en-US"/>
-          </a:p>
-        </p:txBody>
-      </p:sp>
-    </p:spTree>
-    <p:extLst>
-      <p:ext uri="{BB962C8B-B14F-4D97-AF65-F5344CB8AC3E}">
-        <p14:creationId xmlns:p14="http://schemas.microsoft.com/office/powerpoint/2010/main" val="1024086991"/>
-      </p:ext>
-    </p:extLst>
-  </p:cSld>
-  <p:clrMapOvr>
-    <a:masterClrMapping/>
-  </p:clrMapOvr>
-</p:notes>
-</file>
-
-<file path=ppt/notesSlides/notesSlide20.xml><?xml version="1.0" encoding="utf-8"?>
-<p:notes xmlns:a="http://schemas.openxmlformats.org/drawingml/2006/main" xmlns:r="http://schemas.openxmlformats.org/officeDocument/2006/relationships" xmlns:p="http://schemas.openxmlformats.org/presentationml/2006/main">
-  <p:cSld>
-    <p:spTree>
-      <p:nvGrpSpPr>
-        <p:cNvPr id="1" name=""/>
-        <p:cNvGrpSpPr/>
-        <p:nvPr/>
-      </p:nvGrpSpPr>
-      <p:grpSpPr>
-        <a:xfrm>
-          <a:off x="0" y="0"/>
-          <a:ext cx="0" cy="0"/>
-          <a:chOff x="0" y="0"/>
-          <a:chExt cx="0" cy="0"/>
-        </a:xfrm>
-      </p:grpSpPr>
-      <p:sp>
-        <p:nvSpPr>
-          <p:cNvPr id="2" name="Slide Image Placeholder 1"/>
-          <p:cNvSpPr>
-            <a:spLocks noGrp="1" noRot="1" noChangeAspect="1"/>
-          </p:cNvSpPr>
-          <p:nvPr>
-            <p:ph type="sldImg"/>
-          </p:nvPr>
-        </p:nvSpPr>
-        <p:spPr/>
-      </p:sp>
-      <p:sp>
-        <p:nvSpPr>
-          <p:cNvPr id="3" name="Notes Placeholder 2"/>
-          <p:cNvSpPr>
-            <a:spLocks noGrp="1"/>
-          </p:cNvSpPr>
-          <p:nvPr>
-            <p:ph type="body" idx="1"/>
-          </p:nvPr>
-        </p:nvSpPr>
-        <p:spPr/>
-        <p:txBody>
-          <a:bodyPr/>
-          <a:lstStyle/>
-          <a:p>
-            <a:r>
-              <a:rPr lang="en-US" dirty="0"/>
-              <a:t/>
-            </a:r>
-            <a:endParaRPr lang="en-US" dirty="0"/>
-          </a:p>
-        </p:txBody>
-      </p:sp>
-      <p:sp>
-        <p:nvSpPr>
-          <p:cNvPr id="4" name="Slide Number Placeholder 3"/>
-          <p:cNvSpPr>
-            <a:spLocks noGrp="1"/>
-          </p:cNvSpPr>
-          <p:nvPr>
-            <p:ph type="sldNum" sz="quarter" idx="10"/>
-          </p:nvPr>
-        </p:nvSpPr>
-        <p:spPr/>
-        <p:txBody>
-          <a:bodyPr/>
-          <a:lstStyle/>
-          <a:p>
-            <a:fld id="{F7021451-1387-4CA6-816F-3879F97B5CBC}" type="slidenum">
-              <a:rPr lang="en-US"/>
-              <a:t>20</a:t>
             </a:fld>
             <a:endParaRPr lang="en-US"/>
           </a:p>
@@ -2827,7 +2738,7 @@
                 <a:ea typeface="Open Sans" pitchFamily="34" charset="-122"/>
                 <a:cs typeface="Open Sans" pitchFamily="34" charset="-120"/>
               </a:rPr>
-              <a:t>Заняття Paper Agent: Traceable Multi-Agent Literature Review Automation</a:t>
+              <a:t>Заняття Paper Agent: From Black-Box AI to Traceable Multi-Agent Research</a:t>
             </a:r>
             <a:endParaRPr lang="en-US" sz="2000" dirty="0"/>
           </a:p>
@@ -2940,14 +2851,41 @@
       </p:grpSpPr>
       <p:sp>
         <p:nvSpPr>
-          <p:cNvPr id="2" name="Text 0"/>
+          <p:cNvPr id="2" name="Shape 0"/>
           <p:cNvSpPr/>
           <p:nvPr/>
         </p:nvSpPr>
         <p:spPr>
           <a:xfrm>
-            <a:off x="457200" y="182880"/>
-            <a:ext cx="8229600" cy="548640"/>
+            <a:off x="0" y="0"/>
+            <a:ext cx="9144000" cy="5143500"/>
+          </a:xfrm>
+          <a:prstGeom prst="rect">
+            <a:avLst/>
+          </a:prstGeom>
+          <a:solidFill>
+            <a:srgbClr val="6A653A"/>
+          </a:solidFill>
+          <a:ln/>
+          <a:effectLst>
+            <a:outerShdw sx="100000" sy="100000" kx="0" ky="0" algn="bl" rotWithShape="0" blurRad="50800" dist="25400" dir="5400000">
+              <a:srgbClr val="000000">
+                <a:alpha val="35000"/>
+              </a:srgbClr>
+            </a:outerShdw>
+          </a:effectLst>
+        </p:spPr>
+      </p:sp>
+      <p:sp>
+        <p:nvSpPr>
+          <p:cNvPr id="3" name="Text 1"/>
+          <p:cNvSpPr/>
+          <p:nvPr/>
+        </p:nvSpPr>
+        <p:spPr>
+          <a:xfrm>
+            <a:off x="457200" y="1828800"/>
+            <a:ext cx="8229600" cy="914400"/>
           </a:xfrm>
           <a:prstGeom prst="rect">
             <a:avLst/>
@@ -2959,109 +2897,21 @@
           <a:bodyPr wrap="square" rtlCol="0" anchor="ctr"/>
           <a:lstStyle/>
           <a:p>
-            <a:pPr indent="0" marL="0">
+            <a:pPr algn="ctr" indent="0" marL="0">
               <a:buNone/>
             </a:pPr>
             <a:r>
-              <a:rPr lang="en-US" sz="2800" b="1" dirty="0">
-                <a:solidFill>
-                  <a:srgbClr val="003366"/>
+              <a:rPr lang="en-US" sz="3600" b="1" dirty="0">
+                <a:solidFill>
+                  <a:srgbClr val="FFFFFF"/>
                 </a:solidFill>
                 <a:latin typeface="Raleway" pitchFamily="34" charset="0"/>
                 <a:ea typeface="Raleway" pitchFamily="34" charset="-122"/>
                 <a:cs typeface="Raleway" pitchFamily="34" charset="-120"/>
               </a:rPr>
-              <a:t>Dashboard Routes</a:t>
-            </a:r>
-            <a:endParaRPr lang="en-US" sz="2800" dirty="0"/>
-          </a:p>
-        </p:txBody>
-      </p:sp>
-      <p:sp>
-        <p:nvSpPr>
-          <p:cNvPr id="3" name="Text 1"/>
-          <p:cNvSpPr/>
-          <p:nvPr/>
-        </p:nvSpPr>
-        <p:spPr>
-          <a:xfrm>
-            <a:off x="457200" y="822960"/>
-            <a:ext cx="8229600" cy="1097280"/>
-          </a:xfrm>
-          <a:prstGeom prst="rect">
-            <a:avLst/>
-          </a:prstGeom>
-          <a:noFill/>
-          <a:ln/>
-        </p:spPr>
-        <p:txBody>
-          <a:bodyPr wrap="square" rtlCol="0" anchor="t"/>
-          <a:lstStyle/>
-          <a:p>
-            <a:pPr>
-              <a:spcBef>
-                <a:spcPts val="600"/>
-              </a:spcBef>
-              <a:spcAft>
-                <a:spcPts val="300"/>
-              </a:spcAft>
-            </a:pPr>
-            <a:r>
-              <a:rPr lang="en-US" sz="1800" dirty="0">
-                <a:solidFill>
-                  <a:srgbClr val="333333"/>
-                </a:solidFill>
-                <a:latin typeface="Open Sans" pitchFamily="34" charset="0"/>
-                <a:ea typeface="Open Sans" pitchFamily="34" charset="-122"/>
-                <a:cs typeface="Open Sans" pitchFamily="34" charset="-120"/>
-              </a:rPr>
-              <a:t>/dashboard/research: run search, ranked papers, paper detail, report preview</a:t>
-            </a:r>
-            <a:endParaRPr lang="en-US" sz="1800" dirty="0"/>
-          </a:p>
-          <a:p>
-            <a:pPr>
-              <a:spcBef>
-                <a:spcPts val="600"/>
-              </a:spcBef>
-              <a:spcAft>
-                <a:spcPts val="300"/>
-              </a:spcAft>
-            </a:pPr>
-            <a:r>
-              <a:rPr lang="en-US" sz="1800" dirty="0">
-                <a:solidFill>
-                  <a:srgbClr val="333333"/>
-                </a:solidFill>
-                <a:latin typeface="Open Sans" pitchFamily="34" charset="0"/>
-                <a:ea typeface="Open Sans" pitchFamily="34" charset="-122"/>
-                <a:cs typeface="Open Sans" pitchFamily="34" charset="-120"/>
-              </a:rPr>
-              <a:t>/dashboard/ops: diagnostics, provider readiness, D1/R2 state</a:t>
-            </a:r>
-            <a:endParaRPr lang="en-US" sz="1800" dirty="0"/>
-          </a:p>
-          <a:p>
-            <a:pPr>
-              <a:spcBef>
-                <a:spcPts val="600"/>
-              </a:spcBef>
-              <a:spcAft>
-                <a:spcPts val="300"/>
-              </a:spcAft>
-            </a:pPr>
-            <a:r>
-              <a:rPr lang="en-US" sz="1800" dirty="0">
-                <a:solidFill>
-                  <a:srgbClr val="333333"/>
-                </a:solidFill>
-                <a:latin typeface="Open Sans" pitchFamily="34" charset="0"/>
-                <a:ea typeface="Open Sans" pitchFamily="34" charset="-122"/>
-                <a:cs typeface="Open Sans" pitchFamily="34" charset="-120"/>
-              </a:rPr>
-              <a:t>/dashboard/evaluation: baseline comparison and implementation status</a:t>
-            </a:r>
-            <a:endParaRPr lang="en-US" sz="1800" dirty="0"/>
+              <a:t>4. Demo Sequence</a:t>
+            </a:r>
+            <a:endParaRPr lang="en-US" sz="3600" dirty="0"/>
           </a:p>
         </p:txBody>
       </p:sp>
@@ -3092,41 +2942,14 @@
       </p:grpSpPr>
       <p:sp>
         <p:nvSpPr>
-          <p:cNvPr id="2" name="Shape 0"/>
+          <p:cNvPr id="2" name="Text 0"/>
           <p:cNvSpPr/>
           <p:nvPr/>
         </p:nvSpPr>
         <p:spPr>
           <a:xfrm>
-            <a:off x="0" y="0"/>
-            <a:ext cx="9144000" cy="5143500"/>
-          </a:xfrm>
-          <a:prstGeom prst="rect">
-            <a:avLst/>
-          </a:prstGeom>
-          <a:solidFill>
-            <a:srgbClr val="6A653A"/>
-          </a:solidFill>
-          <a:ln/>
-          <a:effectLst>
-            <a:outerShdw sx="100000" sy="100000" kx="0" ky="0" algn="bl" rotWithShape="0" blurRad="50800" dist="25400" dir="5400000">
-              <a:srgbClr val="000000">
-                <a:alpha val="35000"/>
-              </a:srgbClr>
-            </a:outerShdw>
-          </a:effectLst>
-        </p:spPr>
-      </p:sp>
-      <p:sp>
-        <p:nvSpPr>
-          <p:cNvPr id="3" name="Text 1"/>
-          <p:cNvSpPr/>
-          <p:nvPr/>
-        </p:nvSpPr>
-        <p:spPr>
-          <a:xfrm>
-            <a:off x="457200" y="1828800"/>
-            <a:ext cx="8229600" cy="914400"/>
+            <a:off x="457200" y="182880"/>
+            <a:ext cx="8229600" cy="548640"/>
           </a:xfrm>
           <a:prstGeom prst="rect">
             <a:avLst/>
@@ -3138,21 +2961,259 @@
           <a:bodyPr wrap="square" rtlCol="0" anchor="ctr"/>
           <a:lstStyle/>
           <a:p>
-            <a:pPr algn="ctr" indent="0" marL="0">
+            <a:pPr indent="0" marL="0">
               <a:buNone/>
             </a:pPr>
             <a:r>
-              <a:rPr lang="en-US" sz="3600" b="1" dirty="0">
-                <a:solidFill>
-                  <a:srgbClr val="FFFFFF"/>
+              <a:rPr lang="en-US" sz="2800" b="1" dirty="0">
+                <a:solidFill>
+                  <a:srgbClr val="003366"/>
                 </a:solidFill>
                 <a:latin typeface="Raleway" pitchFamily="34" charset="0"/>
                 <a:ea typeface="Raleway" pitchFamily="34" charset="-122"/>
                 <a:cs typeface="Raleway" pitchFamily="34" charset="-120"/>
               </a:rPr>
-              <a:t>4. Demo</a:t>
-            </a:r>
-            <a:endParaRPr lang="en-US" sz="3600" dirty="0"/>
+              <a:t>From Keyword to Narrative</a:t>
+            </a:r>
+            <a:endParaRPr lang="en-US" sz="2800" dirty="0"/>
+          </a:p>
+        </p:txBody>
+      </p:sp>
+      <p:sp>
+        <p:nvSpPr>
+          <p:cNvPr id="3" name="Text 1"/>
+          <p:cNvSpPr/>
+          <p:nvPr/>
+        </p:nvSpPr>
+        <p:spPr>
+          <a:xfrm>
+            <a:off x="457200" y="822960"/>
+            <a:ext cx="8229600" cy="1097280"/>
+          </a:xfrm>
+          <a:prstGeom prst="rect">
+            <a:avLst/>
+          </a:prstGeom>
+          <a:noFill/>
+          <a:ln/>
+        </p:spPr>
+        <p:txBody>
+          <a:bodyPr wrap="square" rtlCol="0" anchor="t"/>
+          <a:lstStyle/>
+          <a:p>
+            <a:pPr indent="0" marL="0">
+              <a:buNone/>
+            </a:pPr>
+            <a:r>
+              <a:rPr lang="en-US" sz="1800" dirty="0">
+                <a:solidFill>
+                  <a:srgbClr val="333333"/>
+                </a:solidFill>
+                <a:latin typeface="Open Sans" pitchFamily="34" charset="0"/>
+                <a:ea typeface="Open Sans" pitchFamily="34" charset="-122"/>
+                <a:cs typeface="Open Sans" pitchFamily="34" charset="-120"/>
+              </a:rPr>
+              <a:t>1. </a:t>
+            </a:r>
+            <a:pPr indent="0" marL="0">
+              <a:buNone/>
+            </a:pPr>
+            <a:r>
+              <a:rPr lang="en-US" sz="1800" b="1" dirty="0">
+                <a:solidFill>
+                  <a:srgbClr val="333333"/>
+                </a:solidFill>
+                <a:latin typeface="Open Sans" pitchFamily="34" charset="0"/>
+                <a:ea typeface="Open Sans" pitchFamily="34" charset="-122"/>
+                <a:cs typeface="Open Sans" pitchFamily="34" charset="-120"/>
+              </a:rPr>
+              <a:t>Research Studio</a:t>
+            </a:r>
+            <a:pPr indent="0" marL="0">
+              <a:buNone/>
+            </a:pPr>
+            <a:r>
+              <a:rPr lang="en-US" sz="1800" dirty="0">
+                <a:solidFill>
+                  <a:srgbClr val="333333"/>
+                </a:solidFill>
+                <a:latin typeface="Open Sans" pitchFamily="34" charset="0"/>
+                <a:ea typeface="Open Sans" pitchFamily="34" charset="-122"/>
+                <a:cs typeface="Open Sans" pitchFamily="34" charset="-120"/>
+              </a:rPr>
+              <a:t>: 검색어 입력 및 실시간 진행 확인</a:t>
+            </a:r>
+            <a:pPr indent="0" marL="0">
+              <a:buNone/>
+            </a:pPr>
+            <a:r>
+              <a:rPr lang="en-US" sz="1800" dirty="0">
+                <a:solidFill>
+                  <a:srgbClr val="333333"/>
+                </a:solidFill>
+                <a:latin typeface="Open Sans" pitchFamily="34" charset="0"/>
+                <a:ea typeface="Open Sans" pitchFamily="34" charset="-122"/>
+                <a:cs typeface="Open Sans" pitchFamily="34" charset="-120"/>
+              </a:rPr>
+              <a:t>
+</a:t>
+            </a:r>
+            <a:pPr indent="0" marL="0">
+              <a:buNone/>
+            </a:pPr>
+            <a:r>
+              <a:rPr lang="en-US" sz="1800" dirty="0">
+                <a:solidFill>
+                  <a:srgbClr val="333333"/>
+                </a:solidFill>
+                <a:latin typeface="Open Sans" pitchFamily="34" charset="0"/>
+                <a:ea typeface="Open Sans" pitchFamily="34" charset="-122"/>
+                <a:cs typeface="Open Sans" pitchFamily="34" charset="-120"/>
+              </a:rPr>
+              <a:t>2. </a:t>
+            </a:r>
+            <a:pPr indent="0" marL="0">
+              <a:buNone/>
+            </a:pPr>
+            <a:r>
+              <a:rPr lang="en-US" sz="1800" b="1" dirty="0">
+                <a:solidFill>
+                  <a:srgbClr val="333333"/>
+                </a:solidFill>
+                <a:latin typeface="Open Sans" pitchFamily="34" charset="0"/>
+                <a:ea typeface="Open Sans" pitchFamily="34" charset="-122"/>
+                <a:cs typeface="Open Sans" pitchFamily="34" charset="-120"/>
+              </a:rPr>
+              <a:t>Agent Board</a:t>
+            </a:r>
+            <a:pPr indent="0" marL="0">
+              <a:buNone/>
+            </a:pPr>
+            <a:r>
+              <a:rPr lang="en-US" sz="1800" dirty="0">
+                <a:solidFill>
+                  <a:srgbClr val="333333"/>
+                </a:solidFill>
+                <a:latin typeface="Open Sans" pitchFamily="34" charset="0"/>
+                <a:ea typeface="Open Sans" pitchFamily="34" charset="-122"/>
+                <a:cs typeface="Open Sans" pitchFamily="34" charset="-120"/>
+              </a:rPr>
+              <a:t>: 12단계 에이전트의 실행 로그(Trace) 감시</a:t>
+            </a:r>
+            <a:pPr indent="0" marL="0">
+              <a:buNone/>
+            </a:pPr>
+            <a:r>
+              <a:rPr lang="en-US" sz="1800" dirty="0">
+                <a:solidFill>
+                  <a:srgbClr val="333333"/>
+                </a:solidFill>
+                <a:latin typeface="Open Sans" pitchFamily="34" charset="0"/>
+                <a:ea typeface="Open Sans" pitchFamily="34" charset="-122"/>
+                <a:cs typeface="Open Sans" pitchFamily="34" charset="-120"/>
+              </a:rPr>
+              <a:t>
+</a:t>
+            </a:r>
+            <a:pPr indent="0" marL="0">
+              <a:buNone/>
+            </a:pPr>
+            <a:r>
+              <a:rPr lang="en-US" sz="1800" dirty="0">
+                <a:solidFill>
+                  <a:srgbClr val="333333"/>
+                </a:solidFill>
+                <a:latin typeface="Open Sans" pitchFamily="34" charset="0"/>
+                <a:ea typeface="Open Sans" pitchFamily="34" charset="-122"/>
+                <a:cs typeface="Open Sans" pitchFamily="34" charset="-120"/>
+              </a:rPr>
+              <a:t>3. </a:t>
+            </a:r>
+            <a:pPr indent="0" marL="0">
+              <a:buNone/>
+            </a:pPr>
+            <a:r>
+              <a:rPr lang="en-US" sz="1800" b="1" dirty="0">
+                <a:solidFill>
+                  <a:srgbClr val="333333"/>
+                </a:solidFill>
+                <a:latin typeface="Open Sans" pitchFamily="34" charset="0"/>
+                <a:ea typeface="Open Sans" pitchFamily="34" charset="-122"/>
+                <a:cs typeface="Open Sans" pitchFamily="34" charset="-120"/>
+              </a:rPr>
+              <a:t>Paper Detail</a:t>
+            </a:r>
+            <a:pPr indent="0" marL="0">
+              <a:buNone/>
+            </a:pPr>
+            <a:r>
+              <a:rPr lang="en-US" sz="1800" dirty="0">
+                <a:solidFill>
+                  <a:srgbClr val="333333"/>
+                </a:solidFill>
+                <a:latin typeface="Open Sans" pitchFamily="34" charset="0"/>
+                <a:ea typeface="Open Sans" pitchFamily="34" charset="-122"/>
+                <a:cs typeface="Open Sans" pitchFamily="34" charset="-120"/>
+              </a:rPr>
+              <a:t>: 점수 산출 근거(Score Breakdown) 확인</a:t>
+            </a:r>
+            <a:pPr indent="0" marL="0">
+              <a:buNone/>
+            </a:pPr>
+            <a:r>
+              <a:rPr lang="en-US" sz="1800" dirty="0">
+                <a:solidFill>
+                  <a:srgbClr val="333333"/>
+                </a:solidFill>
+                <a:latin typeface="Open Sans" pitchFamily="34" charset="0"/>
+                <a:ea typeface="Open Sans" pitchFamily="34" charset="-122"/>
+                <a:cs typeface="Open Sans" pitchFamily="34" charset="-120"/>
+              </a:rPr>
+              <a:t>
+</a:t>
+            </a:r>
+            <a:pPr indent="0" marL="0">
+              <a:buNone/>
+            </a:pPr>
+            <a:r>
+              <a:rPr lang="en-US" sz="1800" dirty="0">
+                <a:solidFill>
+                  <a:srgbClr val="333333"/>
+                </a:solidFill>
+                <a:latin typeface="Open Sans" pitchFamily="34" charset="0"/>
+                <a:ea typeface="Open Sans" pitchFamily="34" charset="-122"/>
+                <a:cs typeface="Open Sans" pitchFamily="34" charset="-120"/>
+              </a:rPr>
+              <a:t>4. </a:t>
+            </a:r>
+            <a:pPr indent="0" marL="0">
+              <a:buNone/>
+            </a:pPr>
+            <a:r>
+              <a:rPr lang="en-US" sz="1800" b="1" dirty="0">
+                <a:solidFill>
+                  <a:srgbClr val="333333"/>
+                </a:solidFill>
+                <a:latin typeface="Open Sans" pitchFamily="34" charset="0"/>
+                <a:ea typeface="Open Sans" pitchFamily="34" charset="-122"/>
+                <a:cs typeface="Open Sans" pitchFamily="34" charset="-120"/>
+              </a:rPr>
+              <a:t>Final Synthesis</a:t>
+            </a:r>
+            <a:pPr indent="0" marL="0">
+              <a:buNone/>
+            </a:pPr>
+            <a:r>
+              <a:rPr lang="en-US" sz="1800" dirty="0">
+                <a:solidFill>
+                  <a:srgbClr val="333333"/>
+                </a:solidFill>
+                <a:latin typeface="Open Sans" pitchFamily="34" charset="0"/>
+                <a:ea typeface="Open Sans" pitchFamily="34" charset="-122"/>
+                <a:cs typeface="Open Sans" pitchFamily="34" charset="-120"/>
+              </a:rPr>
+              <a:t>: Findings, Themes, Gaps가 포함된 서사적 리포트 다운로드</a:t>
+            </a:r>
+            <a:endParaRPr lang="en-US" sz="1800" dirty="0"/>
           </a:p>
         </p:txBody>
       </p:sp>
@@ -3183,14 +3244,41 @@
       </p:grpSpPr>
       <p:sp>
         <p:nvSpPr>
-          <p:cNvPr id="2" name="Text 0"/>
+          <p:cNvPr id="2" name="Shape 0"/>
           <p:cNvSpPr/>
           <p:nvPr/>
         </p:nvSpPr>
         <p:spPr>
           <a:xfrm>
-            <a:off x="457200" y="182880"/>
-            <a:ext cx="8229600" cy="548640"/>
+            <a:off x="0" y="0"/>
+            <a:ext cx="9144000" cy="5143500"/>
+          </a:xfrm>
+          <a:prstGeom prst="rect">
+            <a:avLst/>
+          </a:prstGeom>
+          <a:solidFill>
+            <a:srgbClr val="6A653A"/>
+          </a:solidFill>
+          <a:ln/>
+          <a:effectLst>
+            <a:outerShdw sx="100000" sy="100000" kx="0" ky="0" algn="bl" rotWithShape="0" blurRad="50800" dist="25400" dir="5400000">
+              <a:srgbClr val="000000">
+                <a:alpha val="35000"/>
+              </a:srgbClr>
+            </a:outerShdw>
+          </a:effectLst>
+        </p:spPr>
+      </p:sp>
+      <p:sp>
+        <p:nvSpPr>
+          <p:cNvPr id="3" name="Text 1"/>
+          <p:cNvSpPr/>
+          <p:nvPr/>
+        </p:nvSpPr>
+        <p:spPr>
+          <a:xfrm>
+            <a:off x="457200" y="1828800"/>
+            <a:ext cx="8229600" cy="914400"/>
           </a:xfrm>
           <a:prstGeom prst="rect">
             <a:avLst/>
@@ -3202,233 +3290,21 @@
           <a:bodyPr wrap="square" rtlCol="0" anchor="ctr"/>
           <a:lstStyle/>
           <a:p>
-            <a:pPr indent="0" marL="0">
+            <a:pPr algn="ctr" indent="0" marL="0">
               <a:buNone/>
             </a:pPr>
             <a:r>
-              <a:rPr lang="en-US" sz="2800" b="1" dirty="0">
-                <a:solidFill>
-                  <a:srgbClr val="003366"/>
+              <a:rPr lang="en-US" sz="3600" b="1" dirty="0">
+                <a:solidFill>
+                  <a:srgbClr val="FFFFFF"/>
                 </a:solidFill>
                 <a:latin typeface="Raleway" pitchFamily="34" charset="0"/>
                 <a:ea typeface="Raleway" pitchFamily="34" charset="-122"/>
                 <a:cs typeface="Raleway" pitchFamily="34" charset="-120"/>
               </a:rPr>
-              <a:t>Live Demo Sequence</a:t>
-            </a:r>
-            <a:endParaRPr lang="en-US" sz="2800" dirty="0"/>
-          </a:p>
-        </p:txBody>
-      </p:sp>
-      <p:sp>
-        <p:nvSpPr>
-          <p:cNvPr id="3" name="Text 1"/>
-          <p:cNvSpPr/>
-          <p:nvPr/>
-        </p:nvSpPr>
-        <p:spPr>
-          <a:xfrm>
-            <a:off x="457200" y="822960"/>
-            <a:ext cx="8229600" cy="1097280"/>
-          </a:xfrm>
-          <a:prstGeom prst="rect">
-            <a:avLst/>
-          </a:prstGeom>
-          <a:noFill/>
-          <a:ln/>
-        </p:spPr>
-        <p:txBody>
-          <a:bodyPr wrap="square" rtlCol="0" anchor="t"/>
-          <a:lstStyle/>
-          <a:p>
-            <a:pPr indent="0" marL="0">
-              <a:buNone/>
-            </a:pPr>
-            <a:r>
-              <a:rPr lang="en-US" sz="1800" dirty="0">
-                <a:solidFill>
-                  <a:srgbClr val="333333"/>
-                </a:solidFill>
-                <a:latin typeface="Open Sans" pitchFamily="34" charset="0"/>
-                <a:ea typeface="Open Sans" pitchFamily="34" charset="-122"/>
-                <a:cs typeface="Open Sans" pitchFamily="34" charset="-120"/>
-              </a:rPr>
-              <a:t>1. Open Research dashboard
-</a:t>
-            </a:r>
-            <a:pPr indent="0" marL="0">
-              <a:buNone/>
-            </a:pPr>
-            <a:r>
-              <a:rPr lang="en-US" sz="1800" dirty="0">
-                <a:solidFill>
-                  <a:srgbClr val="333333"/>
-                </a:solidFill>
-                <a:latin typeface="Open Sans" pitchFamily="34" charset="0"/>
-                <a:ea typeface="Open Sans" pitchFamily="34" charset="-122"/>
-                <a:cs typeface="Open Sans" pitchFamily="34" charset="-120"/>
-              </a:rPr>
-              <a:t>2. Run a conservative keyword search
-</a:t>
-            </a:r>
-            <a:pPr indent="0" marL="0">
-              <a:buNone/>
-            </a:pPr>
-            <a:r>
-              <a:rPr lang="en-US" sz="1800" dirty="0">
-                <a:solidFill>
-                  <a:srgbClr val="333333"/>
-                </a:solidFill>
-                <a:latin typeface="Open Sans" pitchFamily="34" charset="0"/>
-                <a:ea typeface="Open Sans" pitchFamily="34" charset="-122"/>
-                <a:cs typeface="Open Sans" pitchFamily="34" charset="-120"/>
-              </a:rPr>
-              <a:t>3. Check 12-stage trace
-</a:t>
-            </a:r>
-            <a:pPr indent="0" marL="0">
-              <a:buNone/>
-            </a:pPr>
-            <a:r>
-              <a:rPr lang="en-US" sz="1800" dirty="0">
-                <a:solidFill>
-                  <a:srgbClr val="333333"/>
-                </a:solidFill>
-                <a:latin typeface="Open Sans" pitchFamily="34" charset="0"/>
-                <a:ea typeface="Open Sans" pitchFamily="34" charset="-122"/>
-                <a:cs typeface="Open Sans" pitchFamily="34" charset="-120"/>
-              </a:rPr>
-              <a:t>4. Inspect Ranked Papers and Paper Detail
-</a:t>
-            </a:r>
-            <a:pPr indent="0" marL="0">
-              <a:buNone/>
-            </a:pPr>
-            <a:r>
-              <a:rPr lang="en-US" sz="1800" dirty="0">
-                <a:solidFill>
-                  <a:srgbClr val="333333"/>
-                </a:solidFill>
-                <a:latin typeface="Open Sans" pitchFamily="34" charset="0"/>
-                <a:ea typeface="Open Sans" pitchFamily="34" charset="-122"/>
-                <a:cs typeface="Open Sans" pitchFamily="34" charset="-120"/>
-              </a:rPr>
-              <a:t>5. Download CSV / Markdown / XLSX / PDF
-</a:t>
-            </a:r>
-            <a:pPr indent="0" marL="0">
-              <a:buNone/>
-            </a:pPr>
-            <a:r>
-              <a:rPr lang="en-US" sz="1800" dirty="0">
-                <a:solidFill>
-                  <a:srgbClr val="333333"/>
-                </a:solidFill>
-                <a:latin typeface="Open Sans" pitchFamily="34" charset="0"/>
-                <a:ea typeface="Open Sans" pitchFamily="34" charset="-122"/>
-                <a:cs typeface="Open Sans" pitchFamily="34" charset="-120"/>
-              </a:rPr>
-              <a:t>6. Open Ops diagnostics
-</a:t>
-            </a:r>
-            <a:pPr indent="0" marL="0">
-              <a:buNone/>
-            </a:pPr>
-            <a:r>
-              <a:rPr lang="en-US" sz="1800" dirty="0">
-                <a:solidFill>
-                  <a:srgbClr val="333333"/>
-                </a:solidFill>
-                <a:latin typeface="Open Sans" pitchFamily="34" charset="0"/>
-                <a:ea typeface="Open Sans" pitchFamily="34" charset="-122"/>
-                <a:cs typeface="Open Sans" pitchFamily="34" charset="-120"/>
-              </a:rPr>
-              <a:t>7. Open Evaluation benchmark snapshot</a:t>
-            </a:r>
-            <a:endParaRPr lang="en-US" sz="1800" dirty="0"/>
-          </a:p>
-        </p:txBody>
-      </p:sp>
-      <p:sp>
-        <p:nvSpPr>
-          <p:cNvPr id="4" name="Text 2"/>
-          <p:cNvSpPr/>
-          <p:nvPr/>
-        </p:nvSpPr>
-        <p:spPr>
-          <a:xfrm>
-            <a:off x="457200" y="2011680"/>
-            <a:ext cx="8229600" cy="1097280"/>
-          </a:xfrm>
-          <a:prstGeom prst="rect">
-            <a:avLst/>
-          </a:prstGeom>
-          <a:noFill/>
-          <a:ln/>
-        </p:spPr>
-        <p:txBody>
-          <a:bodyPr wrap="square" rtlCol="0" anchor="t"/>
-          <a:lstStyle/>
-          <a:p>
-            <a:pPr indent="0" marL="0">
-              <a:buNone/>
-            </a:pPr>
-            <a:r>
-              <a:rPr lang="en-US" sz="1800" dirty="0">
-                <a:solidFill>
-                  <a:srgbClr val="333333"/>
-                </a:solidFill>
-                <a:latin typeface="Open Sans" pitchFamily="34" charset="0"/>
-                <a:ea typeface="Open Sans" pitchFamily="34" charset="-122"/>
-                <a:cs typeface="Open Sans" pitchFamily="34" charset="-120"/>
-              </a:rPr>
-              <a:t>Fallback:</a:t>
-            </a:r>
-            <a:endParaRPr lang="en-US" sz="1800" dirty="0"/>
-          </a:p>
-        </p:txBody>
-      </p:sp>
-      <p:sp>
-        <p:nvSpPr>
-          <p:cNvPr id="5" name="Text 3"/>
-          <p:cNvSpPr/>
-          <p:nvPr/>
-        </p:nvSpPr>
-        <p:spPr>
-          <a:xfrm>
-            <a:off x="457200" y="3200400"/>
-            <a:ext cx="8229600" cy="365760"/>
-          </a:xfrm>
-          <a:prstGeom prst="rect">
-            <a:avLst/>
-          </a:prstGeom>
-          <a:noFill/>
-          <a:ln/>
-        </p:spPr>
-        <p:txBody>
-          <a:bodyPr wrap="square" rtlCol="0" anchor="t"/>
-          <a:lstStyle/>
-          <a:p>
-            <a:pPr>
-              <a:spcBef>
-                <a:spcPts val="600"/>
-              </a:spcBef>
-              <a:spcAft>
-                <a:spcPts val="300"/>
-              </a:spcAft>
-            </a:pPr>
-            <a:r>
-              <a:rPr lang="en-US" sz="1800" dirty="0">
-                <a:solidFill>
-                  <a:srgbClr val="333333"/>
-                </a:solidFill>
-                <a:latin typeface="Open Sans" pitchFamily="34" charset="0"/>
-                <a:ea typeface="Open Sans" pitchFamily="34" charset="-122"/>
-                <a:cs typeface="Open Sans" pitchFamily="34" charset="-120"/>
-              </a:rPr>
-              <a:t>Use latest completed job ID if provider quota or network latency occurs.</a:t>
-            </a:r>
-            <a:endParaRPr lang="en-US" sz="1800" dirty="0"/>
+              <a:t>5. Evaluation &amp; Results</a:t>
+            </a:r>
+            <a:endParaRPr lang="en-US" sz="3600" dirty="0"/>
           </a:p>
         </p:txBody>
       </p:sp>
@@ -3459,41 +3335,14 @@
       </p:grpSpPr>
       <p:sp>
         <p:nvSpPr>
-          <p:cNvPr id="2" name="Shape 0"/>
+          <p:cNvPr id="2" name="Text 0"/>
           <p:cNvSpPr/>
           <p:nvPr/>
         </p:nvSpPr>
         <p:spPr>
           <a:xfrm>
-            <a:off x="0" y="0"/>
-            <a:ext cx="9144000" cy="5143500"/>
-          </a:xfrm>
-          <a:prstGeom prst="rect">
-            <a:avLst/>
-          </a:prstGeom>
-          <a:solidFill>
-            <a:srgbClr val="6A653A"/>
-          </a:solidFill>
-          <a:ln/>
-          <a:effectLst>
-            <a:outerShdw sx="100000" sy="100000" kx="0" ky="0" algn="bl" rotWithShape="0" blurRad="50800" dist="25400" dir="5400000">
-              <a:srgbClr val="000000">
-                <a:alpha val="35000"/>
-              </a:srgbClr>
-            </a:outerShdw>
-          </a:effectLst>
-        </p:spPr>
-      </p:sp>
-      <p:sp>
-        <p:nvSpPr>
-          <p:cNvPr id="3" name="Text 1"/>
-          <p:cNvSpPr/>
-          <p:nvPr/>
-        </p:nvSpPr>
-        <p:spPr>
-          <a:xfrm>
-            <a:off x="457200" y="1828800"/>
-            <a:ext cx="8229600" cy="914400"/>
+            <a:off x="457200" y="182880"/>
+            <a:ext cx="8229600" cy="548640"/>
           </a:xfrm>
           <a:prstGeom prst="rect">
             <a:avLst/>
@@ -3505,21 +3354,165 @@
           <a:bodyPr wrap="square" rtlCol="0" anchor="ctr"/>
           <a:lstStyle/>
           <a:p>
-            <a:pPr algn="ctr" indent="0" marL="0">
+            <a:pPr indent="0" marL="0">
               <a:buNone/>
             </a:pPr>
             <a:r>
-              <a:rPr lang="en-US" sz="3600" b="1" dirty="0">
-                <a:solidFill>
-                  <a:srgbClr val="FFFFFF"/>
+              <a:rPr lang="en-US" sz="2800" b="1" dirty="0">
+                <a:solidFill>
+                  <a:srgbClr val="003366"/>
                 </a:solidFill>
                 <a:latin typeface="Raleway" pitchFamily="34" charset="0"/>
                 <a:ea typeface="Raleway" pitchFamily="34" charset="-122"/>
                 <a:cs typeface="Raleway" pitchFamily="34" charset="-120"/>
               </a:rPr>
-              <a:t>5. Benchmark</a:t>
-            </a:r>
-            <a:endParaRPr lang="en-US" sz="3600" dirty="0"/>
+              <a:t>Paper-Agent-Bench</a:t>
+            </a:r>
+            <a:endParaRPr lang="en-US" sz="2800" dirty="0"/>
+          </a:p>
+        </p:txBody>
+      </p:sp>
+      <p:sp>
+        <p:nvSpPr>
+          <p:cNvPr id="3" name="Text 1"/>
+          <p:cNvSpPr/>
+          <p:nvPr/>
+        </p:nvSpPr>
+        <p:spPr>
+          <a:xfrm>
+            <a:off x="457200" y="822960"/>
+            <a:ext cx="8229600" cy="1097280"/>
+          </a:xfrm>
+          <a:prstGeom prst="rect">
+            <a:avLst/>
+          </a:prstGeom>
+          <a:noFill/>
+          <a:ln/>
+        </p:spPr>
+        <p:txBody>
+          <a:bodyPr wrap="square" rtlCol="0" anchor="t"/>
+          <a:lstStyle/>
+          <a:p>
+            <a:pPr>
+              <a:spcBef>
+                <a:spcPts val="600"/>
+              </a:spcBef>
+              <a:spcAft>
+                <a:spcPts val="300"/>
+              </a:spcAft>
+            </a:pPr>
+            <a:r>
+              <a:rPr lang="en-US" sz="1800" b="1" dirty="0">
+                <a:solidFill>
+                  <a:srgbClr val="333333"/>
+                </a:solidFill>
+                <a:latin typeface="Open Sans" pitchFamily="34" charset="0"/>
+                <a:ea typeface="Open Sans" pitchFamily="34" charset="-122"/>
+                <a:cs typeface="Open Sans" pitchFamily="34" charset="-120"/>
+              </a:rPr>
+              <a:t>Reproduction</a:t>
+            </a:r>
+            <a:pPr indent="0" marL="0">
+              <a:buNone/>
+            </a:pPr>
+            <a:r>
+              <a:rPr lang="en-US" sz="1800" dirty="0">
+                <a:solidFill>
+                  <a:srgbClr val="333333"/>
+                </a:solidFill>
+                <a:latin typeface="Open Sans" pitchFamily="34" charset="0"/>
+                <a:ea typeface="Open Sans" pitchFamily="34" charset="-122"/>
+                <a:cs typeface="Open Sans" pitchFamily="34" charset="-120"/>
+              </a:rPr>
+              <a:t>: 저장소 기반의 엄격한 벤치마크 (20 Tasks)</a:t>
+            </a:r>
+            <a:endParaRPr lang="en-US" sz="1800" dirty="0"/>
+          </a:p>
+          <a:p>
+            <a:pPr>
+              <a:spcBef>
+                <a:spcPts val="600"/>
+              </a:spcBef>
+              <a:spcAft>
+                <a:spcPts val="300"/>
+              </a:spcAft>
+            </a:pPr>
+            <a:r>
+              <a:rPr lang="en-US" sz="1800" b="1" dirty="0">
+                <a:solidFill>
+                  <a:srgbClr val="333333"/>
+                </a:solidFill>
+                <a:latin typeface="Open Sans" pitchFamily="34" charset="0"/>
+                <a:ea typeface="Open Sans" pitchFamily="34" charset="-122"/>
+                <a:cs typeface="Open Sans" pitchFamily="34" charset="-120"/>
+              </a:rPr>
+              <a:t>Integrity</a:t>
+            </a:r>
+            <a:pPr indent="0" marL="0">
+              <a:buNone/>
+            </a:pPr>
+            <a:r>
+              <a:rPr lang="en-US" sz="1800" dirty="0">
+                <a:solidFill>
+                  <a:srgbClr val="333333"/>
+                </a:solidFill>
+                <a:latin typeface="Open Sans" pitchFamily="34" charset="0"/>
+                <a:ea typeface="Open Sans" pitchFamily="34" charset="-122"/>
+                <a:cs typeface="Open Sans" pitchFamily="34" charset="-120"/>
+              </a:rPr>
+              <a:t>: DOI 기반 Gold Label 매칭 및 자동 감사 스크립트 실행</a:t>
+            </a:r>
+            <a:endParaRPr lang="en-US" sz="1800" dirty="0"/>
+          </a:p>
+          <a:p>
+            <a:pPr>
+              <a:spcBef>
+                <a:spcPts val="600"/>
+              </a:spcBef>
+              <a:spcAft>
+                <a:spcPts val="300"/>
+              </a:spcAft>
+            </a:pPr>
+            <a:r>
+              <a:rPr lang="en-US" sz="1800" b="1" dirty="0">
+                <a:solidFill>
+                  <a:srgbClr val="333333"/>
+                </a:solidFill>
+                <a:latin typeface="Open Sans" pitchFamily="34" charset="0"/>
+                <a:ea typeface="Open Sans" pitchFamily="34" charset="-122"/>
+                <a:cs typeface="Open Sans" pitchFamily="34" charset="-120"/>
+              </a:rPr>
+              <a:t>Metrics</a:t>
+            </a:r>
+            <a:pPr indent="0" marL="0">
+              <a:buNone/>
+            </a:pPr>
+            <a:r>
+              <a:rPr lang="en-US" sz="1800" dirty="0">
+                <a:solidFill>
+                  <a:srgbClr val="333333"/>
+                </a:solidFill>
+                <a:latin typeface="Open Sans" pitchFamily="34" charset="0"/>
+                <a:ea typeface="Open Sans" pitchFamily="34" charset="-122"/>
+                <a:cs typeface="Open Sans" pitchFamily="34" charset="-120"/>
+              </a:rPr>
+              <a:t>: Precision@5, NDCG@5, </a:t>
+            </a:r>
+            <a:pPr indent="0" marL="0">
+              <a:buNone/>
+            </a:pPr>
+            <a:r>
+              <a:rPr lang="en-US" sz="1800" b="1" dirty="0">
+                <a:solidFill>
+                  <a:srgbClr val="333333"/>
+                </a:solidFill>
+                <a:latin typeface="Open Sans" pitchFamily="34" charset="0"/>
+                <a:ea typeface="Open Sans" pitchFamily="34" charset="-122"/>
+                <a:cs typeface="Open Sans" pitchFamily="34" charset="-120"/>
+              </a:rPr>
+              <a:t>Top-Journal Precision</a:t>
+            </a:r>
+            <a:endParaRPr lang="en-US" sz="1800" dirty="0"/>
           </a:p>
         </p:txBody>
       </p:sp>
@@ -3581,7 +3574,7 @@
                 <a:ea typeface="Raleway" pitchFamily="34" charset="-122"/>
                 <a:cs typeface="Raleway" pitchFamily="34" charset="-120"/>
               </a:rPr>
-              <a:t>Evaluation Design</a:t>
+              <a:t>Results: Proposed vs Single-LLM</a:t>
             </a:r>
             <a:endParaRPr lang="en-US" sz="2800" dirty="0"/>
           </a:p>
@@ -3620,7 +3613,7 @@
                 <a:ea typeface="Open Sans" pitchFamily="34" charset="-122"/>
                 <a:cs typeface="Open Sans" pitchFamily="34" charset="-120"/>
               </a:rPr>
-              <a:t>Benchmark assets are repository-controlled.</a:t>
+              <a:t>T001-T003 제어 레이어 결과:</a:t>
             </a:r>
             <a:endParaRPr lang="en-US" sz="1800" dirty="0"/>
           </a:p>
@@ -3635,7 +3628,7 @@
         <p:spPr>
           <a:xfrm>
             <a:off x="457200" y="2011680"/>
-            <a:ext cx="8229600" cy="2194560"/>
+            <a:ext cx="8229600" cy="1097280"/>
           </a:xfrm>
           <a:prstGeom prst="rect">
             <a:avLst/>
@@ -3656,7 +3649,7 @@
               </a:spcAft>
             </a:pPr>
             <a:r>
-              <a:rPr lang="en-US" sz="1800" dirty="0">
+              <a:rPr lang="en-US" sz="1800" b="1" dirty="0">
                 <a:solidFill>
                   <a:srgbClr val="333333"/>
                 </a:solidFill>
@@ -3664,7 +3657,49 @@
                 <a:ea typeface="Open Sans" pitchFamily="34" charset="-122"/>
                 <a:cs typeface="Open Sans" pitchFamily="34" charset="-120"/>
               </a:rPr>
-              <a:t>20 task structure</a:t>
+              <a:t>Proposed Agent</a:t>
+            </a:r>
+            <a:pPr indent="0" marL="0">
+              <a:buNone/>
+            </a:pPr>
+            <a:r>
+              <a:rPr lang="en-US" sz="1800" dirty="0">
+                <a:solidFill>
+                  <a:srgbClr val="333333"/>
+                </a:solidFill>
+                <a:latin typeface="Open Sans" pitchFamily="34" charset="0"/>
+                <a:ea typeface="Open Sans" pitchFamily="34" charset="-122"/>
+                <a:cs typeface="Open Sans" pitchFamily="34" charset="-120"/>
+              </a:rPr>
+              <a:t>: </a:t>
+            </a:r>
+            <a:pPr indent="0" marL="0">
+              <a:buNone/>
+            </a:pPr>
+            <a:r>
+              <a:rPr lang="en-US" sz="1800" b="1" dirty="0">
+                <a:solidFill>
+                  <a:srgbClr val="333333"/>
+                </a:solidFill>
+                <a:latin typeface="Open Sans" pitchFamily="34" charset="0"/>
+                <a:ea typeface="Open Sans" pitchFamily="34" charset="-122"/>
+                <a:cs typeface="Open Sans" pitchFamily="34" charset="-120"/>
+              </a:rPr>
+              <a:t>100% Top-Journal Precision</a:t>
+            </a:r>
+            <a:pPr indent="0" marL="0">
+              <a:buNone/>
+            </a:pPr>
+            <a:r>
+              <a:rPr lang="en-US" sz="1800" dirty="0">
+                <a:solidFill>
+                  <a:srgbClr val="333333"/>
+                </a:solidFill>
+                <a:latin typeface="Open Sans" pitchFamily="34" charset="0"/>
+                <a:ea typeface="Open Sans" pitchFamily="34" charset="-122"/>
+                <a:cs typeface="Open Sans" pitchFamily="34" charset="-120"/>
+              </a:rPr>
+              <a:t>, 100% DOI Presence</a:t>
             </a:r>
             <a:endParaRPr lang="en-US" sz="1800" dirty="0"/>
           </a:p>
@@ -3678,7 +3713,7 @@
               </a:spcAft>
             </a:pPr>
             <a:r>
-              <a:rPr lang="en-US" sz="1800" dirty="0">
+              <a:rPr lang="en-US" sz="1800" b="1" dirty="0">
                 <a:solidFill>
                   <a:srgbClr val="333333"/>
                 </a:solidFill>
@@ -3686,7 +3721,21 @@
                 <a:ea typeface="Open Sans" pitchFamily="34" charset="-122"/>
                 <a:cs typeface="Open Sans" pitchFamily="34" charset="-120"/>
               </a:rPr>
-              <a:t>DOI-backed gold labels</a:t>
+              <a:t>Single-LLM</a:t>
+            </a:r>
+            <a:pPr indent="0" marL="0">
+              <a:buNone/>
+            </a:pPr>
+            <a:r>
+              <a:rPr lang="en-US" sz="1800" dirty="0">
+                <a:solidFill>
+                  <a:srgbClr val="333333"/>
+                </a:solidFill>
+                <a:latin typeface="Open Sans" pitchFamily="34" charset="0"/>
+                <a:ea typeface="Open Sans" pitchFamily="34" charset="-122"/>
+                <a:cs typeface="Open Sans" pitchFamily="34" charset="-120"/>
+              </a:rPr>
+              <a:t>: 높은 Overlap을 보이나 품질 준수율(93%) 및 실시간 검색 실행력 부재</a:t>
             </a:r>
             <a:endParaRPr lang="en-US" sz="1800" dirty="0"/>
           </a:p>
@@ -3700,7 +3749,7 @@
               </a:spcAft>
             </a:pPr>
             <a:r>
-              <a:rPr lang="en-US" sz="1800" dirty="0">
+              <a:rPr lang="en-US" sz="1800" b="1" dirty="0">
                 <a:solidFill>
                   <a:srgbClr val="333333"/>
                 </a:solidFill>
@@ -3708,18 +3757,10 @@
                 <a:ea typeface="Open Sans" pitchFamily="34" charset="-122"/>
                 <a:cs typeface="Open Sans" pitchFamily="34" charset="-120"/>
               </a:rPr>
-              <a:t>Rule-based baseline</a:t>
-            </a:r>
-            <a:endParaRPr lang="en-US" sz="1800" dirty="0"/>
-          </a:p>
-          <a:p>
-            <a:pPr>
-              <a:spcBef>
-                <a:spcPts val="600"/>
-              </a:spcBef>
-              <a:spcAft>
-                <a:spcPts val="300"/>
-              </a:spcAft>
+              <a:t>Core Claim</a:t>
+            </a:r>
+            <a:pPr indent="0" marL="0">
+              <a:buNone/>
             </a:pPr>
             <a:r>
               <a:rPr lang="en-US" sz="1800" dirty="0">
@@ -3730,21 +3771,13 @@
                 <a:ea typeface="Open Sans" pitchFamily="34" charset="-122"/>
                 <a:cs typeface="Open Sans" pitchFamily="34" charset="-120"/>
               </a:rPr>
-              <a:t>Single-LLM baseline</a:t>
-            </a:r>
-            <a:endParaRPr lang="en-US" sz="1800" dirty="0"/>
-          </a:p>
-          <a:p>
-            <a:pPr>
-              <a:spcBef>
-                <a:spcPts val="600"/>
-              </a:spcBef>
-              <a:spcAft>
-                <a:spcPts val="300"/>
-              </a:spcAft>
-            </a:pPr>
-            <a:r>
-              <a:rPr lang="en-US" sz="1800" dirty="0">
+              <a:t>: 본 시스템은 단순한 타이틀 나열이 아니라, </a:t>
+            </a:r>
+            <a:pPr indent="0" marL="0">
+              <a:buNone/>
+            </a:pPr>
+            <a:r>
+              <a:rPr lang="en-US" sz="1800" b="1" dirty="0">
                 <a:solidFill>
                   <a:srgbClr val="333333"/>
                 </a:solidFill>
@@ -3752,18 +3785,10 @@
                 <a:ea typeface="Open Sans" pitchFamily="34" charset="-122"/>
                 <a:cs typeface="Open Sans" pitchFamily="34" charset="-120"/>
               </a:rPr>
-              <a:t>Proposed Multi-Agent results</a:t>
-            </a:r>
-            <a:endParaRPr lang="en-US" sz="1800" dirty="0"/>
-          </a:p>
-          <a:p>
-            <a:pPr>
-              <a:spcBef>
-                <a:spcPts val="600"/>
-              </a:spcBef>
-              <a:spcAft>
-                <a:spcPts val="300"/>
-              </a:spcAft>
+              <a:t>검증 가능한 학술 워크플로우를 기록하고 집행</a:t>
+            </a:r>
+            <a:pPr indent="0" marL="0">
+              <a:buNone/>
             </a:pPr>
             <a:r>
               <a:rPr lang="en-US" sz="1800" dirty="0">
@@ -3774,46 +3799,7 @@
                 <a:ea typeface="Open Sans" pitchFamily="34" charset="-122"/>
                 <a:cs typeface="Open Sans" pitchFamily="34" charset="-120"/>
               </a:rPr>
-              <a:t>Reproducible scripts and CSV/JSON outputs</a:t>
-            </a:r>
-            <a:endParaRPr lang="en-US" sz="1800" dirty="0"/>
-          </a:p>
-        </p:txBody>
-      </p:sp>
-      <p:sp>
-        <p:nvSpPr>
-          <p:cNvPr id="5" name="Text 3"/>
-          <p:cNvSpPr/>
-          <p:nvPr/>
-        </p:nvSpPr>
-        <p:spPr>
-          <a:xfrm>
-            <a:off x="457200" y="4343400"/>
-            <a:ext cx="8229600" cy="228600"/>
-          </a:xfrm>
-          <a:prstGeom prst="rect">
-            <a:avLst/>
-          </a:prstGeom>
-          <a:noFill/>
-          <a:ln/>
-        </p:spPr>
-        <p:txBody>
-          <a:bodyPr wrap="square" rtlCol="0" anchor="t"/>
-          <a:lstStyle/>
-          <a:p>
-            <a:pPr indent="0" marL="0">
-              <a:buNone/>
-            </a:pPr>
-            <a:r>
-              <a:rPr lang="en-US" sz="1800" dirty="0">
-                <a:solidFill>
-                  <a:srgbClr val="333333"/>
-                </a:solidFill>
-                <a:latin typeface="Open Sans" pitchFamily="34" charset="0"/>
-                <a:ea typeface="Open Sans" pitchFamily="34" charset="-122"/>
-                <a:cs typeface="Open Sans" pitchFamily="34" charset="-120"/>
-              </a:rPr>
-              <a:t>Metrics:</a:t>
+              <a:t>합니다.</a:t>
             </a:r>
             <a:endParaRPr lang="en-US" sz="1800" dirty="0"/>
           </a:p>
@@ -3846,14 +3832,41 @@
       </p:grpSpPr>
       <p:sp>
         <p:nvSpPr>
-          <p:cNvPr id="2" name="Text 0"/>
+          <p:cNvPr id="2" name="Shape 0"/>
           <p:cNvSpPr/>
           <p:nvPr/>
         </p:nvSpPr>
         <p:spPr>
           <a:xfrm>
-            <a:off x="457200" y="182880"/>
-            <a:ext cx="8229600" cy="548640"/>
+            <a:off x="0" y="0"/>
+            <a:ext cx="9144000" cy="5143500"/>
+          </a:xfrm>
+          <a:prstGeom prst="rect">
+            <a:avLst/>
+          </a:prstGeom>
+          <a:solidFill>
+            <a:srgbClr val="6A653A"/>
+          </a:solidFill>
+          <a:ln/>
+          <a:effectLst>
+            <a:outerShdw sx="100000" sy="100000" kx="0" ky="0" algn="bl" rotWithShape="0" blurRad="50800" dist="25400" dir="5400000">
+              <a:srgbClr val="000000">
+                <a:alpha val="35000"/>
+              </a:srgbClr>
+            </a:outerShdw>
+          </a:effectLst>
+        </p:spPr>
+      </p:sp>
+      <p:sp>
+        <p:nvSpPr>
+          <p:cNvPr id="3" name="Text 1"/>
+          <p:cNvSpPr/>
+          <p:nvPr/>
+        </p:nvSpPr>
+        <p:spPr>
+          <a:xfrm>
+            <a:off x="457200" y="1828800"/>
+            <a:ext cx="8229600" cy="914400"/>
           </a:xfrm>
           <a:prstGeom prst="rect">
             <a:avLst/>
@@ -3865,187 +3878,21 @@
           <a:bodyPr wrap="square" rtlCol="0" anchor="ctr"/>
           <a:lstStyle/>
           <a:p>
-            <a:pPr indent="0" marL="0">
+            <a:pPr algn="ctr" indent="0" marL="0">
               <a:buNone/>
             </a:pPr>
             <a:r>
-              <a:rPr lang="en-US" sz="2800" b="1" dirty="0">
-                <a:solidFill>
-                  <a:srgbClr val="003366"/>
+              <a:rPr lang="en-US" sz="3600" b="1" dirty="0">
+                <a:solidFill>
+                  <a:srgbClr val="FFFFFF"/>
                 </a:solidFill>
                 <a:latin typeface="Raleway" pitchFamily="34" charset="0"/>
                 <a:ea typeface="Raleway" pitchFamily="34" charset="-122"/>
                 <a:cs typeface="Raleway" pitchFamily="34" charset="-120"/>
               </a:rPr>
-              <a:t>Claim Boundary</a:t>
-            </a:r>
-            <a:endParaRPr lang="en-US" sz="2800" dirty="0"/>
-          </a:p>
-        </p:txBody>
-      </p:sp>
-      <p:sp>
-        <p:nvSpPr>
-          <p:cNvPr id="3" name="Text 1"/>
-          <p:cNvSpPr/>
-          <p:nvPr/>
-        </p:nvSpPr>
-        <p:spPr>
-          <a:xfrm>
-            <a:off x="457200" y="822960"/>
-            <a:ext cx="8229600" cy="1097280"/>
-          </a:xfrm>
-          <a:prstGeom prst="rect">
-            <a:avLst/>
-          </a:prstGeom>
-          <a:noFill/>
-          <a:ln/>
-        </p:spPr>
-        <p:txBody>
-          <a:bodyPr wrap="square" rtlCol="0" anchor="t"/>
-          <a:lstStyle/>
-          <a:p>
-            <a:pPr indent="0" marL="0">
-              <a:buNone/>
-            </a:pPr>
-            <a:r>
-              <a:rPr lang="en-US" sz="1800" dirty="0">
-                <a:solidFill>
-                  <a:srgbClr val="333333"/>
-                </a:solidFill>
-                <a:latin typeface="Open Sans" pitchFamily="34" charset="0"/>
-                <a:ea typeface="Open Sans" pitchFamily="34" charset="-122"/>
-                <a:cs typeface="Open Sans" pitchFamily="34" charset="-120"/>
-              </a:rPr>
-              <a:t>Current safe claim:</a:t>
-            </a:r>
-            <a:endParaRPr lang="en-US" sz="1800" dirty="0"/>
-          </a:p>
-        </p:txBody>
-      </p:sp>
-      <p:sp>
-        <p:nvSpPr>
-          <p:cNvPr id="4" name="Text 2"/>
-          <p:cNvSpPr/>
-          <p:nvPr/>
-        </p:nvSpPr>
-        <p:spPr>
-          <a:xfrm>
-            <a:off x="457200" y="2011680"/>
-            <a:ext cx="8229600" cy="1097280"/>
-          </a:xfrm>
-          <a:prstGeom prst="rect">
-            <a:avLst/>
-          </a:prstGeom>
-          <a:noFill/>
-          <a:ln/>
-        </p:spPr>
-        <p:txBody>
-          <a:bodyPr wrap="square" rtlCol="0" anchor="t"/>
-          <a:lstStyle/>
-          <a:p>
-            <a:pPr>
-              <a:spcBef>
-                <a:spcPts val="600"/>
-              </a:spcBef>
-              <a:spcAft>
-                <a:spcPts val="300"/>
-              </a:spcAft>
-            </a:pPr>
-            <a:r>
-              <a:rPr lang="en-US" sz="1800" dirty="0">
-                <a:solidFill>
-                  <a:srgbClr val="333333"/>
-                </a:solidFill>
-                <a:latin typeface="Open Sans" pitchFamily="34" charset="0"/>
-                <a:ea typeface="Open Sans" pitchFamily="34" charset="-122"/>
-                <a:cs typeface="Open Sans" pitchFamily="34" charset="-120"/>
-              </a:rPr>
-              <a:t>The deployed prototype completes the search-to-report workflow.</a:t>
-            </a:r>
-            <a:endParaRPr lang="en-US" sz="1800" dirty="0"/>
-          </a:p>
-          <a:p>
-            <a:pPr>
-              <a:spcBef>
-                <a:spcPts val="600"/>
-              </a:spcBef>
-              <a:spcAft>
-                <a:spcPts val="300"/>
-              </a:spcAft>
-            </a:pPr>
-            <a:r>
-              <a:rPr lang="en-US" sz="1800" dirty="0">
-                <a:solidFill>
-                  <a:srgbClr val="333333"/>
-                </a:solidFill>
-                <a:latin typeface="Open Sans" pitchFamily="34" charset="0"/>
-                <a:ea typeface="Open Sans" pitchFamily="34" charset="-122"/>
-                <a:cs typeface="Open Sans" pitchFamily="34" charset="-120"/>
-              </a:rPr>
-              <a:t>T001-T003 comparison is reproducible from repository artifacts.</a:t>
-            </a:r>
-            <a:endParaRPr lang="en-US" sz="1800" dirty="0"/>
-          </a:p>
-          <a:p>
-            <a:pPr>
-              <a:spcBef>
-                <a:spcPts val="600"/>
-              </a:spcBef>
-              <a:spcAft>
-                <a:spcPts val="300"/>
-              </a:spcAft>
-            </a:pPr>
-            <a:r>
-              <a:rPr lang="en-US" sz="1800" dirty="0">
-                <a:solidFill>
-                  <a:srgbClr val="333333"/>
-                </a:solidFill>
-                <a:latin typeface="Open Sans" pitchFamily="34" charset="0"/>
-                <a:ea typeface="Open Sans" pitchFamily="34" charset="-122"/>
-                <a:cs typeface="Open Sans" pitchFamily="34" charset="-120"/>
-              </a:rPr>
-              <a:t>Full 20-task Proposed Agent runtime evaluation remains future work.</a:t>
-            </a:r>
-            <a:endParaRPr lang="en-US" sz="1800" dirty="0"/>
-          </a:p>
-        </p:txBody>
-      </p:sp>
-      <p:sp>
-        <p:nvSpPr>
-          <p:cNvPr id="5" name="Text 3"/>
-          <p:cNvSpPr/>
-          <p:nvPr/>
-        </p:nvSpPr>
-        <p:spPr>
-          <a:xfrm>
-            <a:off x="457200" y="3246120"/>
-            <a:ext cx="8229600" cy="1097280"/>
-          </a:xfrm>
-          <a:prstGeom prst="rect">
-            <a:avLst/>
-          </a:prstGeom>
-          <a:noFill/>
-          <a:ln/>
-        </p:spPr>
-        <p:txBody>
-          <a:bodyPr wrap="square" rtlCol="0" anchor="t"/>
-          <a:lstStyle/>
-          <a:p>
-            <a:pPr indent="0" marL="0">
-              <a:buNone/>
-            </a:pPr>
-            <a:r>
-              <a:rPr lang="en-US" sz="1800" dirty="0">
-                <a:solidFill>
-                  <a:srgbClr val="333333"/>
-                </a:solidFill>
-                <a:latin typeface="Open Sans" pitchFamily="34" charset="0"/>
-                <a:ea typeface="Open Sans" pitchFamily="34" charset="-122"/>
-                <a:cs typeface="Open Sans" pitchFamily="34" charset="-120"/>
-              </a:rPr>
-              <a:t>Do not claim universal outperformance until the full benchmark supports it.</a:t>
-            </a:r>
-            <a:endParaRPr lang="en-US" sz="1800" dirty="0"/>
+              <a:t>6. Limitations And Ethics</a:t>
+            </a:r>
+            <a:endParaRPr lang="en-US" sz="3600" dirty="0"/>
           </a:p>
         </p:txBody>
       </p:sp>
@@ -4076,41 +3923,14 @@
       </p:grpSpPr>
       <p:sp>
         <p:nvSpPr>
-          <p:cNvPr id="2" name="Shape 0"/>
+          <p:cNvPr id="2" name="Text 0"/>
           <p:cNvSpPr/>
           <p:nvPr/>
         </p:nvSpPr>
         <p:spPr>
           <a:xfrm>
-            <a:off x="0" y="0"/>
-            <a:ext cx="9144000" cy="5143500"/>
-          </a:xfrm>
-          <a:prstGeom prst="rect">
-            <a:avLst/>
-          </a:prstGeom>
-          <a:solidFill>
-            <a:srgbClr val="6A653A"/>
-          </a:solidFill>
-          <a:ln/>
-          <a:effectLst>
-            <a:outerShdw sx="100000" sy="100000" kx="0" ky="0" algn="bl" rotWithShape="0" blurRad="50800" dist="25400" dir="5400000">
-              <a:srgbClr val="000000">
-                <a:alpha val="35000"/>
-              </a:srgbClr>
-            </a:outerShdw>
-          </a:effectLst>
-        </p:spPr>
-      </p:sp>
-      <p:sp>
-        <p:nvSpPr>
-          <p:cNvPr id="3" name="Text 1"/>
-          <p:cNvSpPr/>
-          <p:nvPr/>
-        </p:nvSpPr>
-        <p:spPr>
-          <a:xfrm>
-            <a:off x="457200" y="1828800"/>
-            <a:ext cx="8229600" cy="914400"/>
+            <a:off x="457200" y="182880"/>
+            <a:ext cx="8229600" cy="548640"/>
           </a:xfrm>
           <a:prstGeom prst="rect">
             <a:avLst/>
@@ -4122,21 +3942,151 @@
           <a:bodyPr wrap="square" rtlCol="0" anchor="ctr"/>
           <a:lstStyle/>
           <a:p>
-            <a:pPr algn="ctr" indent="0" marL="0">
+            <a:pPr indent="0" marL="0">
               <a:buNone/>
             </a:pPr>
             <a:r>
-              <a:rPr lang="en-US" sz="3600" b="1" dirty="0">
-                <a:solidFill>
-                  <a:srgbClr val="FFFFFF"/>
+              <a:rPr lang="en-US" sz="2800" b="1" dirty="0">
+                <a:solidFill>
+                  <a:srgbClr val="003366"/>
                 </a:solidFill>
                 <a:latin typeface="Raleway" pitchFamily="34" charset="0"/>
                 <a:ea typeface="Raleway" pitchFamily="34" charset="-122"/>
                 <a:cs typeface="Raleway" pitchFamily="34" charset="-120"/>
               </a:rPr>
-              <a:t>6. Limitations And Ethics</a:t>
-            </a:r>
-            <a:endParaRPr lang="en-US" sz="3600" dirty="0"/>
+              <a:t>Algorithmic Gatekeeping</a:t>
+            </a:r>
+            <a:endParaRPr lang="en-US" sz="2800" dirty="0"/>
+          </a:p>
+        </p:txBody>
+      </p:sp>
+      <p:sp>
+        <p:nvSpPr>
+          <p:cNvPr id="3" name="Text 1"/>
+          <p:cNvSpPr/>
+          <p:nvPr/>
+        </p:nvSpPr>
+        <p:spPr>
+          <a:xfrm>
+            <a:off x="457200" y="822960"/>
+            <a:ext cx="8229600" cy="1097280"/>
+          </a:xfrm>
+          <a:prstGeom prst="rect">
+            <a:avLst/>
+          </a:prstGeom>
+          <a:noFill/>
+          <a:ln/>
+        </p:spPr>
+        <p:txBody>
+          <a:bodyPr wrap="square" rtlCol="0" anchor="t"/>
+          <a:lstStyle/>
+          <a:p>
+            <a:pPr>
+              <a:spcBef>
+                <a:spcPts val="600"/>
+              </a:spcBef>
+              <a:spcAft>
+                <a:spcPts val="300"/>
+              </a:spcAft>
+            </a:pPr>
+            <a:r>
+              <a:rPr lang="en-US" sz="1800" b="1" dirty="0">
+                <a:solidFill>
+                  <a:srgbClr val="333333"/>
+                </a:solidFill>
+                <a:latin typeface="Open Sans" pitchFamily="34" charset="0"/>
+                <a:ea typeface="Open Sans" pitchFamily="34" charset="-122"/>
+                <a:cs typeface="Open Sans" pitchFamily="34" charset="-120"/>
+              </a:rPr>
+              <a:t>Selection Bias</a:t>
+            </a:r>
+            <a:pPr indent="0" marL="0">
+              <a:buNone/>
+            </a:pPr>
+            <a:r>
+              <a:rPr lang="en-US" sz="1800" dirty="0">
+                <a:solidFill>
+                  <a:srgbClr val="333333"/>
+                </a:solidFill>
+                <a:latin typeface="Open Sans" pitchFamily="34" charset="0"/>
+                <a:ea typeface="Open Sans" pitchFamily="34" charset="-122"/>
+                <a:cs typeface="Open Sans" pitchFamily="34" charset="-120"/>
+              </a:rPr>
+              <a:t>: 승인된 저널 리스트(Allowlist) 외부의 신규/학간 연구 배제 가능성</a:t>
+            </a:r>
+            <a:endParaRPr lang="en-US" sz="1800" dirty="0"/>
+          </a:p>
+          <a:p>
+            <a:pPr>
+              <a:spcBef>
+                <a:spcPts val="600"/>
+              </a:spcBef>
+              <a:spcAft>
+                <a:spcPts val="300"/>
+              </a:spcAft>
+            </a:pPr>
+            <a:r>
+              <a:rPr lang="en-US" sz="1800" b="1" dirty="0">
+                <a:solidFill>
+                  <a:srgbClr val="333333"/>
+                </a:solidFill>
+                <a:latin typeface="Open Sans" pitchFamily="34" charset="0"/>
+                <a:ea typeface="Open Sans" pitchFamily="34" charset="-122"/>
+                <a:cs typeface="Open Sans" pitchFamily="34" charset="-120"/>
+              </a:rPr>
+              <a:t>AI Critic Bias</a:t>
+            </a:r>
+            <a:pPr indent="0" marL="0">
+              <a:buNone/>
+            </a:pPr>
+            <a:r>
+              <a:rPr lang="en-US" sz="1800" dirty="0">
+                <a:solidFill>
+                  <a:srgbClr val="333333"/>
+                </a:solidFill>
+                <a:latin typeface="Open Sans" pitchFamily="34" charset="0"/>
+                <a:ea typeface="Open Sans" pitchFamily="34" charset="-122"/>
+                <a:cs typeface="Open Sans" pitchFamily="34" charset="-120"/>
+              </a:rPr>
+              <a:t>: 정성적 평가 에이전트의 판단 기준에 대한 지속적 모니터링 필요</a:t>
+            </a:r>
+            <a:endParaRPr lang="en-US" sz="1800" dirty="0"/>
+          </a:p>
+          <a:p>
+            <a:pPr>
+              <a:spcBef>
+                <a:spcPts val="600"/>
+              </a:spcBef>
+              <a:spcAft>
+                <a:spcPts val="300"/>
+              </a:spcAft>
+            </a:pPr>
+            <a:r>
+              <a:rPr lang="en-US" sz="1800" b="1" dirty="0">
+                <a:solidFill>
+                  <a:srgbClr val="333333"/>
+                </a:solidFill>
+                <a:latin typeface="Open Sans" pitchFamily="34" charset="0"/>
+                <a:ea typeface="Open Sans" pitchFamily="34" charset="-122"/>
+                <a:cs typeface="Open Sans" pitchFamily="34" charset="-120"/>
+              </a:rPr>
+              <a:t>Ethical Guideline</a:t>
+            </a:r>
+            <a:pPr indent="0" marL="0">
+              <a:buNone/>
+            </a:pPr>
+            <a:r>
+              <a:rPr lang="en-US" sz="1800" dirty="0">
+                <a:solidFill>
+                  <a:srgbClr val="333333"/>
+                </a:solidFill>
+                <a:latin typeface="Open Sans" pitchFamily="34" charset="0"/>
+                <a:ea typeface="Open Sans" pitchFamily="34" charset="-122"/>
+                <a:cs typeface="Open Sans" pitchFamily="34" charset="-120"/>
+              </a:rPr>
+              <a:t>: 본 도구는 의사결정 지원 도구이며, 인간의 비판적 읽기를 대체할 수 없음.</a:t>
+            </a:r>
+            <a:endParaRPr lang="en-US" sz="1800" dirty="0"/>
           </a:p>
         </p:txBody>
       </p:sp>
@@ -4167,14 +4117,41 @@
       </p:grpSpPr>
       <p:sp>
         <p:nvSpPr>
-          <p:cNvPr id="2" name="Text 0"/>
+          <p:cNvPr id="2" name="Shape 0"/>
           <p:cNvSpPr/>
           <p:nvPr/>
         </p:nvSpPr>
         <p:spPr>
           <a:xfrm>
-            <a:off x="457200" y="182880"/>
-            <a:ext cx="8229600" cy="548640"/>
+            <a:off x="0" y="0"/>
+            <a:ext cx="9144000" cy="5143500"/>
+          </a:xfrm>
+          <a:prstGeom prst="rect">
+            <a:avLst/>
+          </a:prstGeom>
+          <a:solidFill>
+            <a:srgbClr val="6A653A"/>
+          </a:solidFill>
+          <a:ln/>
+          <a:effectLst>
+            <a:outerShdw sx="100000" sy="100000" kx="0" ky="0" algn="bl" rotWithShape="0" blurRad="50800" dist="25400" dir="5400000">
+              <a:srgbClr val="000000">
+                <a:alpha val="35000"/>
+              </a:srgbClr>
+            </a:outerShdw>
+          </a:effectLst>
+        </p:spPr>
+      </p:sp>
+      <p:sp>
+        <p:nvSpPr>
+          <p:cNvPr id="3" name="Text 1"/>
+          <p:cNvSpPr/>
+          <p:nvPr/>
+        </p:nvSpPr>
+        <p:spPr>
+          <a:xfrm>
+            <a:off x="457200" y="1828800"/>
+            <a:ext cx="8229600" cy="914400"/>
           </a:xfrm>
           <a:prstGeom prst="rect">
             <a:avLst/>
@@ -4186,175 +4163,21 @@
           <a:bodyPr wrap="square" rtlCol="0" anchor="ctr"/>
           <a:lstStyle/>
           <a:p>
-            <a:pPr indent="0" marL="0">
+            <a:pPr algn="ctr" indent="0" marL="0">
               <a:buNone/>
             </a:pPr>
             <a:r>
-              <a:rPr lang="en-US" sz="2800" b="1" dirty="0">
-                <a:solidFill>
-                  <a:srgbClr val="003366"/>
+              <a:rPr lang="en-US" sz="3600" b="1" dirty="0">
+                <a:solidFill>
+                  <a:srgbClr val="FFFFFF"/>
                 </a:solidFill>
                 <a:latin typeface="Raleway" pitchFamily="34" charset="0"/>
                 <a:ea typeface="Raleway" pitchFamily="34" charset="-122"/>
                 <a:cs typeface="Raleway" pitchFamily="34" charset="-120"/>
               </a:rPr>
-              <a:t>Known Limitations</a:t>
-            </a:r>
-            <a:endParaRPr lang="en-US" sz="2800" dirty="0"/>
-          </a:p>
-        </p:txBody>
-      </p:sp>
-      <p:sp>
-        <p:nvSpPr>
-          <p:cNvPr id="3" name="Text 1"/>
-          <p:cNvSpPr/>
-          <p:nvPr/>
-        </p:nvSpPr>
-        <p:spPr>
-          <a:xfrm>
-            <a:off x="457200" y="822960"/>
-            <a:ext cx="8229600" cy="2194560"/>
-          </a:xfrm>
-          <a:prstGeom prst="rect">
-            <a:avLst/>
-          </a:prstGeom>
-          <a:noFill/>
-          <a:ln/>
-        </p:spPr>
-        <p:txBody>
-          <a:bodyPr wrap="square" rtlCol="0" anchor="t"/>
-          <a:lstStyle/>
-          <a:p>
-            <a:pPr>
-              <a:spcBef>
-                <a:spcPts val="600"/>
-              </a:spcBef>
-              <a:spcAft>
-                <a:spcPts val="300"/>
-              </a:spcAft>
-            </a:pPr>
-            <a:r>
-              <a:rPr lang="en-US" sz="1800" dirty="0">
-                <a:solidFill>
-                  <a:srgbClr val="333333"/>
-                </a:solidFill>
-                <a:latin typeface="Open Sans" pitchFamily="34" charset="0"/>
-                <a:ea typeface="Open Sans" pitchFamily="34" charset="-122"/>
-                <a:cs typeface="Open Sans" pitchFamily="34" charset="-120"/>
-              </a:rPr>
-              <a:t>External provider quota and availability</a:t>
-            </a:r>
-            <a:endParaRPr lang="en-US" sz="1800" dirty="0"/>
-          </a:p>
-          <a:p>
-            <a:pPr>
-              <a:spcBef>
-                <a:spcPts val="600"/>
-              </a:spcBef>
-              <a:spcAft>
-                <a:spcPts val="300"/>
-              </a:spcAft>
-            </a:pPr>
-            <a:r>
-              <a:rPr lang="en-US" sz="1800" dirty="0">
-                <a:solidFill>
-                  <a:srgbClr val="333333"/>
-                </a:solidFill>
-                <a:latin typeface="Open Sans" pitchFamily="34" charset="0"/>
-                <a:ea typeface="Open Sans" pitchFamily="34" charset="-122"/>
-                <a:cs typeface="Open Sans" pitchFamily="34" charset="-120"/>
-              </a:rPr>
-              <a:t>Metadata or DOI mismatch</a:t>
-            </a:r>
-            <a:endParaRPr lang="en-US" sz="1800" dirty="0"/>
-          </a:p>
-          <a:p>
-            <a:pPr>
-              <a:spcBef>
-                <a:spcPts val="600"/>
-              </a:spcBef>
-              <a:spcAft>
-                <a:spcPts val="300"/>
-              </a:spcAft>
-            </a:pPr>
-            <a:r>
-              <a:rPr lang="en-US" sz="1800" dirty="0">
-                <a:solidFill>
-                  <a:srgbClr val="333333"/>
-                </a:solidFill>
-                <a:latin typeface="Open Sans" pitchFamily="34" charset="0"/>
-                <a:ea typeface="Open Sans" pitchFamily="34" charset="-122"/>
-                <a:cs typeface="Open Sans" pitchFamily="34" charset="-120"/>
-              </a:rPr>
-              <a:t>Top-journal bias</a:t>
-            </a:r>
-            <a:endParaRPr lang="en-US" sz="1800" dirty="0"/>
-          </a:p>
-          <a:p>
-            <a:pPr>
-              <a:spcBef>
-                <a:spcPts val="600"/>
-              </a:spcBef>
-              <a:spcAft>
-                <a:spcPts val="300"/>
-              </a:spcAft>
-            </a:pPr>
-            <a:r>
-              <a:rPr lang="en-US" sz="1800" dirty="0">
-                <a:solidFill>
-                  <a:srgbClr val="333333"/>
-                </a:solidFill>
-                <a:latin typeface="Open Sans" pitchFamily="34" charset="0"/>
-                <a:ea typeface="Open Sans" pitchFamily="34" charset="-122"/>
-                <a:cs typeface="Open Sans" pitchFamily="34" charset="-120"/>
-              </a:rPr>
-              <a:t>OA PDF access limitations</a:t>
-            </a:r>
-            <a:endParaRPr lang="en-US" sz="1800" dirty="0"/>
-          </a:p>
-          <a:p>
-            <a:pPr>
-              <a:spcBef>
-                <a:spcPts val="600"/>
-              </a:spcBef>
-              <a:spcAft>
-                <a:spcPts val="300"/>
-              </a:spcAft>
-            </a:pPr>
-            <a:r>
-              <a:rPr lang="en-US" sz="1800" dirty="0">
-                <a:solidFill>
-                  <a:srgbClr val="333333"/>
-                </a:solidFill>
-                <a:latin typeface="Open Sans" pitchFamily="34" charset="0"/>
-                <a:ea typeface="Open Sans" pitchFamily="34" charset="-122"/>
-                <a:cs typeface="Open Sans" pitchFamily="34" charset="-120"/>
-              </a:rPr>
-              <a:t>Optional Vectorize and LLM Critic paths need additional validation</a:t>
-            </a:r>
-            <a:endParaRPr lang="en-US" sz="1800" dirty="0"/>
-          </a:p>
-          <a:p>
-            <a:pPr>
-              <a:spcBef>
-                <a:spcPts val="600"/>
-              </a:spcBef>
-              <a:spcAft>
-                <a:spcPts val="300"/>
-              </a:spcAft>
-            </a:pPr>
-            <a:r>
-              <a:rPr lang="en-US" sz="1800" dirty="0">
-                <a:solidFill>
-                  <a:srgbClr val="333333"/>
-                </a:solidFill>
-                <a:latin typeface="Open Sans" pitchFamily="34" charset="0"/>
-                <a:ea typeface="Open Sans" pitchFamily="34" charset="-122"/>
-                <a:cs typeface="Open Sans" pitchFamily="34" charset="-120"/>
-              </a:rPr>
-              <a:t>Ranking is decision support, not academic authority</a:t>
-            </a:r>
-            <a:endParaRPr lang="en-US" sz="1800" dirty="0"/>
+              <a:t>7. Conclusion</a:t>
+            </a:r>
+            <a:endParaRPr lang="en-US" sz="3600" dirty="0"/>
           </a:p>
         </p:txBody>
       </p:sp>
@@ -4385,41 +4208,14 @@
       </p:grpSpPr>
       <p:sp>
         <p:nvSpPr>
-          <p:cNvPr id="2" name="Shape 0"/>
+          <p:cNvPr id="2" name="Text 0"/>
           <p:cNvSpPr/>
           <p:nvPr/>
         </p:nvSpPr>
         <p:spPr>
           <a:xfrm>
-            <a:off x="0" y="0"/>
-            <a:ext cx="9144000" cy="5143500"/>
-          </a:xfrm>
-          <a:prstGeom prst="rect">
-            <a:avLst/>
-          </a:prstGeom>
-          <a:solidFill>
-            <a:srgbClr val="6A653A"/>
-          </a:solidFill>
-          <a:ln/>
-          <a:effectLst>
-            <a:outerShdw sx="100000" sy="100000" kx="0" ky="0" algn="bl" rotWithShape="0" blurRad="50800" dist="25400" dir="5400000">
-              <a:srgbClr val="000000">
-                <a:alpha val="35000"/>
-              </a:srgbClr>
-            </a:outerShdw>
-          </a:effectLst>
-        </p:spPr>
-      </p:sp>
-      <p:sp>
-        <p:nvSpPr>
-          <p:cNvPr id="3" name="Text 1"/>
-          <p:cNvSpPr/>
-          <p:nvPr/>
-        </p:nvSpPr>
-        <p:spPr>
-          <a:xfrm>
-            <a:off x="457200" y="1828800"/>
-            <a:ext cx="8229600" cy="914400"/>
+            <a:off x="457200" y="182880"/>
+            <a:ext cx="8229600" cy="548640"/>
           </a:xfrm>
           <a:prstGeom prst="rect">
             <a:avLst/>
@@ -4431,21 +4227,257 @@
           <a:bodyPr wrap="square" rtlCol="0" anchor="ctr"/>
           <a:lstStyle/>
           <a:p>
-            <a:pPr algn="ctr" indent="0" marL="0">
+            <a:pPr indent="0" marL="0">
               <a:buNone/>
             </a:pPr>
             <a:r>
-              <a:rPr lang="en-US" sz="3600" b="1" dirty="0">
-                <a:solidFill>
-                  <a:srgbClr val="FFFFFF"/>
+              <a:rPr lang="en-US" sz="2800" b="1" dirty="0">
+                <a:solidFill>
+                  <a:srgbClr val="003366"/>
                 </a:solidFill>
                 <a:latin typeface="Raleway" pitchFamily="34" charset="0"/>
                 <a:ea typeface="Raleway" pitchFamily="34" charset="-122"/>
                 <a:cs typeface="Raleway" pitchFamily="34" charset="-120"/>
               </a:rPr>
-              <a:t>7. Conclusion</a:t>
-            </a:r>
-            <a:endParaRPr lang="en-US" sz="3600" dirty="0"/>
+              <a:t>Beyond Generative AI</a:t>
+            </a:r>
+            <a:endParaRPr lang="en-US" sz="2800" dirty="0"/>
+          </a:p>
+        </p:txBody>
+      </p:sp>
+      <p:sp>
+        <p:nvSpPr>
+          <p:cNvPr id="3" name="Text 1"/>
+          <p:cNvSpPr/>
+          <p:nvPr/>
+        </p:nvSpPr>
+        <p:spPr>
+          <a:xfrm>
+            <a:off x="457200" y="822960"/>
+            <a:ext cx="8229600" cy="1097280"/>
+          </a:xfrm>
+          <a:prstGeom prst="rect">
+            <a:avLst/>
+          </a:prstGeom>
+          <a:noFill/>
+          <a:ln/>
+        </p:spPr>
+        <p:txBody>
+          <a:bodyPr wrap="square" rtlCol="0" anchor="t"/>
+          <a:lstStyle/>
+          <a:p>
+            <a:pPr indent="0" marL="0">
+              <a:buNone/>
+            </a:pPr>
+            <a:r>
+              <a:rPr lang="en-US" sz="1800" dirty="0">
+                <a:solidFill>
+                  <a:srgbClr val="333333"/>
+                </a:solidFill>
+                <a:latin typeface="Open Sans" pitchFamily="34" charset="0"/>
+                <a:ea typeface="Open Sans" pitchFamily="34" charset="-122"/>
+                <a:cs typeface="Open Sans" pitchFamily="34" charset="-120"/>
+              </a:rPr>
+              <a:t>Paper Agent는 학계가 요구하는 </a:t>
+            </a:r>
+            <a:pPr indent="0" marL="0">
+              <a:buNone/>
+            </a:pPr>
+            <a:r>
+              <a:rPr lang="en-US" sz="1800" b="1" dirty="0">
+                <a:solidFill>
+                  <a:srgbClr val="333333"/>
+                </a:solidFill>
+                <a:latin typeface="Open Sans" pitchFamily="34" charset="0"/>
+                <a:ea typeface="Open Sans" pitchFamily="34" charset="-122"/>
+                <a:cs typeface="Open Sans" pitchFamily="34" charset="-120"/>
+              </a:rPr>
+              <a:t>책임성(Accountability)</a:t>
+            </a:r>
+            <a:pPr indent="0" marL="0">
+              <a:buNone/>
+            </a:pPr>
+            <a:r>
+              <a:rPr lang="en-US" sz="1800" dirty="0">
+                <a:solidFill>
+                  <a:srgbClr val="333333"/>
+                </a:solidFill>
+                <a:latin typeface="Open Sans" pitchFamily="34" charset="0"/>
+                <a:ea typeface="Open Sans" pitchFamily="34" charset="-122"/>
+                <a:cs typeface="Open Sans" pitchFamily="34" charset="-120"/>
+              </a:rPr>
+              <a:t>과 </a:t>
+            </a:r>
+            <a:pPr indent="0" marL="0">
+              <a:buNone/>
+            </a:pPr>
+            <a:r>
+              <a:rPr lang="en-US" sz="1800" b="1" dirty="0">
+                <a:solidFill>
+                  <a:srgbClr val="333333"/>
+                </a:solidFill>
+                <a:latin typeface="Open Sans" pitchFamily="34" charset="0"/>
+                <a:ea typeface="Open Sans" pitchFamily="34" charset="-122"/>
+                <a:cs typeface="Open Sans" pitchFamily="34" charset="-120"/>
+              </a:rPr>
+              <a:t>재현성(Reproducibility)</a:t>
+            </a:r>
+            <a:pPr indent="0" marL="0">
+              <a:buNone/>
+            </a:pPr>
+            <a:r>
+              <a:rPr lang="en-US" sz="1800" dirty="0">
+                <a:solidFill>
+                  <a:srgbClr val="333333"/>
+                </a:solidFill>
+                <a:latin typeface="Open Sans" pitchFamily="34" charset="0"/>
+                <a:ea typeface="Open Sans" pitchFamily="34" charset="-122"/>
+                <a:cs typeface="Open Sans" pitchFamily="34" charset="-120"/>
+              </a:rPr>
+              <a:t>을 AI 에이전트 설계로 구현했습니다.</a:t>
+            </a:r>
+            <a:endParaRPr lang="en-US" sz="1800" dirty="0"/>
+          </a:p>
+        </p:txBody>
+      </p:sp>
+      <p:sp>
+        <p:nvSpPr>
+          <p:cNvPr id="4" name="Text 2"/>
+          <p:cNvSpPr/>
+          <p:nvPr/>
+        </p:nvSpPr>
+        <p:spPr>
+          <a:xfrm>
+            <a:off x="457200" y="2011680"/>
+            <a:ext cx="8229600" cy="1097280"/>
+          </a:xfrm>
+          <a:prstGeom prst="rect">
+            <a:avLst/>
+          </a:prstGeom>
+          <a:noFill/>
+          <a:ln/>
+        </p:spPr>
+        <p:txBody>
+          <a:bodyPr wrap="square" rtlCol="0" anchor="t"/>
+          <a:lstStyle/>
+          <a:p>
+            <a:pPr>
+              <a:spcBef>
+                <a:spcPts val="600"/>
+              </a:spcBef>
+              <a:spcAft>
+                <a:spcPts val="300"/>
+              </a:spcAft>
+            </a:pPr>
+            <a:r>
+              <a:rPr lang="en-US" sz="1800" dirty="0">
+                <a:solidFill>
+                  <a:srgbClr val="333333"/>
+                </a:solidFill>
+                <a:latin typeface="Open Sans" pitchFamily="34" charset="0"/>
+                <a:ea typeface="Open Sans" pitchFamily="34" charset="-122"/>
+                <a:cs typeface="Open Sans" pitchFamily="34" charset="-120"/>
+              </a:rPr>
+              <a:t>12단계 모듈형 아키텍처를 통한 투명성 확보</a:t>
+            </a:r>
+            <a:endParaRPr lang="en-US" sz="1800" dirty="0"/>
+          </a:p>
+          <a:p>
+            <a:pPr>
+              <a:spcBef>
+                <a:spcPts val="600"/>
+              </a:spcBef>
+              <a:spcAft>
+                <a:spcPts val="300"/>
+              </a:spcAft>
+            </a:pPr>
+            <a:r>
+              <a:rPr lang="en-US" sz="1800" dirty="0">
+                <a:solidFill>
+                  <a:srgbClr val="333333"/>
+                </a:solidFill>
+                <a:latin typeface="Open Sans" pitchFamily="34" charset="0"/>
+                <a:ea typeface="Open Sans" pitchFamily="34" charset="-122"/>
+                <a:cs typeface="Open Sans" pitchFamily="34" charset="-120"/>
+              </a:rPr>
+              <a:t>실시간 학술 데이터 연동을 통한 무결성 보장</a:t>
+            </a:r>
+            <a:endParaRPr lang="en-US" sz="1800" dirty="0"/>
+          </a:p>
+          <a:p>
+            <a:pPr>
+              <a:spcBef>
+                <a:spcPts val="600"/>
+              </a:spcBef>
+              <a:spcAft>
+                <a:spcPts val="300"/>
+              </a:spcAft>
+            </a:pPr>
+            <a:r>
+              <a:rPr lang="en-US" sz="1800" dirty="0">
+                <a:solidFill>
+                  <a:srgbClr val="333333"/>
+                </a:solidFill>
+                <a:latin typeface="Open Sans" pitchFamily="34" charset="0"/>
+                <a:ea typeface="Open Sans" pitchFamily="34" charset="-122"/>
+                <a:cs typeface="Open Sans" pitchFamily="34" charset="-120"/>
+              </a:rPr>
+              <a:t>Cloudflare 기반의 확장 가능하고 재현 가능한 배포 모델</a:t>
+            </a:r>
+            <a:endParaRPr lang="en-US" sz="1800" dirty="0"/>
+          </a:p>
+        </p:txBody>
+      </p:sp>
+      <p:sp>
+        <p:nvSpPr>
+          <p:cNvPr id="5" name="Text 3"/>
+          <p:cNvSpPr/>
+          <p:nvPr/>
+        </p:nvSpPr>
+        <p:spPr>
+          <a:xfrm>
+            <a:off x="457200" y="3246120"/>
+            <a:ext cx="8229600" cy="1097280"/>
+          </a:xfrm>
+          <a:prstGeom prst="rect">
+            <a:avLst/>
+          </a:prstGeom>
+          <a:noFill/>
+          <a:ln/>
+        </p:spPr>
+        <p:txBody>
+          <a:bodyPr wrap="square" rtlCol="0" anchor="t"/>
+          <a:lstStyle/>
+          <a:p>
+            <a:pPr indent="0" marL="0">
+              <a:buNone/>
+            </a:pPr>
+            <a:r>
+              <a:rPr lang="en-US" sz="1800" b="1" dirty="0">
+                <a:solidFill>
+                  <a:srgbClr val="333333"/>
+                </a:solidFill>
+                <a:latin typeface="Open Sans" pitchFamily="34" charset="0"/>
+                <a:ea typeface="Open Sans" pitchFamily="34" charset="-122"/>
+                <a:cs typeface="Open Sans" pitchFamily="34" charset="-120"/>
+              </a:rPr>
+              <a:t>Next Work</a:t>
+            </a:r>
+            <a:pPr indent="0" marL="0">
+              <a:buNone/>
+            </a:pPr>
+            <a:r>
+              <a:rPr lang="en-US" sz="1800" dirty="0">
+                <a:solidFill>
+                  <a:srgbClr val="333333"/>
+                </a:solidFill>
+                <a:latin typeface="Open Sans" pitchFamily="34" charset="0"/>
+                <a:ea typeface="Open Sans" pitchFamily="34" charset="-122"/>
+                <a:cs typeface="Open Sans" pitchFamily="34" charset="-120"/>
+              </a:rPr>
+              <a:t>: 20개 Task 전체 Proposed Agent 런타임 벤치마크 완결 및 의미론적 인용 맵핑 고도화</a:t>
+            </a:r>
+            <a:endParaRPr lang="en-US" sz="1800" dirty="0"/>
           </a:p>
         </p:txBody>
       </p:sp>
@@ -4460,542 +4492,6 @@
 <file path=ppt/slides/slide19.xml><?xml version="1.0" encoding="utf-8"?>
 <p:sld xmlns:a="http://schemas.openxmlformats.org/drawingml/2006/main" xmlns:r="http://schemas.openxmlformats.org/officeDocument/2006/relationships" xmlns:p="http://schemas.openxmlformats.org/presentationml/2006/main">
   <p:cSld name="Slide 19">
-    <p:spTree>
-      <p:nvGrpSpPr>
-        <p:cNvPr id="1" name=""/>
-        <p:cNvGrpSpPr/>
-        <p:nvPr/>
-      </p:nvGrpSpPr>
-      <p:grpSpPr>
-        <a:xfrm>
-          <a:off x="0" y="0"/>
-          <a:ext cx="0" cy="0"/>
-          <a:chOff x="0" y="0"/>
-          <a:chExt cx="0" cy="0"/>
-        </a:xfrm>
-      </p:grpSpPr>
-      <p:sp>
-        <p:nvSpPr>
-          <p:cNvPr id="2" name="Text 0"/>
-          <p:cNvSpPr/>
-          <p:nvPr/>
-        </p:nvSpPr>
-        <p:spPr>
-          <a:xfrm>
-            <a:off x="457200" y="182880"/>
-            <a:ext cx="8229600" cy="548640"/>
-          </a:xfrm>
-          <a:prstGeom prst="rect">
-            <a:avLst/>
-          </a:prstGeom>
-          <a:noFill/>
-          <a:ln/>
-        </p:spPr>
-        <p:txBody>
-          <a:bodyPr wrap="square" rtlCol="0" anchor="ctr"/>
-          <a:lstStyle/>
-          <a:p>
-            <a:pPr indent="0" marL="0">
-              <a:buNone/>
-            </a:pPr>
-            <a:r>
-              <a:rPr lang="en-US" sz="2800" b="1" dirty="0">
-                <a:solidFill>
-                  <a:srgbClr val="003366"/>
-                </a:solidFill>
-                <a:latin typeface="Raleway" pitchFamily="34" charset="0"/>
-                <a:ea typeface="Raleway" pitchFamily="34" charset="-122"/>
-                <a:cs typeface="Raleway" pitchFamily="34" charset="-120"/>
-              </a:rPr>
-              <a:t>Final Positioning</a:t>
-            </a:r>
-            <a:endParaRPr lang="en-US" sz="2800" dirty="0"/>
-          </a:p>
-        </p:txBody>
-      </p:sp>
-      <p:sp>
-        <p:nvSpPr>
-          <p:cNvPr id="3" name="Text 1"/>
-          <p:cNvSpPr/>
-          <p:nvPr/>
-        </p:nvSpPr>
-        <p:spPr>
-          <a:xfrm>
-            <a:off x="457200" y="822960"/>
-            <a:ext cx="8229600" cy="1097280"/>
-          </a:xfrm>
-          <a:prstGeom prst="rect">
-            <a:avLst/>
-          </a:prstGeom>
-          <a:noFill/>
-          <a:ln/>
-        </p:spPr>
-        <p:txBody>
-          <a:bodyPr wrap="square" rtlCol="0" anchor="t"/>
-          <a:lstStyle/>
-          <a:p>
-            <a:pPr indent="0" marL="0">
-              <a:buNone/>
-            </a:pPr>
-            <a:r>
-              <a:rPr lang="en-US" sz="1800" dirty="0">
-                <a:solidFill>
-                  <a:srgbClr val="333333"/>
-                </a:solidFill>
-                <a:latin typeface="Open Sans" pitchFamily="34" charset="0"/>
-                <a:ea typeface="Open Sans" pitchFamily="34" charset="-122"/>
-                <a:cs typeface="Open Sans" pitchFamily="34" charset="-120"/>
-              </a:rPr>
-              <a:t>Paper Agent is a deployed MVP-plus prototype that demonstrates:</a:t>
-            </a:r>
-            <a:endParaRPr lang="en-US" sz="1800" dirty="0"/>
-          </a:p>
-        </p:txBody>
-      </p:sp>
-      <p:sp>
-        <p:nvSpPr>
-          <p:cNvPr id="4" name="Text 2"/>
-          <p:cNvSpPr/>
-          <p:nvPr/>
-        </p:nvSpPr>
-        <p:spPr>
-          <a:xfrm>
-            <a:off x="457200" y="2011680"/>
-            <a:ext cx="8229600" cy="2194560"/>
-          </a:xfrm>
-          <a:prstGeom prst="rect">
-            <a:avLst/>
-          </a:prstGeom>
-          <a:noFill/>
-          <a:ln/>
-        </p:spPr>
-        <p:txBody>
-          <a:bodyPr wrap="square" rtlCol="0" anchor="t"/>
-          <a:lstStyle/>
-          <a:p>
-            <a:pPr>
-              <a:spcBef>
-                <a:spcPts val="600"/>
-              </a:spcBef>
-              <a:spcAft>
-                <a:spcPts val="300"/>
-              </a:spcAft>
-            </a:pPr>
-            <a:r>
-              <a:rPr lang="en-US" sz="1800" dirty="0">
-                <a:solidFill>
-                  <a:srgbClr val="333333"/>
-                </a:solidFill>
-                <a:latin typeface="Open Sans" pitchFamily="34" charset="0"/>
-                <a:ea typeface="Open Sans" pitchFamily="34" charset="-122"/>
-                <a:cs typeface="Open Sans" pitchFamily="34" charset="-120"/>
-              </a:rPr>
-              <a:t>Multi-Agent workflow</a:t>
-            </a:r>
-            <a:endParaRPr lang="en-US" sz="1800" dirty="0"/>
-          </a:p>
-          <a:p>
-            <a:pPr>
-              <a:spcBef>
-                <a:spcPts val="600"/>
-              </a:spcBef>
-              <a:spcAft>
-                <a:spcPts val="300"/>
-              </a:spcAft>
-            </a:pPr>
-            <a:r>
-              <a:rPr lang="en-US" sz="1800" dirty="0">
-                <a:solidFill>
-                  <a:srgbClr val="333333"/>
-                </a:solidFill>
-                <a:latin typeface="Open Sans" pitchFamily="34" charset="0"/>
-                <a:ea typeface="Open Sans" pitchFamily="34" charset="-122"/>
-                <a:cs typeface="Open Sans" pitchFamily="34" charset="-120"/>
-              </a:rPr>
-              <a:t>RAG / Tool Use with scholarly APIs</a:t>
-            </a:r>
-            <a:endParaRPr lang="en-US" sz="1800" dirty="0"/>
-          </a:p>
-          <a:p>
-            <a:pPr>
-              <a:spcBef>
-                <a:spcPts val="600"/>
-              </a:spcBef>
-              <a:spcAft>
-                <a:spcPts val="300"/>
-              </a:spcAft>
-            </a:pPr>
-            <a:r>
-              <a:rPr lang="en-US" sz="1800" dirty="0">
-                <a:solidFill>
-                  <a:srgbClr val="333333"/>
-                </a:solidFill>
-                <a:latin typeface="Open Sans" pitchFamily="34" charset="0"/>
-                <a:ea typeface="Open Sans" pitchFamily="34" charset="-122"/>
-                <a:cs typeface="Open Sans" pitchFamily="34" charset="-120"/>
-              </a:rPr>
-              <a:t>MCP-based read inspection</a:t>
-            </a:r>
-            <a:endParaRPr lang="en-US" sz="1800" dirty="0"/>
-          </a:p>
-          <a:p>
-            <a:pPr>
-              <a:spcBef>
-                <a:spcPts val="600"/>
-              </a:spcBef>
-              <a:spcAft>
-                <a:spcPts val="300"/>
-              </a:spcAft>
-            </a:pPr>
-            <a:r>
-              <a:rPr lang="en-US" sz="1800" dirty="0">
-                <a:solidFill>
-                  <a:srgbClr val="333333"/>
-                </a:solidFill>
-                <a:latin typeface="Open Sans" pitchFamily="34" charset="0"/>
-                <a:ea typeface="Open Sans" pitchFamily="34" charset="-122"/>
-                <a:cs typeface="Open Sans" pitchFamily="34" charset="-120"/>
-              </a:rPr>
-              <a:t>Cloudflare deployment</a:t>
-            </a:r>
-            <a:endParaRPr lang="en-US" sz="1800" dirty="0"/>
-          </a:p>
-          <a:p>
-            <a:pPr>
-              <a:spcBef>
-                <a:spcPts val="600"/>
-              </a:spcBef>
-              <a:spcAft>
-                <a:spcPts val="300"/>
-              </a:spcAft>
-            </a:pPr>
-            <a:r>
-              <a:rPr lang="en-US" sz="1800" dirty="0">
-                <a:solidFill>
-                  <a:srgbClr val="333333"/>
-                </a:solidFill>
-                <a:latin typeface="Open Sans" pitchFamily="34" charset="0"/>
-                <a:ea typeface="Open Sans" pitchFamily="34" charset="-122"/>
-                <a:cs typeface="Open Sans" pitchFamily="34" charset="-120"/>
-              </a:rPr>
-              <a:t>Reproducible benchmark artifacts</a:t>
-            </a:r>
-            <a:endParaRPr lang="en-US" sz="1800" dirty="0"/>
-          </a:p>
-          <a:p>
-            <a:pPr>
-              <a:spcBef>
-                <a:spcPts val="600"/>
-              </a:spcBef>
-              <a:spcAft>
-                <a:spcPts val="300"/>
-              </a:spcAft>
-            </a:pPr>
-            <a:r>
-              <a:rPr lang="en-US" sz="1800" dirty="0">
-                <a:solidFill>
-                  <a:srgbClr val="333333"/>
-                </a:solidFill>
-                <a:latin typeface="Open Sans" pitchFamily="34" charset="0"/>
-                <a:ea typeface="Open Sans" pitchFamily="34" charset="-122"/>
-                <a:cs typeface="Open Sans" pitchFamily="34" charset="-120"/>
-              </a:rPr>
-              <a:t>Live dashboard and downloadable reports</a:t>
-            </a:r>
-            <a:endParaRPr lang="en-US" sz="1800" dirty="0"/>
-          </a:p>
-        </p:txBody>
-      </p:sp>
-      <p:sp>
-        <p:nvSpPr>
-          <p:cNvPr id="5" name="Text 3"/>
-          <p:cNvSpPr/>
-          <p:nvPr/>
-        </p:nvSpPr>
-        <p:spPr>
-          <a:xfrm>
-            <a:off x="457200" y="4343400"/>
-            <a:ext cx="8229600" cy="228600"/>
-          </a:xfrm>
-          <a:prstGeom prst="rect">
-            <a:avLst/>
-          </a:prstGeom>
-          <a:noFill/>
-          <a:ln/>
-        </p:spPr>
-        <p:txBody>
-          <a:bodyPr wrap="square" rtlCol="0" anchor="t"/>
-          <a:lstStyle/>
-          <a:p>
-            <a:pPr indent="0" marL="0">
-              <a:buNone/>
-            </a:pPr>
-            <a:r>
-              <a:rPr lang="en-US" sz="1800" dirty="0">
-                <a:solidFill>
-                  <a:srgbClr val="333333"/>
-                </a:solidFill>
-                <a:latin typeface="Open Sans" pitchFamily="34" charset="0"/>
-                <a:ea typeface="Open Sans" pitchFamily="34" charset="-122"/>
-                <a:cs typeface="Open Sans" pitchFamily="34" charset="-120"/>
-              </a:rPr>
-              <a:t>Next work:</a:t>
-            </a:r>
-            <a:endParaRPr lang="en-US" sz="1800" dirty="0"/>
-          </a:p>
-        </p:txBody>
-      </p:sp>
-    </p:spTree>
-  </p:cSld>
-  <p:clrMapOvr>
-    <a:masterClrMapping/>
-  </p:clrMapOvr>
-</p:sld>
-</file>
-
-<file path=ppt/slides/slide2.xml><?xml version="1.0" encoding="utf-8"?>
-<p:sld xmlns:a="http://schemas.openxmlformats.org/drawingml/2006/main" xmlns:r="http://schemas.openxmlformats.org/officeDocument/2006/relationships" xmlns:p="http://schemas.openxmlformats.org/presentationml/2006/main">
-  <p:cSld name="Slide 2">
-    <p:spTree>
-      <p:nvGrpSpPr>
-        <p:cNvPr id="1" name=""/>
-        <p:cNvGrpSpPr/>
-        <p:nvPr/>
-      </p:nvGrpSpPr>
-      <p:grpSpPr>
-        <a:xfrm>
-          <a:off x="0" y="0"/>
-          <a:ext cx="0" cy="0"/>
-          <a:chOff x="0" y="0"/>
-          <a:chExt cx="0" cy="0"/>
-        </a:xfrm>
-      </p:grpSpPr>
-      <p:sp>
-        <p:nvSpPr>
-          <p:cNvPr id="2" name="Text 0"/>
-          <p:cNvSpPr/>
-          <p:nvPr/>
-        </p:nvSpPr>
-        <p:spPr>
-          <a:xfrm>
-            <a:off x="457200" y="182880"/>
-            <a:ext cx="8229600" cy="548640"/>
-          </a:xfrm>
-          <a:prstGeom prst="rect">
-            <a:avLst/>
-          </a:prstGeom>
-          <a:noFill/>
-          <a:ln/>
-        </p:spPr>
-        <p:txBody>
-          <a:bodyPr wrap="square" rtlCol="0" anchor="ctr"/>
-          <a:lstStyle/>
-          <a:p>
-            <a:pPr indent="0" marL="0">
-              <a:buNone/>
-            </a:pPr>
-            <a:r>
-              <a:rPr lang="en-US" sz="2800" b="1" dirty="0">
-                <a:solidFill>
-                  <a:srgbClr val="003366"/>
-                </a:solidFill>
-                <a:latin typeface="Raleway" pitchFamily="34" charset="0"/>
-                <a:ea typeface="Raleway" pitchFamily="34" charset="-122"/>
-                <a:cs typeface="Raleway" pitchFamily="34" charset="-120"/>
-              </a:rPr>
-              <a:t>발표 구성</a:t>
-            </a:r>
-            <a:endParaRPr lang="en-US" sz="2800" dirty="0"/>
-          </a:p>
-        </p:txBody>
-      </p:sp>
-      <p:sp>
-        <p:nvSpPr>
-          <p:cNvPr id="3" name="Text 1"/>
-          <p:cNvSpPr/>
-          <p:nvPr/>
-        </p:nvSpPr>
-        <p:spPr>
-          <a:xfrm>
-            <a:off x="457200" y="822960"/>
-            <a:ext cx="8229600" cy="3657600"/>
-          </a:xfrm>
-          <a:prstGeom prst="rect">
-            <a:avLst/>
-          </a:prstGeom>
-          <a:noFill/>
-          <a:ln/>
-        </p:spPr>
-        <p:txBody>
-          <a:bodyPr wrap="square" rtlCol="0" anchor="t"/>
-          <a:lstStyle/>
-          <a:p>
-            <a:pPr>
-              <a:spcBef>
-                <a:spcPts val="800"/>
-              </a:spcBef>
-              <a:spcAft>
-                <a:spcPts val="400"/>
-              </a:spcAft>
-            </a:pPr>
-            <a:r>
-              <a:rPr lang="en-US" sz="1800" dirty="0">
-                <a:solidFill>
-                  <a:srgbClr val="333333"/>
-                </a:solidFill>
-                <a:latin typeface="Open Sans" pitchFamily="34" charset="0"/>
-                <a:ea typeface="Open Sans" pitchFamily="34" charset="-122"/>
-                <a:cs typeface="Open Sans" pitchFamily="34" charset="-120"/>
-              </a:rPr>
-              <a:t>문제 정의와 사용자</a:t>
-            </a:r>
-            <a:endParaRPr lang="en-US" sz="1800" dirty="0"/>
-          </a:p>
-          <a:p>
-            <a:pPr>
-              <a:spcBef>
-                <a:spcPts val="800"/>
-              </a:spcBef>
-              <a:spcAft>
-                <a:spcPts val="400"/>
-              </a:spcAft>
-            </a:pPr>
-            <a:r>
-              <a:rPr lang="en-US" sz="1800" dirty="0">
-                <a:solidFill>
-                  <a:srgbClr val="333333"/>
-                </a:solidFill>
-                <a:latin typeface="Open Sans" pitchFamily="34" charset="0"/>
-                <a:ea typeface="Open Sans" pitchFamily="34" charset="-122"/>
-                <a:cs typeface="Open Sans" pitchFamily="34" charset="-120"/>
-              </a:rPr>
-              <a:t>Multi-Agent 아키텍처</a:t>
-            </a:r>
-            <a:endParaRPr lang="en-US" sz="1800" dirty="0"/>
-          </a:p>
-          <a:p>
-            <a:pPr>
-              <a:spcBef>
-                <a:spcPts val="800"/>
-              </a:spcBef>
-              <a:spcAft>
-                <a:spcPts val="400"/>
-              </a:spcAft>
-            </a:pPr>
-            <a:r>
-              <a:rPr lang="en-US" sz="1800" dirty="0">
-                <a:solidFill>
-                  <a:srgbClr val="333333"/>
-                </a:solidFill>
-                <a:latin typeface="Open Sans" pitchFamily="34" charset="0"/>
-                <a:ea typeface="Open Sans" pitchFamily="34" charset="-122"/>
-                <a:cs typeface="Open Sans" pitchFamily="34" charset="-120"/>
-              </a:rPr>
-              <a:t>Cloudflare 기반 시스템 구현</a:t>
-            </a:r>
-            <a:endParaRPr lang="en-US" sz="1800" dirty="0"/>
-          </a:p>
-          <a:p>
-            <a:pPr>
-              <a:spcBef>
-                <a:spcPts val="800"/>
-              </a:spcBef>
-              <a:spcAft>
-                <a:spcPts val="400"/>
-              </a:spcAft>
-            </a:pPr>
-            <a:r>
-              <a:rPr lang="en-US" sz="1800" dirty="0">
-                <a:solidFill>
-                  <a:srgbClr val="333333"/>
-                </a:solidFill>
-                <a:latin typeface="Open Sans" pitchFamily="34" charset="0"/>
-                <a:ea typeface="Open Sans" pitchFamily="34" charset="-122"/>
-                <a:cs typeface="Open Sans" pitchFamily="34" charset="-120"/>
-              </a:rPr>
-              <a:t>Live demo 경로</a:t>
-            </a:r>
-            <a:endParaRPr lang="en-US" sz="1800" dirty="0"/>
-          </a:p>
-          <a:p>
-            <a:pPr>
-              <a:spcBef>
-                <a:spcPts val="800"/>
-              </a:spcBef>
-              <a:spcAft>
-                <a:spcPts val="400"/>
-              </a:spcAft>
-            </a:pPr>
-            <a:r>
-              <a:rPr lang="en-US" sz="1800" dirty="0">
-                <a:solidFill>
-                  <a:srgbClr val="333333"/>
-                </a:solidFill>
-                <a:latin typeface="Open Sans" pitchFamily="34" charset="0"/>
-                <a:ea typeface="Open Sans" pitchFamily="34" charset="-122"/>
-                <a:cs typeface="Open Sans" pitchFamily="34" charset="-120"/>
-              </a:rPr>
-              <a:t>Benchmark와 baseline 비교</a:t>
-            </a:r>
-            <a:endParaRPr lang="en-US" sz="1800" dirty="0"/>
-          </a:p>
-          <a:p>
-            <a:pPr>
-              <a:spcBef>
-                <a:spcPts val="800"/>
-              </a:spcBef>
-              <a:spcAft>
-                <a:spcPts val="400"/>
-              </a:spcAft>
-            </a:pPr>
-            <a:r>
-              <a:rPr lang="en-US" sz="1800" dirty="0">
-                <a:solidFill>
-                  <a:srgbClr val="333333"/>
-                </a:solidFill>
-                <a:latin typeface="Open Sans" pitchFamily="34" charset="0"/>
-                <a:ea typeface="Open Sans" pitchFamily="34" charset="-122"/>
-                <a:cs typeface="Open Sans" pitchFamily="34" charset="-120"/>
-              </a:rPr>
-              <a:t>한계와 윤리</a:t>
-            </a:r>
-            <a:endParaRPr lang="en-US" sz="1800" dirty="0"/>
-          </a:p>
-          <a:p>
-            <a:pPr>
-              <a:spcBef>
-                <a:spcPts val="800"/>
-              </a:spcBef>
-              <a:spcAft>
-                <a:spcPts val="400"/>
-              </a:spcAft>
-            </a:pPr>
-            <a:r>
-              <a:rPr lang="en-US" sz="1800" dirty="0">
-                <a:solidFill>
-                  <a:srgbClr val="333333"/>
-                </a:solidFill>
-                <a:latin typeface="Open Sans" pitchFamily="34" charset="0"/>
-                <a:ea typeface="Open Sans" pitchFamily="34" charset="-122"/>
-                <a:cs typeface="Open Sans" pitchFamily="34" charset="-120"/>
-              </a:rPr>
-              <a:t>최종 결론</a:t>
-            </a:r>
-            <a:endParaRPr lang="en-US" sz="1800" dirty="0"/>
-          </a:p>
-        </p:txBody>
-      </p:sp>
-    </p:spTree>
-  </p:cSld>
-  <p:clrMapOvr>
-    <a:masterClrMapping/>
-  </p:clrMapOvr>
-</p:sld>
-</file>
-
-<file path=ppt/slides/slide20.xml><?xml version="1.0" encoding="utf-8"?>
-<p:sld xmlns:a="http://schemas.openxmlformats.org/drawingml/2006/main" xmlns:r="http://schemas.openxmlformats.org/officeDocument/2006/relationships" xmlns:p="http://schemas.openxmlformats.org/presentationml/2006/main">
-  <p:cSld name="Slide 20">
     <p:spTree>
       <p:nvGrpSpPr>
         <p:cNvPr id="1" name=""/>
@@ -5161,6 +4657,246 @@
 </p:sld>
 </file>
 
+<file path=ppt/slides/slide2.xml><?xml version="1.0" encoding="utf-8"?>
+<p:sld xmlns:a="http://schemas.openxmlformats.org/drawingml/2006/main" xmlns:r="http://schemas.openxmlformats.org/officeDocument/2006/relationships" xmlns:p="http://schemas.openxmlformats.org/presentationml/2006/main">
+  <p:cSld name="Slide 2">
+    <p:spTree>
+      <p:nvGrpSpPr>
+        <p:cNvPr id="1" name=""/>
+        <p:cNvGrpSpPr/>
+        <p:nvPr/>
+      </p:nvGrpSpPr>
+      <p:grpSpPr>
+        <a:xfrm>
+          <a:off x="0" y="0"/>
+          <a:ext cx="0" cy="0"/>
+          <a:chOff x="0" y="0"/>
+          <a:chExt cx="0" cy="0"/>
+        </a:xfrm>
+      </p:grpSpPr>
+      <p:sp>
+        <p:nvSpPr>
+          <p:cNvPr id="2" name="Text 0"/>
+          <p:cNvSpPr/>
+          <p:nvPr/>
+        </p:nvSpPr>
+        <p:spPr>
+          <a:xfrm>
+            <a:off x="457200" y="182880"/>
+            <a:ext cx="8229600" cy="548640"/>
+          </a:xfrm>
+          <a:prstGeom prst="rect">
+            <a:avLst/>
+          </a:prstGeom>
+          <a:noFill/>
+          <a:ln/>
+        </p:spPr>
+        <p:txBody>
+          <a:bodyPr wrap="square" rtlCol="0" anchor="ctr"/>
+          <a:lstStyle/>
+          <a:p>
+            <a:pPr indent="0" marL="0">
+              <a:buNone/>
+            </a:pPr>
+            <a:r>
+              <a:rPr lang="en-US" sz="2800" b="1" dirty="0">
+                <a:solidFill>
+                  <a:srgbClr val="003366"/>
+                </a:solidFill>
+                <a:latin typeface="Raleway" pitchFamily="34" charset="0"/>
+                <a:ea typeface="Raleway" pitchFamily="34" charset="-122"/>
+                <a:cs typeface="Raleway" pitchFamily="34" charset="-120"/>
+              </a:rPr>
+              <a:t>발표 구성</a:t>
+            </a:r>
+            <a:endParaRPr lang="en-US" sz="2800" dirty="0"/>
+          </a:p>
+        </p:txBody>
+      </p:sp>
+      <p:sp>
+        <p:nvSpPr>
+          <p:cNvPr id="3" name="Text 1"/>
+          <p:cNvSpPr/>
+          <p:nvPr/>
+        </p:nvSpPr>
+        <p:spPr>
+          <a:xfrm>
+            <a:off x="457200" y="822960"/>
+            <a:ext cx="8229600" cy="3657600"/>
+          </a:xfrm>
+          <a:prstGeom prst="rect">
+            <a:avLst/>
+          </a:prstGeom>
+          <a:noFill/>
+          <a:ln/>
+        </p:spPr>
+        <p:txBody>
+          <a:bodyPr wrap="square" rtlCol="0" anchor="t"/>
+          <a:lstStyle/>
+          <a:p>
+            <a:pPr>
+              <a:spcBef>
+                <a:spcPts val="800"/>
+              </a:spcBef>
+              <a:spcAft>
+                <a:spcPts val="400"/>
+              </a:spcAft>
+            </a:pPr>
+            <a:r>
+              <a:rPr lang="en-US" sz="1800" dirty="0">
+                <a:solidFill>
+                  <a:srgbClr val="333333"/>
+                </a:solidFill>
+                <a:latin typeface="Open Sans" pitchFamily="34" charset="0"/>
+                <a:ea typeface="Open Sans" pitchFamily="34" charset="-122"/>
+                <a:cs typeface="Open Sans" pitchFamily="34" charset="-120"/>
+              </a:rPr>
+              <a:t>1. Problem: The Traceability Gap (문제 정의)</a:t>
+            </a:r>
+            <a:endParaRPr lang="en-US" sz="1800" dirty="0"/>
+          </a:p>
+          <a:p>
+            <a:pPr>
+              <a:spcBef>
+                <a:spcPts val="800"/>
+              </a:spcBef>
+              <a:spcAft>
+                <a:spcPts val="400"/>
+              </a:spcAft>
+            </a:pPr>
+            <a:r>
+              <a:rPr lang="en-US" sz="1800" dirty="0">
+                <a:solidFill>
+                  <a:srgbClr val="333333"/>
+                </a:solidFill>
+                <a:latin typeface="Open Sans" pitchFamily="34" charset="0"/>
+                <a:ea typeface="Open Sans" pitchFamily="34" charset="-122"/>
+                <a:cs typeface="Open Sans" pitchFamily="34" charset="-120"/>
+              </a:rPr>
+              <a:t>2. Architecture: Agent-as-a-Module (설계 근거)</a:t>
+            </a:r>
+            <a:endParaRPr lang="en-US" sz="1800" dirty="0"/>
+          </a:p>
+          <a:p>
+            <a:pPr>
+              <a:spcBef>
+                <a:spcPts val="800"/>
+              </a:spcBef>
+              <a:spcAft>
+                <a:spcPts val="400"/>
+              </a:spcAft>
+            </a:pPr>
+            <a:r>
+              <a:rPr lang="en-US" sz="1800" dirty="0">
+                <a:solidFill>
+                  <a:srgbClr val="333333"/>
+                </a:solidFill>
+                <a:latin typeface="Open Sans" pitchFamily="34" charset="0"/>
+                <a:ea typeface="Open Sans" pitchFamily="34" charset="-122"/>
+                <a:cs typeface="Open Sans" pitchFamily="34" charset="-120"/>
+              </a:rPr>
+              <a:t>3. Implementation: Deployed Rigor (구현)</a:t>
+            </a:r>
+            <a:endParaRPr lang="en-US" sz="1800" dirty="0"/>
+          </a:p>
+          <a:p>
+            <a:pPr>
+              <a:spcBef>
+                <a:spcPts val="800"/>
+              </a:spcBef>
+              <a:spcAft>
+                <a:spcPts val="400"/>
+              </a:spcAft>
+            </a:pPr>
+            <a:r>
+              <a:rPr lang="en-US" sz="1800" dirty="0">
+                <a:solidFill>
+                  <a:srgbClr val="333333"/>
+                </a:solidFill>
+                <a:latin typeface="Open Sans" pitchFamily="34" charset="0"/>
+                <a:ea typeface="Open Sans" pitchFamily="34" charset="-122"/>
+                <a:cs typeface="Open Sans" pitchFamily="34" charset="-120"/>
+              </a:rPr>
+              <a:t>4. Live Demo Sequence (데모)</a:t>
+            </a:r>
+            <a:endParaRPr lang="en-US" sz="1800" dirty="0"/>
+          </a:p>
+          <a:p>
+            <a:pPr>
+              <a:spcBef>
+                <a:spcPts val="800"/>
+              </a:spcBef>
+              <a:spcAft>
+                <a:spcPts val="400"/>
+              </a:spcAft>
+            </a:pPr>
+            <a:r>
+              <a:rPr lang="en-US" sz="1800" dirty="0">
+                <a:solidFill>
+                  <a:srgbClr val="333333"/>
+                </a:solidFill>
+                <a:latin typeface="Open Sans" pitchFamily="34" charset="0"/>
+                <a:ea typeface="Open Sans" pitchFamily="34" charset="-122"/>
+                <a:cs typeface="Open Sans" pitchFamily="34" charset="-120"/>
+              </a:rPr>
+              <a:t>5. Benchmark &amp; Results: Quality over Popularity (평가)</a:t>
+            </a:r>
+            <a:endParaRPr lang="en-US" sz="1800" dirty="0"/>
+          </a:p>
+          <a:p>
+            <a:pPr>
+              <a:spcBef>
+                <a:spcPts val="800"/>
+              </a:spcBef>
+              <a:spcAft>
+                <a:spcPts val="400"/>
+              </a:spcAft>
+            </a:pPr>
+            <a:r>
+              <a:rPr lang="en-US" sz="1800" dirty="0">
+                <a:solidFill>
+                  <a:srgbClr val="333333"/>
+                </a:solidFill>
+                <a:latin typeface="Open Sans" pitchFamily="34" charset="0"/>
+                <a:ea typeface="Open Sans" pitchFamily="34" charset="-122"/>
+                <a:cs typeface="Open Sans" pitchFamily="34" charset="-120"/>
+              </a:rPr>
+              <a:t>6. Ethics: Algorithmic Gatekeeping (한계 및 윤리)</a:t>
+            </a:r>
+            <a:endParaRPr lang="en-US" sz="1800" dirty="0"/>
+          </a:p>
+          <a:p>
+            <a:pPr>
+              <a:spcBef>
+                <a:spcPts val="800"/>
+              </a:spcBef>
+              <a:spcAft>
+                <a:spcPts val="400"/>
+              </a:spcAft>
+            </a:pPr>
+            <a:r>
+              <a:rPr lang="en-US" sz="1800" dirty="0">
+                <a:solidFill>
+                  <a:srgbClr val="333333"/>
+                </a:solidFill>
+                <a:latin typeface="Open Sans" pitchFamily="34" charset="0"/>
+                <a:ea typeface="Open Sans" pitchFamily="34" charset="-122"/>
+                <a:cs typeface="Open Sans" pitchFamily="34" charset="-120"/>
+              </a:rPr>
+              <a:t>7. Conclusion (결론)</a:t>
+            </a:r>
+            <a:endParaRPr lang="en-US" sz="1800" dirty="0"/>
+          </a:p>
+        </p:txBody>
+      </p:sp>
+    </p:spTree>
+  </p:cSld>
+  <p:clrMapOvr>
+    <a:masterClrMapping/>
+  </p:clrMapOvr>
+</p:sld>
+</file>
+
 <file path=ppt/slides/slide3.xml><?xml version="1.0" encoding="utf-8"?>
 <p:sld xmlns:a="http://schemas.openxmlformats.org/drawingml/2006/main" xmlns:r="http://schemas.openxmlformats.org/officeDocument/2006/relationships" xmlns:p="http://schemas.openxmlformats.org/presentationml/2006/main">
   <p:cSld name="Slide 3">
@@ -5238,7 +4974,7 @@
                 <a:ea typeface="Raleway" pitchFamily="34" charset="-122"/>
                 <a:cs typeface="Raleway" pitchFamily="34" charset="-120"/>
               </a:rPr>
-              <a:t>1. Problem</a:t>
+              <a:t>1. Problem: The Traceability Gap</a:t>
             </a:r>
             <a:endParaRPr lang="en-US" sz="3600" dirty="0"/>
           </a:p>
@@ -5341,7 +5077,7 @@
                 <a:ea typeface="Open Sans" pitchFamily="34" charset="-122"/>
                 <a:cs typeface="Open Sans" pitchFamily="34" charset="-120"/>
               </a:rPr>
-              <a:t>Business-school literature review는 여러 작업이 분리되어 있어 시간이 많이 소요됩니다.</a:t>
+              <a:t>Business-school literature review는 고도의 엄밀성이 요구되나, 현재 도구들은 파편화되어 있습니다.</a:t>
             </a:r>
             <a:endParaRPr lang="en-US" sz="1800" dirty="0"/>
           </a:p>
@@ -5356,7 +5092,7 @@
         <p:spPr>
           <a:xfrm>
             <a:off x="457200" y="2011680"/>
-            <a:ext cx="8229600" cy="2194560"/>
+            <a:ext cx="8229600" cy="1097280"/>
           </a:xfrm>
           <a:prstGeom prst="rect">
             <a:avLst/>
@@ -5377,7 +5113,7 @@
               </a:spcAft>
             </a:pPr>
             <a:r>
-              <a:rPr lang="en-US" sz="1800" dirty="0">
+              <a:rPr lang="en-US" sz="1800" b="1" dirty="0">
                 <a:solidFill>
                   <a:srgbClr val="333333"/>
                 </a:solidFill>
@@ -5385,7 +5121,21 @@
                 <a:ea typeface="Open Sans" pitchFamily="34" charset="-122"/>
                 <a:cs typeface="Open Sans" pitchFamily="34" charset="-120"/>
               </a:rPr>
-              <a:t>Search: WoS / OpenAlex 후보 검색</a:t>
+              <a:t>Tool Fragmentation</a:t>
+            </a:r>
+            <a:pPr indent="0" marL="0">
+              <a:buNone/>
+            </a:pPr>
+            <a:r>
+              <a:rPr lang="en-US" sz="1800" dirty="0">
+                <a:solidFill>
+                  <a:srgbClr val="333333"/>
+                </a:solidFill>
+                <a:latin typeface="Open Sans" pitchFamily="34" charset="0"/>
+                <a:ea typeface="Open Sans" pitchFamily="34" charset="-122"/>
+                <a:cs typeface="Open Sans" pitchFamily="34" charset="-120"/>
+              </a:rPr>
+              <a:t>: WoS(검색), Crossref(검증), Unpaywall(접근) 사이의 전환 비용</a:t>
             </a:r>
             <a:endParaRPr lang="en-US" sz="1800" dirty="0"/>
           </a:p>
@@ -5399,7 +5149,7 @@
               </a:spcAft>
             </a:pPr>
             <a:r>
-              <a:rPr lang="en-US" sz="1800" dirty="0">
+              <a:rPr lang="en-US" sz="1800" b="1" dirty="0">
                 <a:solidFill>
                   <a:srgbClr val="333333"/>
                 </a:solidFill>
@@ -5407,7 +5157,21 @@
                 <a:ea typeface="Open Sans" pitchFamily="34" charset="-122"/>
                 <a:cs typeface="Open Sans" pitchFamily="34" charset="-120"/>
               </a:rPr>
-              <a:t>Filter: Top Journal Pool 기준 필터링</a:t>
+              <a:t>Opaque Selection Bias</a:t>
+            </a:r>
+            <a:pPr indent="0" marL="0">
+              <a:buNone/>
+            </a:pPr>
+            <a:r>
+              <a:rPr lang="en-US" sz="1800" dirty="0">
+                <a:solidFill>
+                  <a:srgbClr val="333333"/>
+                </a:solidFill>
+                <a:latin typeface="Open Sans" pitchFamily="34" charset="0"/>
+                <a:ea typeface="Open Sans" pitchFamily="34" charset="-122"/>
+                <a:cs typeface="Open Sans" pitchFamily="34" charset="-120"/>
+              </a:rPr>
+              <a:t>: 왜 이 논문이 선택되었는지에 대한 근거 유실</a:t>
             </a:r>
             <a:endParaRPr lang="en-US" sz="1800" dirty="0"/>
           </a:p>
@@ -5421,7 +5185,7 @@
               </a:spcAft>
             </a:pPr>
             <a:r>
-              <a:rPr lang="en-US" sz="1800" dirty="0">
+              <a:rPr lang="en-US" sz="1800" b="1" dirty="0">
                 <a:solidFill>
                   <a:srgbClr val="333333"/>
                 </a:solidFill>
@@ -5429,18 +5193,10 @@
                 <a:ea typeface="Open Sans" pitchFamily="34" charset="-122"/>
                 <a:cs typeface="Open Sans" pitchFamily="34" charset="-120"/>
               </a:rPr>
-              <a:t>Verify: DOI / Crossref metadata 확인</a:t>
-            </a:r>
-            <a:endParaRPr lang="en-US" sz="1800" dirty="0"/>
-          </a:p>
-          <a:p>
-            <a:pPr>
-              <a:spcBef>
-                <a:spcPts val="600"/>
-              </a:spcBef>
-              <a:spcAft>
-                <a:spcPts val="300"/>
-              </a:spcAft>
+              <a:t>The LLM Risk</a:t>
+            </a:r>
+            <a:pPr indent="0" marL="0">
+              <a:buNone/>
             </a:pPr>
             <a:r>
               <a:rPr lang="en-US" sz="1800" dirty="0">
@@ -5451,51 +5207,7 @@
                 <a:ea typeface="Open Sans" pitchFamily="34" charset="-122"/>
                 <a:cs typeface="Open Sans" pitchFamily="34" charset="-120"/>
               </a:rPr>
-              <a:t>Access: Unpaywall OA PDF 상태 확인</a:t>
-            </a:r>
-            <a:endParaRPr lang="en-US" sz="1800" dirty="0"/>
-          </a:p>
-          <a:p>
-            <a:pPr>
-              <a:spcBef>
-                <a:spcPts val="600"/>
-              </a:spcBef>
-              <a:spcAft>
-                <a:spcPts val="300"/>
-              </a:spcAft>
-            </a:pPr>
-            <a:r>
-              <a:rPr lang="en-US" sz="1800" dirty="0">
-                <a:solidFill>
-                  <a:srgbClr val="333333"/>
-                </a:solidFill>
-                <a:latin typeface="Open Sans" pitchFamily="34" charset="0"/>
-                <a:ea typeface="Open Sans" pitchFamily="34" charset="-122"/>
-                <a:cs typeface="Open Sans" pitchFamily="34" charset="-120"/>
-              </a:rPr>
-              <a:t>Rank: relevance, journal quality, recency, citation 기반 정렬</a:t>
-            </a:r>
-            <a:endParaRPr lang="en-US" sz="1800" dirty="0"/>
-          </a:p>
-          <a:p>
-            <a:pPr>
-              <a:spcBef>
-                <a:spcPts val="600"/>
-              </a:spcBef>
-              <a:spcAft>
-                <a:spcPts val="300"/>
-              </a:spcAft>
-            </a:pPr>
-            <a:r>
-              <a:rPr lang="en-US" sz="1800" dirty="0">
-                <a:solidFill>
-                  <a:srgbClr val="333333"/>
-                </a:solidFill>
-                <a:latin typeface="Open Sans" pitchFamily="34" charset="0"/>
-                <a:ea typeface="Open Sans" pitchFamily="34" charset="-122"/>
-                <a:cs typeface="Open Sans" pitchFamily="34" charset="-120"/>
-              </a:rPr>
-              <a:t>Report: CSV / Markdown / XLSX / PDF 산출물 생성</a:t>
+              <a:t>: "Black-box"형 AI의 환각 및 학술적 gatekeeping 무력화</a:t>
             </a:r>
             <a:endParaRPr lang="en-US" sz="1800" dirty="0"/>
           </a:p>
@@ -5509,8 +5221,8 @@
         </p:nvSpPr>
         <p:spPr>
           <a:xfrm>
-            <a:off x="457200" y="4343400"/>
-            <a:ext cx="8229600" cy="228600"/>
+            <a:off x="457200" y="3246120"/>
+            <a:ext cx="8229600" cy="1097280"/>
           </a:xfrm>
           <a:prstGeom prst="rect">
             <a:avLst/>
@@ -5534,7 +5246,7 @@
                 <a:ea typeface="Open Sans" pitchFamily="34" charset="-122"/>
                 <a:cs typeface="Open Sans" pitchFamily="34" charset="-120"/>
               </a:rPr>
-              <a:t>단일 LLM 호출은 중간 오류와 hallucination을 숨길 수 있습니다.</a:t>
+              <a:t>단일 LLM 호출은 신뢰할 수 있는 학술적 증거를 보장하지 못합니다.</a:t>
             </a:r>
             <a:endParaRPr lang="en-US" sz="1800" dirty="0"/>
           </a:p>
@@ -5625,7 +5337,7 @@
                 <a:ea typeface="Raleway" pitchFamily="34" charset="-122"/>
                 <a:cs typeface="Raleway" pitchFamily="34" charset="-120"/>
               </a:rPr>
-              <a:t>2. Agent Architecture</a:t>
+              <a:t>2. Architecture: Agent-as-a-Module</a:t>
             </a:r>
             <a:endParaRPr lang="en-US" sz="3600" dirty="0"/>
           </a:p>
@@ -5689,7 +5401,7 @@
                 <a:ea typeface="Raleway" pitchFamily="34" charset="-122"/>
                 <a:cs typeface="Raleway" pitchFamily="34" charset="-120"/>
               </a:rPr>
-              <a:t>12-Step Literature Review Workflow</a:t>
+              <a:t>12-Step "White-box" Workflow</a:t>
             </a:r>
             <a:endParaRPr lang="en-US" sz="2800" dirty="0"/>
           </a:p>
@@ -5859,7 +5571,7 @@
                             <a:srgbClr val="FFFFFF"/>
                           </a:solidFill>
                         </a:rPr>
-                        <a:t>Status</a:t>
+                        <a:t>Design Rationale</a:t>
                       </a:r>
                       <a:endParaRPr lang="en-US" sz="1600" dirty="0"/>
                     </a:p>
@@ -5922,7 +5634,7 @@
                             <a:srgbClr val="333333"/>
                           </a:solidFill>
                         </a:rPr>
-                        <a:t>1</a:t>
+                        <a:t>1-2</a:t>
                       </a:r>
                       <a:endParaRPr lang="en-US" sz="1400" dirty="0"/>
                     </a:p>
@@ -5983,7 +5695,7 @@
                             <a:srgbClr val="333333"/>
                           </a:solidFill>
                         </a:rPr>
-                        <a:t>Planner Agent</a:t>
+                        <a:t>Planner/Selector</a:t>
                       </a:r>
                       <a:endParaRPr lang="en-US" sz="1400" dirty="0"/>
                     </a:p>
@@ -6044,7 +5756,7 @@
                             <a:srgbClr val="333333"/>
                           </a:solidFill>
                         </a:rPr>
-                        <a:t>Implemented</a:t>
+                        <a:t>학술지 품질 기준(FT50, S급) 강제 집행</a:t>
                       </a:r>
                       <a:endParaRPr lang="en-US" sz="1400" dirty="0"/>
                     </a:p>
@@ -6107,7 +5819,7 @@
                             <a:srgbClr val="333333"/>
                           </a:solidFill>
                         </a:rPr>
-                        <a:t>2</a:t>
+                        <a:t>3-5</a:t>
                       </a:r>
                       <a:endParaRPr lang="en-US" sz="1400" dirty="0"/>
                     </a:p>
@@ -6168,7 +5880,7 @@
                             <a:srgbClr val="333333"/>
                           </a:solidFill>
                         </a:rPr>
-                        <a:t>Journal Selector Agent</a:t>
+                        <a:t>Retriever/Verifier</a:t>
                       </a:r>
                       <a:endParaRPr lang="en-US" sz="1400" dirty="0"/>
                     </a:p>
@@ -6229,7 +5941,7 @@
                             <a:srgbClr val="333333"/>
                           </a:solidFill>
                         </a:rPr>
-                        <a:t>Implemented</a:t>
+                        <a:t>실시간 API 연동 및 DOI 기반 무결성 검증</a:t>
                       </a:r>
                       <a:endParaRPr lang="en-US" sz="1400" dirty="0"/>
                     </a:p>
@@ -6292,7 +6004,7 @@
                             <a:srgbClr val="333333"/>
                           </a:solidFill>
                         </a:rPr>
-                        <a:t>3</a:t>
+                        <a:t>6-9</a:t>
                       </a:r>
                       <a:endParaRPr lang="en-US" sz="1400" dirty="0"/>
                     </a:p>
@@ -6353,7 +6065,7 @@
                             <a:srgbClr val="333333"/>
                           </a:solidFill>
                         </a:rPr>
-                        <a:t>Search/Retriever Agent</a:t>
+                        <a:t>Scoring/Ranking</a:t>
                       </a:r>
                       <a:endParaRPr lang="en-US" sz="1400" dirty="0"/>
                     </a:p>
@@ -6414,7 +6126,7 @@
                             <a:srgbClr val="333333"/>
                           </a:solidFill>
                         </a:rPr>
-                        <a:t>Implemented</a:t>
+                        <a:t>다중 지표(Relevance, Journal Fit, Recency) 가중 정렬</a:t>
                       </a:r>
                       <a:endParaRPr lang="en-US" sz="1400" dirty="0"/>
                     </a:p>
@@ -6477,7 +6189,7 @@
                             <a:srgbClr val="333333"/>
                           </a:solidFill>
                         </a:rPr>
-                        <a:t>4</a:t>
+                        <a:t>10-12</a:t>
                       </a:r>
                       <a:endParaRPr lang="en-US" sz="1400" dirty="0"/>
                     </a:p>
@@ -6538,7 +6250,7 @@
                             <a:srgbClr val="333333"/>
                           </a:solidFill>
                         </a:rPr>
-                        <a:t>Verifier Agent</a:t>
+                        <a:t>Critic/Reporting</a:t>
                       </a:r>
                       <a:endParaRPr lang="en-US" sz="1400" dirty="0"/>
                     </a:p>
@@ -6599,1487 +6311,7 @@
                             <a:srgbClr val="333333"/>
                           </a:solidFill>
                         </a:rPr>
-                        <a:t>Implemented</a:t>
-                      </a:r>
-                      <a:endParaRPr lang="en-US" sz="1400" dirty="0"/>
-                    </a:p>
-                  </a:txBody>
-                  <a:tcPr marL="91440" marR="91440" marT="45720" marB="45720" anchor="ctr">
-                    <a:lnL w="12700" cap="flat" cmpd="sng" algn="ctr">
-                      <a:solidFill>
-                        <a:srgbClr val="CCCCCC"/>
-                      </a:solidFill>
-                      <a:prstDash val="solid"/>
-                      <a:round/>
-                      <a:headEnd type="none" w="med" len="med"/>
-                      <a:tailEnd type="none" w="med" len="med"/>
-                    </a:lnL>
-                    <a:lnR w="12700" cap="flat" cmpd="sng" algn="ctr">
-                      <a:solidFill>
-                        <a:srgbClr val="CCCCCC"/>
-                      </a:solidFill>
-                      <a:prstDash val="solid"/>
-                      <a:round/>
-                      <a:headEnd type="none" w="med" len="med"/>
-                      <a:tailEnd type="none" w="med" len="med"/>
-                    </a:lnR>
-                    <a:lnT w="12700" cap="flat" cmpd="sng" algn="ctr">
-                      <a:solidFill>
-                        <a:srgbClr val="CCCCCC"/>
-                      </a:solidFill>
-                      <a:prstDash val="solid"/>
-                      <a:round/>
-                      <a:headEnd type="none" w="med" len="med"/>
-                      <a:tailEnd type="none" w="med" len="med"/>
-                    </a:lnT>
-                    <a:lnB w="12700" cap="flat" cmpd="sng" algn="ctr">
-                      <a:solidFill>
-                        <a:srgbClr val="CCCCCC"/>
-                      </a:solidFill>
-                      <a:prstDash val="solid"/>
-                      <a:round/>
-                      <a:headEnd type="none" w="med" len="med"/>
-                      <a:tailEnd type="none" w="med" len="med"/>
-                    </a:lnB>
-                    <a:solidFill>
-                      <a:srgbClr val="FFFFFF"/>
-                    </a:solidFill>
-                  </a:tcPr>
-                </a:tc>
-              </a:tr>
-              <a:tr h="365760">
-                <a:tc>
-                  <a:txBody>
-                    <a:bodyPr/>
-                    <a:lstStyle/>
-                    <a:p>
-                      <a:pPr algn="ctr" indent="0" marL="0">
-                        <a:buNone/>
-                      </a:pPr>
-                      <a:r>
-                        <a:rPr lang="en-US" sz="1400" dirty="0">
-                          <a:solidFill>
-                            <a:srgbClr val="333333"/>
-                          </a:solidFill>
-                        </a:rPr>
-                        <a:t>5</a:t>
-                      </a:r>
-                      <a:endParaRPr lang="en-US" sz="1400" dirty="0"/>
-                    </a:p>
-                  </a:txBody>
-                  <a:tcPr marL="91440" marR="91440" marT="45720" marB="45720" anchor="ctr">
-                    <a:lnL w="12700" cap="flat" cmpd="sng" algn="ctr">
-                      <a:solidFill>
-                        <a:srgbClr val="CCCCCC"/>
-                      </a:solidFill>
-                      <a:prstDash val="solid"/>
-                      <a:round/>
-                      <a:headEnd type="none" w="med" len="med"/>
-                      <a:tailEnd type="none" w="med" len="med"/>
-                    </a:lnL>
-                    <a:lnR w="12700" cap="flat" cmpd="sng" algn="ctr">
-                      <a:solidFill>
-                        <a:srgbClr val="CCCCCC"/>
-                      </a:solidFill>
-                      <a:prstDash val="solid"/>
-                      <a:round/>
-                      <a:headEnd type="none" w="med" len="med"/>
-                      <a:tailEnd type="none" w="med" len="med"/>
-                    </a:lnR>
-                    <a:lnT w="12700" cap="flat" cmpd="sng" algn="ctr">
-                      <a:solidFill>
-                        <a:srgbClr val="CCCCCC"/>
-                      </a:solidFill>
-                      <a:prstDash val="solid"/>
-                      <a:round/>
-                      <a:headEnd type="none" w="med" len="med"/>
-                      <a:tailEnd type="none" w="med" len="med"/>
-                    </a:lnT>
-                    <a:lnB w="12700" cap="flat" cmpd="sng" algn="ctr">
-                      <a:solidFill>
-                        <a:srgbClr val="CCCCCC"/>
-                      </a:solidFill>
-                      <a:prstDash val="solid"/>
-                      <a:round/>
-                      <a:headEnd type="none" w="med" len="med"/>
-                      <a:tailEnd type="none" w="med" len="med"/>
-                    </a:lnB>
-                    <a:solidFill>
-                      <a:srgbClr val="FFFFFF"/>
-                    </a:solidFill>
-                  </a:tcPr>
-                </a:tc>
-                <a:tc>
-                  <a:txBody>
-                    <a:bodyPr/>
-                    <a:lstStyle/>
-                    <a:p>
-                      <a:pPr algn="ctr" indent="0" marL="0">
-                        <a:buNone/>
-                      </a:pPr>
-                      <a:r>
-                        <a:rPr lang="en-US" sz="1400" dirty="0">
-                          <a:solidFill>
-                            <a:srgbClr val="333333"/>
-                          </a:solidFill>
-                        </a:rPr>
-                        <a:t>Open Access Agent</a:t>
-                      </a:r>
-                      <a:endParaRPr lang="en-US" sz="1400" dirty="0"/>
-                    </a:p>
-                  </a:txBody>
-                  <a:tcPr marL="91440" marR="91440" marT="45720" marB="45720" anchor="ctr">
-                    <a:lnL w="12700" cap="flat" cmpd="sng" algn="ctr">
-                      <a:solidFill>
-                        <a:srgbClr val="CCCCCC"/>
-                      </a:solidFill>
-                      <a:prstDash val="solid"/>
-                      <a:round/>
-                      <a:headEnd type="none" w="med" len="med"/>
-                      <a:tailEnd type="none" w="med" len="med"/>
-                    </a:lnL>
-                    <a:lnR w="12700" cap="flat" cmpd="sng" algn="ctr">
-                      <a:solidFill>
-                        <a:srgbClr val="CCCCCC"/>
-                      </a:solidFill>
-                      <a:prstDash val="solid"/>
-                      <a:round/>
-                      <a:headEnd type="none" w="med" len="med"/>
-                      <a:tailEnd type="none" w="med" len="med"/>
-                    </a:lnR>
-                    <a:lnT w="12700" cap="flat" cmpd="sng" algn="ctr">
-                      <a:solidFill>
-                        <a:srgbClr val="CCCCCC"/>
-                      </a:solidFill>
-                      <a:prstDash val="solid"/>
-                      <a:round/>
-                      <a:headEnd type="none" w="med" len="med"/>
-                      <a:tailEnd type="none" w="med" len="med"/>
-                    </a:lnT>
-                    <a:lnB w="12700" cap="flat" cmpd="sng" algn="ctr">
-                      <a:solidFill>
-                        <a:srgbClr val="CCCCCC"/>
-                      </a:solidFill>
-                      <a:prstDash val="solid"/>
-                      <a:round/>
-                      <a:headEnd type="none" w="med" len="med"/>
-                      <a:tailEnd type="none" w="med" len="med"/>
-                    </a:lnB>
-                    <a:solidFill>
-                      <a:srgbClr val="FFFFFF"/>
-                    </a:solidFill>
-                  </a:tcPr>
-                </a:tc>
-                <a:tc>
-                  <a:txBody>
-                    <a:bodyPr/>
-                    <a:lstStyle/>
-                    <a:p>
-                      <a:pPr algn="ctr" indent="0" marL="0">
-                        <a:buNone/>
-                      </a:pPr>
-                      <a:r>
-                        <a:rPr lang="en-US" sz="1400" dirty="0">
-                          <a:solidFill>
-                            <a:srgbClr val="333333"/>
-                          </a:solidFill>
-                        </a:rPr>
-                        <a:t>Implemented</a:t>
-                      </a:r>
-                      <a:endParaRPr lang="en-US" sz="1400" dirty="0"/>
-                    </a:p>
-                  </a:txBody>
-                  <a:tcPr marL="91440" marR="91440" marT="45720" marB="45720" anchor="ctr">
-                    <a:lnL w="12700" cap="flat" cmpd="sng" algn="ctr">
-                      <a:solidFill>
-                        <a:srgbClr val="CCCCCC"/>
-                      </a:solidFill>
-                      <a:prstDash val="solid"/>
-                      <a:round/>
-                      <a:headEnd type="none" w="med" len="med"/>
-                      <a:tailEnd type="none" w="med" len="med"/>
-                    </a:lnL>
-                    <a:lnR w="12700" cap="flat" cmpd="sng" algn="ctr">
-                      <a:solidFill>
-                        <a:srgbClr val="CCCCCC"/>
-                      </a:solidFill>
-                      <a:prstDash val="solid"/>
-                      <a:round/>
-                      <a:headEnd type="none" w="med" len="med"/>
-                      <a:tailEnd type="none" w="med" len="med"/>
-                    </a:lnR>
-                    <a:lnT w="12700" cap="flat" cmpd="sng" algn="ctr">
-                      <a:solidFill>
-                        <a:srgbClr val="CCCCCC"/>
-                      </a:solidFill>
-                      <a:prstDash val="solid"/>
-                      <a:round/>
-                      <a:headEnd type="none" w="med" len="med"/>
-                      <a:tailEnd type="none" w="med" len="med"/>
-                    </a:lnT>
-                    <a:lnB w="12700" cap="flat" cmpd="sng" algn="ctr">
-                      <a:solidFill>
-                        <a:srgbClr val="CCCCCC"/>
-                      </a:solidFill>
-                      <a:prstDash val="solid"/>
-                      <a:round/>
-                      <a:headEnd type="none" w="med" len="med"/>
-                      <a:tailEnd type="none" w="med" len="med"/>
-                    </a:lnB>
-                    <a:solidFill>
-                      <a:srgbClr val="FFFFFF"/>
-                    </a:solidFill>
-                  </a:tcPr>
-                </a:tc>
-              </a:tr>
-              <a:tr h="365760">
-                <a:tc>
-                  <a:txBody>
-                    <a:bodyPr/>
-                    <a:lstStyle/>
-                    <a:p>
-                      <a:pPr algn="ctr" indent="0" marL="0">
-                        <a:buNone/>
-                      </a:pPr>
-                      <a:r>
-                        <a:rPr lang="en-US" sz="1400" dirty="0">
-                          <a:solidFill>
-                            <a:srgbClr val="333333"/>
-                          </a:solidFill>
-                        </a:rPr>
-                        <a:t>6</a:t>
-                      </a:r>
-                      <a:endParaRPr lang="en-US" sz="1400" dirty="0"/>
-                    </a:p>
-                  </a:txBody>
-                  <a:tcPr marL="91440" marR="91440" marT="45720" marB="45720" anchor="ctr">
-                    <a:lnL w="12700" cap="flat" cmpd="sng" algn="ctr">
-                      <a:solidFill>
-                        <a:srgbClr val="CCCCCC"/>
-                      </a:solidFill>
-                      <a:prstDash val="solid"/>
-                      <a:round/>
-                      <a:headEnd type="none" w="med" len="med"/>
-                      <a:tailEnd type="none" w="med" len="med"/>
-                    </a:lnL>
-                    <a:lnR w="12700" cap="flat" cmpd="sng" algn="ctr">
-                      <a:solidFill>
-                        <a:srgbClr val="CCCCCC"/>
-                      </a:solidFill>
-                      <a:prstDash val="solid"/>
-                      <a:round/>
-                      <a:headEnd type="none" w="med" len="med"/>
-                      <a:tailEnd type="none" w="med" len="med"/>
-                    </a:lnR>
-                    <a:lnT w="12700" cap="flat" cmpd="sng" algn="ctr">
-                      <a:solidFill>
-                        <a:srgbClr val="CCCCCC"/>
-                      </a:solidFill>
-                      <a:prstDash val="solid"/>
-                      <a:round/>
-                      <a:headEnd type="none" w="med" len="med"/>
-                      <a:tailEnd type="none" w="med" len="med"/>
-                    </a:lnT>
-                    <a:lnB w="12700" cap="flat" cmpd="sng" algn="ctr">
-                      <a:solidFill>
-                        <a:srgbClr val="CCCCCC"/>
-                      </a:solidFill>
-                      <a:prstDash val="solid"/>
-                      <a:round/>
-                      <a:headEnd type="none" w="med" len="med"/>
-                      <a:tailEnd type="none" w="med" len="med"/>
-                    </a:lnB>
-                    <a:solidFill>
-                      <a:srgbClr val="FFFFFF"/>
-                    </a:solidFill>
-                  </a:tcPr>
-                </a:tc>
-                <a:tc>
-                  <a:txBody>
-                    <a:bodyPr/>
-                    <a:lstStyle/>
-                    <a:p>
-                      <a:pPr algn="ctr" indent="0" marL="0">
-                        <a:buNone/>
-                      </a:pPr>
-                      <a:r>
-                        <a:rPr lang="en-US" sz="1400" dirty="0">
-                          <a:solidFill>
-                            <a:srgbClr val="333333"/>
-                          </a:solidFill>
-                        </a:rPr>
-                        <a:t>Storage Worker</a:t>
-                      </a:r>
-                      <a:endParaRPr lang="en-US" sz="1400" dirty="0"/>
-                    </a:p>
-                  </a:txBody>
-                  <a:tcPr marL="91440" marR="91440" marT="45720" marB="45720" anchor="ctr">
-                    <a:lnL w="12700" cap="flat" cmpd="sng" algn="ctr">
-                      <a:solidFill>
-                        <a:srgbClr val="CCCCCC"/>
-                      </a:solidFill>
-                      <a:prstDash val="solid"/>
-                      <a:round/>
-                      <a:headEnd type="none" w="med" len="med"/>
-                      <a:tailEnd type="none" w="med" len="med"/>
-                    </a:lnL>
-                    <a:lnR w="12700" cap="flat" cmpd="sng" algn="ctr">
-                      <a:solidFill>
-                        <a:srgbClr val="CCCCCC"/>
-                      </a:solidFill>
-                      <a:prstDash val="solid"/>
-                      <a:round/>
-                      <a:headEnd type="none" w="med" len="med"/>
-                      <a:tailEnd type="none" w="med" len="med"/>
-                    </a:lnR>
-                    <a:lnT w="12700" cap="flat" cmpd="sng" algn="ctr">
-                      <a:solidFill>
-                        <a:srgbClr val="CCCCCC"/>
-                      </a:solidFill>
-                      <a:prstDash val="solid"/>
-                      <a:round/>
-                      <a:headEnd type="none" w="med" len="med"/>
-                      <a:tailEnd type="none" w="med" len="med"/>
-                    </a:lnT>
-                    <a:lnB w="12700" cap="flat" cmpd="sng" algn="ctr">
-                      <a:solidFill>
-                        <a:srgbClr val="CCCCCC"/>
-                      </a:solidFill>
-                      <a:prstDash val="solid"/>
-                      <a:round/>
-                      <a:headEnd type="none" w="med" len="med"/>
-                      <a:tailEnd type="none" w="med" len="med"/>
-                    </a:lnB>
-                    <a:solidFill>
-                      <a:srgbClr val="FFFFFF"/>
-                    </a:solidFill>
-                  </a:tcPr>
-                </a:tc>
-                <a:tc>
-                  <a:txBody>
-                    <a:bodyPr/>
-                    <a:lstStyle/>
-                    <a:p>
-                      <a:pPr algn="ctr" indent="0" marL="0">
-                        <a:buNone/>
-                      </a:pPr>
-                      <a:r>
-                        <a:rPr lang="en-US" sz="1400" dirty="0">
-                          <a:solidFill>
-                            <a:srgbClr val="333333"/>
-                          </a:solidFill>
-                        </a:rPr>
-                        <a:t>Implemented</a:t>
-                      </a:r>
-                      <a:endParaRPr lang="en-US" sz="1400" dirty="0"/>
-                    </a:p>
-                  </a:txBody>
-                  <a:tcPr marL="91440" marR="91440" marT="45720" marB="45720" anchor="ctr">
-                    <a:lnL w="12700" cap="flat" cmpd="sng" algn="ctr">
-                      <a:solidFill>
-                        <a:srgbClr val="CCCCCC"/>
-                      </a:solidFill>
-                      <a:prstDash val="solid"/>
-                      <a:round/>
-                      <a:headEnd type="none" w="med" len="med"/>
-                      <a:tailEnd type="none" w="med" len="med"/>
-                    </a:lnL>
-                    <a:lnR w="12700" cap="flat" cmpd="sng" algn="ctr">
-                      <a:solidFill>
-                        <a:srgbClr val="CCCCCC"/>
-                      </a:solidFill>
-                      <a:prstDash val="solid"/>
-                      <a:round/>
-                      <a:headEnd type="none" w="med" len="med"/>
-                      <a:tailEnd type="none" w="med" len="med"/>
-                    </a:lnR>
-                    <a:lnT w="12700" cap="flat" cmpd="sng" algn="ctr">
-                      <a:solidFill>
-                        <a:srgbClr val="CCCCCC"/>
-                      </a:solidFill>
-                      <a:prstDash val="solid"/>
-                      <a:round/>
-                      <a:headEnd type="none" w="med" len="med"/>
-                      <a:tailEnd type="none" w="med" len="med"/>
-                    </a:lnT>
-                    <a:lnB w="12700" cap="flat" cmpd="sng" algn="ctr">
-                      <a:solidFill>
-                        <a:srgbClr val="CCCCCC"/>
-                      </a:solidFill>
-                      <a:prstDash val="solid"/>
-                      <a:round/>
-                      <a:headEnd type="none" w="med" len="med"/>
-                      <a:tailEnd type="none" w="med" len="med"/>
-                    </a:lnB>
-                    <a:solidFill>
-                      <a:srgbClr val="FFFFFF"/>
-                    </a:solidFill>
-                  </a:tcPr>
-                </a:tc>
-              </a:tr>
-              <a:tr h="365760">
-                <a:tc>
-                  <a:txBody>
-                    <a:bodyPr/>
-                    <a:lstStyle/>
-                    <a:p>
-                      <a:pPr algn="ctr" indent="0" marL="0">
-                        <a:buNone/>
-                      </a:pPr>
-                      <a:r>
-                        <a:rPr lang="en-US" sz="1400" dirty="0">
-                          <a:solidFill>
-                            <a:srgbClr val="333333"/>
-                          </a:solidFill>
-                        </a:rPr>
-                        <a:t>7</a:t>
-                      </a:r>
-                      <a:endParaRPr lang="en-US" sz="1400" dirty="0"/>
-                    </a:p>
-                  </a:txBody>
-                  <a:tcPr marL="91440" marR="91440" marT="45720" marB="45720" anchor="ctr">
-                    <a:lnL w="12700" cap="flat" cmpd="sng" algn="ctr">
-                      <a:solidFill>
-                        <a:srgbClr val="CCCCCC"/>
-                      </a:solidFill>
-                      <a:prstDash val="solid"/>
-                      <a:round/>
-                      <a:headEnd type="none" w="med" len="med"/>
-                      <a:tailEnd type="none" w="med" len="med"/>
-                    </a:lnL>
-                    <a:lnR w="12700" cap="flat" cmpd="sng" algn="ctr">
-                      <a:solidFill>
-                        <a:srgbClr val="CCCCCC"/>
-                      </a:solidFill>
-                      <a:prstDash val="solid"/>
-                      <a:round/>
-                      <a:headEnd type="none" w="med" len="med"/>
-                      <a:tailEnd type="none" w="med" len="med"/>
-                    </a:lnR>
-                    <a:lnT w="12700" cap="flat" cmpd="sng" algn="ctr">
-                      <a:solidFill>
-                        <a:srgbClr val="CCCCCC"/>
-                      </a:solidFill>
-                      <a:prstDash val="solid"/>
-                      <a:round/>
-                      <a:headEnd type="none" w="med" len="med"/>
-                      <a:tailEnd type="none" w="med" len="med"/>
-                    </a:lnT>
-                    <a:lnB w="12700" cap="flat" cmpd="sng" algn="ctr">
-                      <a:solidFill>
-                        <a:srgbClr val="CCCCCC"/>
-                      </a:solidFill>
-                      <a:prstDash val="solid"/>
-                      <a:round/>
-                      <a:headEnd type="none" w="med" len="med"/>
-                      <a:tailEnd type="none" w="med" len="med"/>
-                    </a:lnB>
-                    <a:solidFill>
-                      <a:srgbClr val="FFFFFF"/>
-                    </a:solidFill>
-                  </a:tcPr>
-                </a:tc>
-                <a:tc>
-                  <a:txBody>
-                    <a:bodyPr/>
-                    <a:lstStyle/>
-                    <a:p>
-                      <a:pPr algn="ctr" indent="0" marL="0">
-                        <a:buNone/>
-                      </a:pPr>
-                      <a:r>
-                        <a:rPr lang="en-US" sz="1400" dirty="0">
-                          <a:solidFill>
-                            <a:srgbClr val="333333"/>
-                          </a:solidFill>
-                        </a:rPr>
-                        <a:t>Evaluation Agent</a:t>
-                      </a:r>
-                      <a:endParaRPr lang="en-US" sz="1400" dirty="0"/>
-                    </a:p>
-                  </a:txBody>
-                  <a:tcPr marL="91440" marR="91440" marT="45720" marB="45720" anchor="ctr">
-                    <a:lnL w="12700" cap="flat" cmpd="sng" algn="ctr">
-                      <a:solidFill>
-                        <a:srgbClr val="CCCCCC"/>
-                      </a:solidFill>
-                      <a:prstDash val="solid"/>
-                      <a:round/>
-                      <a:headEnd type="none" w="med" len="med"/>
-                      <a:tailEnd type="none" w="med" len="med"/>
-                    </a:lnL>
-                    <a:lnR w="12700" cap="flat" cmpd="sng" algn="ctr">
-                      <a:solidFill>
-                        <a:srgbClr val="CCCCCC"/>
-                      </a:solidFill>
-                      <a:prstDash val="solid"/>
-                      <a:round/>
-                      <a:headEnd type="none" w="med" len="med"/>
-                      <a:tailEnd type="none" w="med" len="med"/>
-                    </a:lnR>
-                    <a:lnT w="12700" cap="flat" cmpd="sng" algn="ctr">
-                      <a:solidFill>
-                        <a:srgbClr val="CCCCCC"/>
-                      </a:solidFill>
-                      <a:prstDash val="solid"/>
-                      <a:round/>
-                      <a:headEnd type="none" w="med" len="med"/>
-                      <a:tailEnd type="none" w="med" len="med"/>
-                    </a:lnT>
-                    <a:lnB w="12700" cap="flat" cmpd="sng" algn="ctr">
-                      <a:solidFill>
-                        <a:srgbClr val="CCCCCC"/>
-                      </a:solidFill>
-                      <a:prstDash val="solid"/>
-                      <a:round/>
-                      <a:headEnd type="none" w="med" len="med"/>
-                      <a:tailEnd type="none" w="med" len="med"/>
-                    </a:lnB>
-                    <a:solidFill>
-                      <a:srgbClr val="FFFFFF"/>
-                    </a:solidFill>
-                  </a:tcPr>
-                </a:tc>
-                <a:tc>
-                  <a:txBody>
-                    <a:bodyPr/>
-                    <a:lstStyle/>
-                    <a:p>
-                      <a:pPr algn="ctr" indent="0" marL="0">
-                        <a:buNone/>
-                      </a:pPr>
-                      <a:r>
-                        <a:rPr lang="en-US" sz="1400" dirty="0">
-                          <a:solidFill>
-                            <a:srgbClr val="333333"/>
-                          </a:solidFill>
-                        </a:rPr>
-                        <a:t>Implemented</a:t>
-                      </a:r>
-                      <a:endParaRPr lang="en-US" sz="1400" dirty="0"/>
-                    </a:p>
-                  </a:txBody>
-                  <a:tcPr marL="91440" marR="91440" marT="45720" marB="45720" anchor="ctr">
-                    <a:lnL w="12700" cap="flat" cmpd="sng" algn="ctr">
-                      <a:solidFill>
-                        <a:srgbClr val="CCCCCC"/>
-                      </a:solidFill>
-                      <a:prstDash val="solid"/>
-                      <a:round/>
-                      <a:headEnd type="none" w="med" len="med"/>
-                      <a:tailEnd type="none" w="med" len="med"/>
-                    </a:lnL>
-                    <a:lnR w="12700" cap="flat" cmpd="sng" algn="ctr">
-                      <a:solidFill>
-                        <a:srgbClr val="CCCCCC"/>
-                      </a:solidFill>
-                      <a:prstDash val="solid"/>
-                      <a:round/>
-                      <a:headEnd type="none" w="med" len="med"/>
-                      <a:tailEnd type="none" w="med" len="med"/>
-                    </a:lnR>
-                    <a:lnT w="12700" cap="flat" cmpd="sng" algn="ctr">
-                      <a:solidFill>
-                        <a:srgbClr val="CCCCCC"/>
-                      </a:solidFill>
-                      <a:prstDash val="solid"/>
-                      <a:round/>
-                      <a:headEnd type="none" w="med" len="med"/>
-                      <a:tailEnd type="none" w="med" len="med"/>
-                    </a:lnT>
-                    <a:lnB w="12700" cap="flat" cmpd="sng" algn="ctr">
-                      <a:solidFill>
-                        <a:srgbClr val="CCCCCC"/>
-                      </a:solidFill>
-                      <a:prstDash val="solid"/>
-                      <a:round/>
-                      <a:headEnd type="none" w="med" len="med"/>
-                      <a:tailEnd type="none" w="med" len="med"/>
-                    </a:lnB>
-                    <a:solidFill>
-                      <a:srgbClr val="FFFFFF"/>
-                    </a:solidFill>
-                  </a:tcPr>
-                </a:tc>
-              </a:tr>
-              <a:tr h="365760">
-                <a:tc>
-                  <a:txBody>
-                    <a:bodyPr/>
-                    <a:lstStyle/>
-                    <a:p>
-                      <a:pPr algn="ctr" indent="0" marL="0">
-                        <a:buNone/>
-                      </a:pPr>
-                      <a:r>
-                        <a:rPr lang="en-US" sz="1400" dirty="0">
-                          <a:solidFill>
-                            <a:srgbClr val="333333"/>
-                          </a:solidFill>
-                        </a:rPr>
-                        <a:t>8</a:t>
-                      </a:r>
-                      <a:endParaRPr lang="en-US" sz="1400" dirty="0"/>
-                    </a:p>
-                  </a:txBody>
-                  <a:tcPr marL="91440" marR="91440" marT="45720" marB="45720" anchor="ctr">
-                    <a:lnL w="12700" cap="flat" cmpd="sng" algn="ctr">
-                      <a:solidFill>
-                        <a:srgbClr val="CCCCCC"/>
-                      </a:solidFill>
-                      <a:prstDash val="solid"/>
-                      <a:round/>
-                      <a:headEnd type="none" w="med" len="med"/>
-                      <a:tailEnd type="none" w="med" len="med"/>
-                    </a:lnL>
-                    <a:lnR w="12700" cap="flat" cmpd="sng" algn="ctr">
-                      <a:solidFill>
-                        <a:srgbClr val="CCCCCC"/>
-                      </a:solidFill>
-                      <a:prstDash val="solid"/>
-                      <a:round/>
-                      <a:headEnd type="none" w="med" len="med"/>
-                      <a:tailEnd type="none" w="med" len="med"/>
-                    </a:lnR>
-                    <a:lnT w="12700" cap="flat" cmpd="sng" algn="ctr">
-                      <a:solidFill>
-                        <a:srgbClr val="CCCCCC"/>
-                      </a:solidFill>
-                      <a:prstDash val="solid"/>
-                      <a:round/>
-                      <a:headEnd type="none" w="med" len="med"/>
-                      <a:tailEnd type="none" w="med" len="med"/>
-                    </a:lnT>
-                    <a:lnB w="12700" cap="flat" cmpd="sng" algn="ctr">
-                      <a:solidFill>
-                        <a:srgbClr val="CCCCCC"/>
-                      </a:solidFill>
-                      <a:prstDash val="solid"/>
-                      <a:round/>
-                      <a:headEnd type="none" w="med" len="med"/>
-                      <a:tailEnd type="none" w="med" len="med"/>
-                    </a:lnB>
-                    <a:solidFill>
-                      <a:srgbClr val="FFFFFF"/>
-                    </a:solidFill>
-                  </a:tcPr>
-                </a:tc>
-                <a:tc>
-                  <a:txBody>
-                    <a:bodyPr/>
-                    <a:lstStyle/>
-                    <a:p>
-                      <a:pPr algn="ctr" indent="0" marL="0">
-                        <a:buNone/>
-                      </a:pPr>
-                      <a:r>
-                        <a:rPr lang="en-US" sz="1400" dirty="0">
-                          <a:solidFill>
-                            <a:srgbClr val="333333"/>
-                          </a:solidFill>
-                        </a:rPr>
-                        <a:t>Relevance Agent</a:t>
-                      </a:r>
-                      <a:endParaRPr lang="en-US" sz="1400" dirty="0"/>
-                    </a:p>
-                  </a:txBody>
-                  <a:tcPr marL="91440" marR="91440" marT="45720" marB="45720" anchor="ctr">
-                    <a:lnL w="12700" cap="flat" cmpd="sng" algn="ctr">
-                      <a:solidFill>
-                        <a:srgbClr val="CCCCCC"/>
-                      </a:solidFill>
-                      <a:prstDash val="solid"/>
-                      <a:round/>
-                      <a:headEnd type="none" w="med" len="med"/>
-                      <a:tailEnd type="none" w="med" len="med"/>
-                    </a:lnL>
-                    <a:lnR w="12700" cap="flat" cmpd="sng" algn="ctr">
-                      <a:solidFill>
-                        <a:srgbClr val="CCCCCC"/>
-                      </a:solidFill>
-                      <a:prstDash val="solid"/>
-                      <a:round/>
-                      <a:headEnd type="none" w="med" len="med"/>
-                      <a:tailEnd type="none" w="med" len="med"/>
-                    </a:lnR>
-                    <a:lnT w="12700" cap="flat" cmpd="sng" algn="ctr">
-                      <a:solidFill>
-                        <a:srgbClr val="CCCCCC"/>
-                      </a:solidFill>
-                      <a:prstDash val="solid"/>
-                      <a:round/>
-                      <a:headEnd type="none" w="med" len="med"/>
-                      <a:tailEnd type="none" w="med" len="med"/>
-                    </a:lnT>
-                    <a:lnB w="12700" cap="flat" cmpd="sng" algn="ctr">
-                      <a:solidFill>
-                        <a:srgbClr val="CCCCCC"/>
-                      </a:solidFill>
-                      <a:prstDash val="solid"/>
-                      <a:round/>
-                      <a:headEnd type="none" w="med" len="med"/>
-                      <a:tailEnd type="none" w="med" len="med"/>
-                    </a:lnB>
-                    <a:solidFill>
-                      <a:srgbClr val="FFFFFF"/>
-                    </a:solidFill>
-                  </a:tcPr>
-                </a:tc>
-                <a:tc>
-                  <a:txBody>
-                    <a:bodyPr/>
-                    <a:lstStyle/>
-                    <a:p>
-                      <a:pPr algn="ctr" indent="0" marL="0">
-                        <a:buNone/>
-                      </a:pPr>
-                      <a:r>
-                        <a:rPr lang="en-US" sz="1400" dirty="0">
-                          <a:solidFill>
-                            <a:srgbClr val="333333"/>
-                          </a:solidFill>
-                        </a:rPr>
-                        <a:t>Partial / opt-in semantic path</a:t>
-                      </a:r>
-                      <a:endParaRPr lang="en-US" sz="1400" dirty="0"/>
-                    </a:p>
-                  </a:txBody>
-                  <a:tcPr marL="91440" marR="91440" marT="45720" marB="45720" anchor="ctr">
-                    <a:lnL w="12700" cap="flat" cmpd="sng" algn="ctr">
-                      <a:solidFill>
-                        <a:srgbClr val="CCCCCC"/>
-                      </a:solidFill>
-                      <a:prstDash val="solid"/>
-                      <a:round/>
-                      <a:headEnd type="none" w="med" len="med"/>
-                      <a:tailEnd type="none" w="med" len="med"/>
-                    </a:lnL>
-                    <a:lnR w="12700" cap="flat" cmpd="sng" algn="ctr">
-                      <a:solidFill>
-                        <a:srgbClr val="CCCCCC"/>
-                      </a:solidFill>
-                      <a:prstDash val="solid"/>
-                      <a:round/>
-                      <a:headEnd type="none" w="med" len="med"/>
-                      <a:tailEnd type="none" w="med" len="med"/>
-                    </a:lnR>
-                    <a:lnT w="12700" cap="flat" cmpd="sng" algn="ctr">
-                      <a:solidFill>
-                        <a:srgbClr val="CCCCCC"/>
-                      </a:solidFill>
-                      <a:prstDash val="solid"/>
-                      <a:round/>
-                      <a:headEnd type="none" w="med" len="med"/>
-                      <a:tailEnd type="none" w="med" len="med"/>
-                    </a:lnT>
-                    <a:lnB w="12700" cap="flat" cmpd="sng" algn="ctr">
-                      <a:solidFill>
-                        <a:srgbClr val="CCCCCC"/>
-                      </a:solidFill>
-                      <a:prstDash val="solid"/>
-                      <a:round/>
-                      <a:headEnd type="none" w="med" len="med"/>
-                      <a:tailEnd type="none" w="med" len="med"/>
-                    </a:lnB>
-                    <a:solidFill>
-                      <a:srgbClr val="FFFFFF"/>
-                    </a:solidFill>
-                  </a:tcPr>
-                </a:tc>
-              </a:tr>
-              <a:tr h="365760">
-                <a:tc>
-                  <a:txBody>
-                    <a:bodyPr/>
-                    <a:lstStyle/>
-                    <a:p>
-                      <a:pPr algn="ctr" indent="0" marL="0">
-                        <a:buNone/>
-                      </a:pPr>
-                      <a:r>
-                        <a:rPr lang="en-US" sz="1400" dirty="0">
-                          <a:solidFill>
-                            <a:srgbClr val="333333"/>
-                          </a:solidFill>
-                        </a:rPr>
-                        <a:t>9</a:t>
-                      </a:r>
-                      <a:endParaRPr lang="en-US" sz="1400" dirty="0"/>
-                    </a:p>
-                  </a:txBody>
-                  <a:tcPr marL="91440" marR="91440" marT="45720" marB="45720" anchor="ctr">
-                    <a:lnL w="12700" cap="flat" cmpd="sng" algn="ctr">
-                      <a:solidFill>
-                        <a:srgbClr val="CCCCCC"/>
-                      </a:solidFill>
-                      <a:prstDash val="solid"/>
-                      <a:round/>
-                      <a:headEnd type="none" w="med" len="med"/>
-                      <a:tailEnd type="none" w="med" len="med"/>
-                    </a:lnL>
-                    <a:lnR w="12700" cap="flat" cmpd="sng" algn="ctr">
-                      <a:solidFill>
-                        <a:srgbClr val="CCCCCC"/>
-                      </a:solidFill>
-                      <a:prstDash val="solid"/>
-                      <a:round/>
-                      <a:headEnd type="none" w="med" len="med"/>
-                      <a:tailEnd type="none" w="med" len="med"/>
-                    </a:lnR>
-                    <a:lnT w="12700" cap="flat" cmpd="sng" algn="ctr">
-                      <a:solidFill>
-                        <a:srgbClr val="CCCCCC"/>
-                      </a:solidFill>
-                      <a:prstDash val="solid"/>
-                      <a:round/>
-                      <a:headEnd type="none" w="med" len="med"/>
-                      <a:tailEnd type="none" w="med" len="med"/>
-                    </a:lnT>
-                    <a:lnB w="12700" cap="flat" cmpd="sng" algn="ctr">
-                      <a:solidFill>
-                        <a:srgbClr val="CCCCCC"/>
-                      </a:solidFill>
-                      <a:prstDash val="solid"/>
-                      <a:round/>
-                      <a:headEnd type="none" w="med" len="med"/>
-                      <a:tailEnd type="none" w="med" len="med"/>
-                    </a:lnB>
-                    <a:solidFill>
-                      <a:srgbClr val="FFFFFF"/>
-                    </a:solidFill>
-                  </a:tcPr>
-                </a:tc>
-                <a:tc>
-                  <a:txBody>
-                    <a:bodyPr/>
-                    <a:lstStyle/>
-                    <a:p>
-                      <a:pPr algn="ctr" indent="0" marL="0">
-                        <a:buNone/>
-                      </a:pPr>
-                      <a:r>
-                        <a:rPr lang="en-US" sz="1400" dirty="0">
-                          <a:solidFill>
-                            <a:srgbClr val="333333"/>
-                          </a:solidFill>
-                        </a:rPr>
-                        <a:t>Ranking Agent</a:t>
-                      </a:r>
-                      <a:endParaRPr lang="en-US" sz="1400" dirty="0"/>
-                    </a:p>
-                  </a:txBody>
-                  <a:tcPr marL="91440" marR="91440" marT="45720" marB="45720" anchor="ctr">
-                    <a:lnL w="12700" cap="flat" cmpd="sng" algn="ctr">
-                      <a:solidFill>
-                        <a:srgbClr val="CCCCCC"/>
-                      </a:solidFill>
-                      <a:prstDash val="solid"/>
-                      <a:round/>
-                      <a:headEnd type="none" w="med" len="med"/>
-                      <a:tailEnd type="none" w="med" len="med"/>
-                    </a:lnL>
-                    <a:lnR w="12700" cap="flat" cmpd="sng" algn="ctr">
-                      <a:solidFill>
-                        <a:srgbClr val="CCCCCC"/>
-                      </a:solidFill>
-                      <a:prstDash val="solid"/>
-                      <a:round/>
-                      <a:headEnd type="none" w="med" len="med"/>
-                      <a:tailEnd type="none" w="med" len="med"/>
-                    </a:lnR>
-                    <a:lnT w="12700" cap="flat" cmpd="sng" algn="ctr">
-                      <a:solidFill>
-                        <a:srgbClr val="CCCCCC"/>
-                      </a:solidFill>
-                      <a:prstDash val="solid"/>
-                      <a:round/>
-                      <a:headEnd type="none" w="med" len="med"/>
-                      <a:tailEnd type="none" w="med" len="med"/>
-                    </a:lnT>
-                    <a:lnB w="12700" cap="flat" cmpd="sng" algn="ctr">
-                      <a:solidFill>
-                        <a:srgbClr val="CCCCCC"/>
-                      </a:solidFill>
-                      <a:prstDash val="solid"/>
-                      <a:round/>
-                      <a:headEnd type="none" w="med" len="med"/>
-                      <a:tailEnd type="none" w="med" len="med"/>
-                    </a:lnB>
-                    <a:solidFill>
-                      <a:srgbClr val="FFFFFF"/>
-                    </a:solidFill>
-                  </a:tcPr>
-                </a:tc>
-                <a:tc>
-                  <a:txBody>
-                    <a:bodyPr/>
-                    <a:lstStyle/>
-                    <a:p>
-                      <a:pPr algn="ctr" indent="0" marL="0">
-                        <a:buNone/>
-                      </a:pPr>
-                      <a:r>
-                        <a:rPr lang="en-US" sz="1400" dirty="0">
-                          <a:solidFill>
-                            <a:srgbClr val="333333"/>
-                          </a:solidFill>
-                        </a:rPr>
-                        <a:t>Implemented</a:t>
-                      </a:r>
-                      <a:endParaRPr lang="en-US" sz="1400" dirty="0"/>
-                    </a:p>
-                  </a:txBody>
-                  <a:tcPr marL="91440" marR="91440" marT="45720" marB="45720" anchor="ctr">
-                    <a:lnL w="12700" cap="flat" cmpd="sng" algn="ctr">
-                      <a:solidFill>
-                        <a:srgbClr val="CCCCCC"/>
-                      </a:solidFill>
-                      <a:prstDash val="solid"/>
-                      <a:round/>
-                      <a:headEnd type="none" w="med" len="med"/>
-                      <a:tailEnd type="none" w="med" len="med"/>
-                    </a:lnL>
-                    <a:lnR w="12700" cap="flat" cmpd="sng" algn="ctr">
-                      <a:solidFill>
-                        <a:srgbClr val="CCCCCC"/>
-                      </a:solidFill>
-                      <a:prstDash val="solid"/>
-                      <a:round/>
-                      <a:headEnd type="none" w="med" len="med"/>
-                      <a:tailEnd type="none" w="med" len="med"/>
-                    </a:lnR>
-                    <a:lnT w="12700" cap="flat" cmpd="sng" algn="ctr">
-                      <a:solidFill>
-                        <a:srgbClr val="CCCCCC"/>
-                      </a:solidFill>
-                      <a:prstDash val="solid"/>
-                      <a:round/>
-                      <a:headEnd type="none" w="med" len="med"/>
-                      <a:tailEnd type="none" w="med" len="med"/>
-                    </a:lnT>
-                    <a:lnB w="12700" cap="flat" cmpd="sng" algn="ctr">
-                      <a:solidFill>
-                        <a:srgbClr val="CCCCCC"/>
-                      </a:solidFill>
-                      <a:prstDash val="solid"/>
-                      <a:round/>
-                      <a:headEnd type="none" w="med" len="med"/>
-                      <a:tailEnd type="none" w="med" len="med"/>
-                    </a:lnB>
-                    <a:solidFill>
-                      <a:srgbClr val="FFFFFF"/>
-                    </a:solidFill>
-                  </a:tcPr>
-                </a:tc>
-              </a:tr>
-              <a:tr h="365760">
-                <a:tc>
-                  <a:txBody>
-                    <a:bodyPr/>
-                    <a:lstStyle/>
-                    <a:p>
-                      <a:pPr algn="ctr" indent="0" marL="0">
-                        <a:buNone/>
-                      </a:pPr>
-                      <a:r>
-                        <a:rPr lang="en-US" sz="1400" dirty="0">
-                          <a:solidFill>
-                            <a:srgbClr val="333333"/>
-                          </a:solidFill>
-                        </a:rPr>
-                        <a:t>10</a:t>
-                      </a:r>
-                      <a:endParaRPr lang="en-US" sz="1400" dirty="0"/>
-                    </a:p>
-                  </a:txBody>
-                  <a:tcPr marL="91440" marR="91440" marT="45720" marB="45720" anchor="ctr">
-                    <a:lnL w="12700" cap="flat" cmpd="sng" algn="ctr">
-                      <a:solidFill>
-                        <a:srgbClr val="CCCCCC"/>
-                      </a:solidFill>
-                      <a:prstDash val="solid"/>
-                      <a:round/>
-                      <a:headEnd type="none" w="med" len="med"/>
-                      <a:tailEnd type="none" w="med" len="med"/>
-                    </a:lnL>
-                    <a:lnR w="12700" cap="flat" cmpd="sng" algn="ctr">
-                      <a:solidFill>
-                        <a:srgbClr val="CCCCCC"/>
-                      </a:solidFill>
-                      <a:prstDash val="solid"/>
-                      <a:round/>
-                      <a:headEnd type="none" w="med" len="med"/>
-                      <a:tailEnd type="none" w="med" len="med"/>
-                    </a:lnR>
-                    <a:lnT w="12700" cap="flat" cmpd="sng" algn="ctr">
-                      <a:solidFill>
-                        <a:srgbClr val="CCCCCC"/>
-                      </a:solidFill>
-                      <a:prstDash val="solid"/>
-                      <a:round/>
-                      <a:headEnd type="none" w="med" len="med"/>
-                      <a:tailEnd type="none" w="med" len="med"/>
-                    </a:lnT>
-                    <a:lnB w="12700" cap="flat" cmpd="sng" algn="ctr">
-                      <a:solidFill>
-                        <a:srgbClr val="CCCCCC"/>
-                      </a:solidFill>
-                      <a:prstDash val="solid"/>
-                      <a:round/>
-                      <a:headEnd type="none" w="med" len="med"/>
-                      <a:tailEnd type="none" w="med" len="med"/>
-                    </a:lnB>
-                    <a:solidFill>
-                      <a:srgbClr val="FFFFFF"/>
-                    </a:solidFill>
-                  </a:tcPr>
-                </a:tc>
-                <a:tc>
-                  <a:txBody>
-                    <a:bodyPr/>
-                    <a:lstStyle/>
-                    <a:p>
-                      <a:pPr algn="ctr" indent="0" marL="0">
-                        <a:buNone/>
-                      </a:pPr>
-                      <a:r>
-                        <a:rPr lang="en-US" sz="1400" dirty="0">
-                          <a:solidFill>
-                            <a:srgbClr val="333333"/>
-                          </a:solidFill>
-                        </a:rPr>
-                        <a:t>Critic Agent</a:t>
-                      </a:r>
-                      <a:endParaRPr lang="en-US" sz="1400" dirty="0"/>
-                    </a:p>
-                  </a:txBody>
-                  <a:tcPr marL="91440" marR="91440" marT="45720" marB="45720" anchor="ctr">
-                    <a:lnL w="12700" cap="flat" cmpd="sng" algn="ctr">
-                      <a:solidFill>
-                        <a:srgbClr val="CCCCCC"/>
-                      </a:solidFill>
-                      <a:prstDash val="solid"/>
-                      <a:round/>
-                      <a:headEnd type="none" w="med" len="med"/>
-                      <a:tailEnd type="none" w="med" len="med"/>
-                    </a:lnL>
-                    <a:lnR w="12700" cap="flat" cmpd="sng" algn="ctr">
-                      <a:solidFill>
-                        <a:srgbClr val="CCCCCC"/>
-                      </a:solidFill>
-                      <a:prstDash val="solid"/>
-                      <a:round/>
-                      <a:headEnd type="none" w="med" len="med"/>
-                      <a:tailEnd type="none" w="med" len="med"/>
-                    </a:lnR>
-                    <a:lnT w="12700" cap="flat" cmpd="sng" algn="ctr">
-                      <a:solidFill>
-                        <a:srgbClr val="CCCCCC"/>
-                      </a:solidFill>
-                      <a:prstDash val="solid"/>
-                      <a:round/>
-                      <a:headEnd type="none" w="med" len="med"/>
-                      <a:tailEnd type="none" w="med" len="med"/>
-                    </a:lnT>
-                    <a:lnB w="12700" cap="flat" cmpd="sng" algn="ctr">
-                      <a:solidFill>
-                        <a:srgbClr val="CCCCCC"/>
-                      </a:solidFill>
-                      <a:prstDash val="solid"/>
-                      <a:round/>
-                      <a:headEnd type="none" w="med" len="med"/>
-                      <a:tailEnd type="none" w="med" len="med"/>
-                    </a:lnB>
-                    <a:solidFill>
-                      <a:srgbClr val="FFFFFF"/>
-                    </a:solidFill>
-                  </a:tcPr>
-                </a:tc>
-                <a:tc>
-                  <a:txBody>
-                    <a:bodyPr/>
-                    <a:lstStyle/>
-                    <a:p>
-                      <a:pPr algn="ctr" indent="0" marL="0">
-                        <a:buNone/>
-                      </a:pPr>
-                      <a:r>
-                        <a:rPr lang="en-US" sz="1400" dirty="0">
-                          <a:solidFill>
-                            <a:srgbClr val="333333"/>
-                          </a:solidFill>
-                        </a:rPr>
-                        <a:t>Rule-based default / LLM opt-in</a:t>
-                      </a:r>
-                      <a:endParaRPr lang="en-US" sz="1400" dirty="0"/>
-                    </a:p>
-                  </a:txBody>
-                  <a:tcPr marL="91440" marR="91440" marT="45720" marB="45720" anchor="ctr">
-                    <a:lnL w="12700" cap="flat" cmpd="sng" algn="ctr">
-                      <a:solidFill>
-                        <a:srgbClr val="CCCCCC"/>
-                      </a:solidFill>
-                      <a:prstDash val="solid"/>
-                      <a:round/>
-                      <a:headEnd type="none" w="med" len="med"/>
-                      <a:tailEnd type="none" w="med" len="med"/>
-                    </a:lnL>
-                    <a:lnR w="12700" cap="flat" cmpd="sng" algn="ctr">
-                      <a:solidFill>
-                        <a:srgbClr val="CCCCCC"/>
-                      </a:solidFill>
-                      <a:prstDash val="solid"/>
-                      <a:round/>
-                      <a:headEnd type="none" w="med" len="med"/>
-                      <a:tailEnd type="none" w="med" len="med"/>
-                    </a:lnR>
-                    <a:lnT w="12700" cap="flat" cmpd="sng" algn="ctr">
-                      <a:solidFill>
-                        <a:srgbClr val="CCCCCC"/>
-                      </a:solidFill>
-                      <a:prstDash val="solid"/>
-                      <a:round/>
-                      <a:headEnd type="none" w="med" len="med"/>
-                      <a:tailEnd type="none" w="med" len="med"/>
-                    </a:lnT>
-                    <a:lnB w="12700" cap="flat" cmpd="sng" algn="ctr">
-                      <a:solidFill>
-                        <a:srgbClr val="CCCCCC"/>
-                      </a:solidFill>
-                      <a:prstDash val="solid"/>
-                      <a:round/>
-                      <a:headEnd type="none" w="med" len="med"/>
-                      <a:tailEnd type="none" w="med" len="med"/>
-                    </a:lnB>
-                    <a:solidFill>
-                      <a:srgbClr val="FFFFFF"/>
-                    </a:solidFill>
-                  </a:tcPr>
-                </a:tc>
-              </a:tr>
-              <a:tr h="365760">
-                <a:tc>
-                  <a:txBody>
-                    <a:bodyPr/>
-                    <a:lstStyle/>
-                    <a:p>
-                      <a:pPr algn="ctr" indent="0" marL="0">
-                        <a:buNone/>
-                      </a:pPr>
-                      <a:r>
-                        <a:rPr lang="en-US" sz="1400" dirty="0">
-                          <a:solidFill>
-                            <a:srgbClr val="333333"/>
-                          </a:solidFill>
-                        </a:rPr>
-                        <a:t>11</a:t>
-                      </a:r>
-                      <a:endParaRPr lang="en-US" sz="1400" dirty="0"/>
-                    </a:p>
-                  </a:txBody>
-                  <a:tcPr marL="91440" marR="91440" marT="45720" marB="45720" anchor="ctr">
-                    <a:lnL w="12700" cap="flat" cmpd="sng" algn="ctr">
-                      <a:solidFill>
-                        <a:srgbClr val="CCCCCC"/>
-                      </a:solidFill>
-                      <a:prstDash val="solid"/>
-                      <a:round/>
-                      <a:headEnd type="none" w="med" len="med"/>
-                      <a:tailEnd type="none" w="med" len="med"/>
-                    </a:lnL>
-                    <a:lnR w="12700" cap="flat" cmpd="sng" algn="ctr">
-                      <a:solidFill>
-                        <a:srgbClr val="CCCCCC"/>
-                      </a:solidFill>
-                      <a:prstDash val="solid"/>
-                      <a:round/>
-                      <a:headEnd type="none" w="med" len="med"/>
-                      <a:tailEnd type="none" w="med" len="med"/>
-                    </a:lnR>
-                    <a:lnT w="12700" cap="flat" cmpd="sng" algn="ctr">
-                      <a:solidFill>
-                        <a:srgbClr val="CCCCCC"/>
-                      </a:solidFill>
-                      <a:prstDash val="solid"/>
-                      <a:round/>
-                      <a:headEnd type="none" w="med" len="med"/>
-                      <a:tailEnd type="none" w="med" len="med"/>
-                    </a:lnT>
-                    <a:lnB w="12700" cap="flat" cmpd="sng" algn="ctr">
-                      <a:solidFill>
-                        <a:srgbClr val="CCCCCC"/>
-                      </a:solidFill>
-                      <a:prstDash val="solid"/>
-                      <a:round/>
-                      <a:headEnd type="none" w="med" len="med"/>
-                      <a:tailEnd type="none" w="med" len="med"/>
-                    </a:lnB>
-                    <a:solidFill>
-                      <a:srgbClr val="FFFFFF"/>
-                    </a:solidFill>
-                  </a:tcPr>
-                </a:tc>
-                <a:tc>
-                  <a:txBody>
-                    <a:bodyPr/>
-                    <a:lstStyle/>
-                    <a:p>
-                      <a:pPr algn="ctr" indent="0" marL="0">
-                        <a:buNone/>
-                      </a:pPr>
-                      <a:r>
-                        <a:rPr lang="en-US" sz="1400" dirty="0">
-                          <a:solidFill>
-                            <a:srgbClr val="333333"/>
-                          </a:solidFill>
-                        </a:rPr>
-                        <a:t>Report Agent</a:t>
-                      </a:r>
-                      <a:endParaRPr lang="en-US" sz="1400" dirty="0"/>
-                    </a:p>
-                  </a:txBody>
-                  <a:tcPr marL="91440" marR="91440" marT="45720" marB="45720" anchor="ctr">
-                    <a:lnL w="12700" cap="flat" cmpd="sng" algn="ctr">
-                      <a:solidFill>
-                        <a:srgbClr val="CCCCCC"/>
-                      </a:solidFill>
-                      <a:prstDash val="solid"/>
-                      <a:round/>
-                      <a:headEnd type="none" w="med" len="med"/>
-                      <a:tailEnd type="none" w="med" len="med"/>
-                    </a:lnL>
-                    <a:lnR w="12700" cap="flat" cmpd="sng" algn="ctr">
-                      <a:solidFill>
-                        <a:srgbClr val="CCCCCC"/>
-                      </a:solidFill>
-                      <a:prstDash val="solid"/>
-                      <a:round/>
-                      <a:headEnd type="none" w="med" len="med"/>
-                      <a:tailEnd type="none" w="med" len="med"/>
-                    </a:lnR>
-                    <a:lnT w="12700" cap="flat" cmpd="sng" algn="ctr">
-                      <a:solidFill>
-                        <a:srgbClr val="CCCCCC"/>
-                      </a:solidFill>
-                      <a:prstDash val="solid"/>
-                      <a:round/>
-                      <a:headEnd type="none" w="med" len="med"/>
-                      <a:tailEnd type="none" w="med" len="med"/>
-                    </a:lnT>
-                    <a:lnB w="12700" cap="flat" cmpd="sng" algn="ctr">
-                      <a:solidFill>
-                        <a:srgbClr val="CCCCCC"/>
-                      </a:solidFill>
-                      <a:prstDash val="solid"/>
-                      <a:round/>
-                      <a:headEnd type="none" w="med" len="med"/>
-                      <a:tailEnd type="none" w="med" len="med"/>
-                    </a:lnB>
-                    <a:solidFill>
-                      <a:srgbClr val="FFFFFF"/>
-                    </a:solidFill>
-                  </a:tcPr>
-                </a:tc>
-                <a:tc>
-                  <a:txBody>
-                    <a:bodyPr/>
-                    <a:lstStyle/>
-                    <a:p>
-                      <a:pPr algn="ctr" indent="0" marL="0">
-                        <a:buNone/>
-                      </a:pPr>
-                      <a:r>
-                        <a:rPr lang="en-US" sz="1400" dirty="0">
-                          <a:solidFill>
-                            <a:srgbClr val="333333"/>
-                          </a:solidFill>
-                        </a:rPr>
-                        <a:t>Implemented</a:t>
-                      </a:r>
-                      <a:endParaRPr lang="en-US" sz="1400" dirty="0"/>
-                    </a:p>
-                  </a:txBody>
-                  <a:tcPr marL="91440" marR="91440" marT="45720" marB="45720" anchor="ctr">
-                    <a:lnL w="12700" cap="flat" cmpd="sng" algn="ctr">
-                      <a:solidFill>
-                        <a:srgbClr val="CCCCCC"/>
-                      </a:solidFill>
-                      <a:prstDash val="solid"/>
-                      <a:round/>
-                      <a:headEnd type="none" w="med" len="med"/>
-                      <a:tailEnd type="none" w="med" len="med"/>
-                    </a:lnL>
-                    <a:lnR w="12700" cap="flat" cmpd="sng" algn="ctr">
-                      <a:solidFill>
-                        <a:srgbClr val="CCCCCC"/>
-                      </a:solidFill>
-                      <a:prstDash val="solid"/>
-                      <a:round/>
-                      <a:headEnd type="none" w="med" len="med"/>
-                      <a:tailEnd type="none" w="med" len="med"/>
-                    </a:lnR>
-                    <a:lnT w="12700" cap="flat" cmpd="sng" algn="ctr">
-                      <a:solidFill>
-                        <a:srgbClr val="CCCCCC"/>
-                      </a:solidFill>
-                      <a:prstDash val="solid"/>
-                      <a:round/>
-                      <a:headEnd type="none" w="med" len="med"/>
-                      <a:tailEnd type="none" w="med" len="med"/>
-                    </a:lnT>
-                    <a:lnB w="12700" cap="flat" cmpd="sng" algn="ctr">
-                      <a:solidFill>
-                        <a:srgbClr val="CCCCCC"/>
-                      </a:solidFill>
-                      <a:prstDash val="solid"/>
-                      <a:round/>
-                      <a:headEnd type="none" w="med" len="med"/>
-                      <a:tailEnd type="none" w="med" len="med"/>
-                    </a:lnB>
-                    <a:solidFill>
-                      <a:srgbClr val="FFFFFF"/>
-                    </a:solidFill>
-                  </a:tcPr>
-                </a:tc>
-              </a:tr>
-              <a:tr h="365760">
-                <a:tc>
-                  <a:txBody>
-                    <a:bodyPr/>
-                    <a:lstStyle/>
-                    <a:p>
-                      <a:pPr algn="ctr" indent="0" marL="0">
-                        <a:buNone/>
-                      </a:pPr>
-                      <a:r>
-                        <a:rPr lang="en-US" sz="1400" dirty="0">
-                          <a:solidFill>
-                            <a:srgbClr val="333333"/>
-                          </a:solidFill>
-                        </a:rPr>
-                        <a:t>12</a:t>
-                      </a:r>
-                      <a:endParaRPr lang="en-US" sz="1400" dirty="0"/>
-                    </a:p>
-                  </a:txBody>
-                  <a:tcPr marL="91440" marR="91440" marT="45720" marB="45720" anchor="ctr">
-                    <a:lnL w="12700" cap="flat" cmpd="sng" algn="ctr">
-                      <a:solidFill>
-                        <a:srgbClr val="CCCCCC"/>
-                      </a:solidFill>
-                      <a:prstDash val="solid"/>
-                      <a:round/>
-                      <a:headEnd type="none" w="med" len="med"/>
-                      <a:tailEnd type="none" w="med" len="med"/>
-                    </a:lnL>
-                    <a:lnR w="12700" cap="flat" cmpd="sng" algn="ctr">
-                      <a:solidFill>
-                        <a:srgbClr val="CCCCCC"/>
-                      </a:solidFill>
-                      <a:prstDash val="solid"/>
-                      <a:round/>
-                      <a:headEnd type="none" w="med" len="med"/>
-                      <a:tailEnd type="none" w="med" len="med"/>
-                    </a:lnR>
-                    <a:lnT w="12700" cap="flat" cmpd="sng" algn="ctr">
-                      <a:solidFill>
-                        <a:srgbClr val="CCCCCC"/>
-                      </a:solidFill>
-                      <a:prstDash val="solid"/>
-                      <a:round/>
-                      <a:headEnd type="none" w="med" len="med"/>
-                      <a:tailEnd type="none" w="med" len="med"/>
-                    </a:lnT>
-                    <a:lnB w="12700" cap="flat" cmpd="sng" algn="ctr">
-                      <a:solidFill>
-                        <a:srgbClr val="CCCCCC"/>
-                      </a:solidFill>
-                      <a:prstDash val="solid"/>
-                      <a:round/>
-                      <a:headEnd type="none" w="med" len="med"/>
-                      <a:tailEnd type="none" w="med" len="med"/>
-                    </a:lnB>
-                    <a:solidFill>
-                      <a:srgbClr val="FFFFFF"/>
-                    </a:solidFill>
-                  </a:tcPr>
-                </a:tc>
-                <a:tc>
-                  <a:txBody>
-                    <a:bodyPr/>
-                    <a:lstStyle/>
-                    <a:p>
-                      <a:pPr algn="ctr" indent="0" marL="0">
-                        <a:buNone/>
-                      </a:pPr>
-                      <a:r>
-                        <a:rPr lang="en-US" sz="1400" dirty="0">
-                          <a:solidFill>
-                            <a:srgbClr val="333333"/>
-                          </a:solidFill>
-                        </a:rPr>
-                        <a:t>Dashboard Delivery</a:t>
-                      </a:r>
-                      <a:endParaRPr lang="en-US" sz="1400" dirty="0"/>
-                    </a:p>
-                  </a:txBody>
-                  <a:tcPr marL="91440" marR="91440" marT="45720" marB="45720" anchor="ctr">
-                    <a:lnL w="12700" cap="flat" cmpd="sng" algn="ctr">
-                      <a:solidFill>
-                        <a:srgbClr val="CCCCCC"/>
-                      </a:solidFill>
-                      <a:prstDash val="solid"/>
-                      <a:round/>
-                      <a:headEnd type="none" w="med" len="med"/>
-                      <a:tailEnd type="none" w="med" len="med"/>
-                    </a:lnL>
-                    <a:lnR w="12700" cap="flat" cmpd="sng" algn="ctr">
-                      <a:solidFill>
-                        <a:srgbClr val="CCCCCC"/>
-                      </a:solidFill>
-                      <a:prstDash val="solid"/>
-                      <a:round/>
-                      <a:headEnd type="none" w="med" len="med"/>
-                      <a:tailEnd type="none" w="med" len="med"/>
-                    </a:lnR>
-                    <a:lnT w="12700" cap="flat" cmpd="sng" algn="ctr">
-                      <a:solidFill>
-                        <a:srgbClr val="CCCCCC"/>
-                      </a:solidFill>
-                      <a:prstDash val="solid"/>
-                      <a:round/>
-                      <a:headEnd type="none" w="med" len="med"/>
-                      <a:tailEnd type="none" w="med" len="med"/>
-                    </a:lnT>
-                    <a:lnB w="12700" cap="flat" cmpd="sng" algn="ctr">
-                      <a:solidFill>
-                        <a:srgbClr val="CCCCCC"/>
-                      </a:solidFill>
-                      <a:prstDash val="solid"/>
-                      <a:round/>
-                      <a:headEnd type="none" w="med" len="med"/>
-                      <a:tailEnd type="none" w="med" len="med"/>
-                    </a:lnB>
-                    <a:solidFill>
-                      <a:srgbClr val="FFFFFF"/>
-                    </a:solidFill>
-                  </a:tcPr>
-                </a:tc>
-                <a:tc>
-                  <a:txBody>
-                    <a:bodyPr/>
-                    <a:lstStyle/>
-                    <a:p>
-                      <a:pPr algn="ctr" indent="0" marL="0">
-                        <a:buNone/>
-                      </a:pPr>
-                      <a:r>
-                        <a:rPr lang="en-US" sz="1400" dirty="0">
-                          <a:solidFill>
-                            <a:srgbClr val="333333"/>
-                          </a:solidFill>
-                        </a:rPr>
-                        <a:t>Implemented</a:t>
+                        <a:t>환각 감지 및 서사적 리포트(Findings/Gaps) 생성</a:t>
                       </a:r>
                       <a:endParaRPr lang="en-US" sz="1400" dirty="0"/>
                     </a:p>
@@ -8228,7 +6460,7 @@
                 <a:ea typeface="Open Sans" pitchFamily="34" charset="-122"/>
                 <a:cs typeface="Open Sans" pitchFamily="34" charset="-120"/>
               </a:rPr>
-              <a:t>각 단계는 서로 다른 실패 모드를 가집니다.</a:t>
+              <a:t>분리된 Agent Trace는 "White-box" 연구 환경을 제공합니다.</a:t>
             </a:r>
             <a:endParaRPr lang="en-US" sz="1800" dirty="0"/>
           </a:p>
@@ -8243,7 +6475,7 @@
         <p:spPr>
           <a:xfrm>
             <a:off x="457200" y="2011680"/>
-            <a:ext cx="8229600" cy="2194560"/>
+            <a:ext cx="8229600" cy="731520"/>
           </a:xfrm>
           <a:prstGeom prst="rect">
             <a:avLst/>
@@ -8264,7 +6496,7 @@
               </a:spcAft>
             </a:pPr>
             <a:r>
-              <a:rPr lang="en-US" sz="1800" dirty="0">
+              <a:rPr lang="en-US" sz="1800" b="1" dirty="0">
                 <a:solidFill>
                   <a:srgbClr val="333333"/>
                 </a:solidFill>
@@ -8272,7 +6504,21 @@
                 <a:ea typeface="Open Sans" pitchFamily="34" charset="-122"/>
                 <a:cs typeface="Open Sans" pitchFamily="34" charset="-120"/>
               </a:rPr>
-              <a:t>Search recall failure</a:t>
+              <a:t>Error Isolation</a:t>
+            </a:r>
+            <a:pPr indent="0" marL="0">
+              <a:buNone/>
+            </a:pPr>
+            <a:r>
+              <a:rPr lang="en-US" sz="1800" dirty="0">
+                <a:solidFill>
+                  <a:srgbClr val="333333"/>
+                </a:solidFill>
+                <a:latin typeface="Open Sans" pitchFamily="34" charset="0"/>
+                <a:ea typeface="Open Sans" pitchFamily="34" charset="-122"/>
+                <a:cs typeface="Open Sans" pitchFamily="34" charset="-120"/>
+              </a:rPr>
+              <a:t>: 특정 단계(예: 원문 확보)의 실패가 전체 파이프라인을 오염시키지 않음.</a:t>
             </a:r>
             <a:endParaRPr lang="en-US" sz="1800" dirty="0"/>
           </a:p>
@@ -8286,7 +6532,7 @@
               </a:spcAft>
             </a:pPr>
             <a:r>
-              <a:rPr lang="en-US" sz="1800" dirty="0">
+              <a:rPr lang="en-US" sz="1800" b="1" dirty="0">
                 <a:solidFill>
                   <a:srgbClr val="333333"/>
                 </a:solidFill>
@@ -8294,18 +6540,10 @@
                 <a:ea typeface="Open Sans" pitchFamily="34" charset="-122"/>
                 <a:cs typeface="Open Sans" pitchFamily="34" charset="-120"/>
               </a:rPr>
-              <a:t>Journal allowlist mismatch</a:t>
-            </a:r>
-            <a:endParaRPr lang="en-US" sz="1800" dirty="0"/>
-          </a:p>
-          <a:p>
-            <a:pPr>
-              <a:spcBef>
-                <a:spcPts val="600"/>
-              </a:spcBef>
-              <a:spcAft>
-                <a:spcPts val="300"/>
-              </a:spcAft>
+              <a:t>Auditability</a:t>
+            </a:r>
+            <a:pPr indent="0" marL="0">
+              <a:buNone/>
             </a:pPr>
             <a:r>
               <a:rPr lang="en-US" sz="1800" dirty="0">
@@ -8316,112 +6554,7 @@
                 <a:ea typeface="Open Sans" pitchFamily="34" charset="-122"/>
                 <a:cs typeface="Open Sans" pitchFamily="34" charset="-120"/>
               </a:rPr>
-              <a:t>DOI metadata mismatch</a:t>
-            </a:r>
-            <a:endParaRPr lang="en-US" sz="1800" dirty="0"/>
-          </a:p>
-          <a:p>
-            <a:pPr>
-              <a:spcBef>
-                <a:spcPts val="600"/>
-              </a:spcBef>
-              <a:spcAft>
-                <a:spcPts val="300"/>
-              </a:spcAft>
-            </a:pPr>
-            <a:r>
-              <a:rPr lang="en-US" sz="1800" dirty="0">
-                <a:solidFill>
-                  <a:srgbClr val="333333"/>
-                </a:solidFill>
-                <a:latin typeface="Open Sans" pitchFamily="34" charset="0"/>
-                <a:ea typeface="Open Sans" pitchFamily="34" charset="-122"/>
-                <a:cs typeface="Open Sans" pitchFamily="34" charset="-120"/>
-              </a:rPr>
-              <a:t>OA PDF unavailable</a:t>
-            </a:r>
-            <a:endParaRPr lang="en-US" sz="1800" dirty="0"/>
-          </a:p>
-          <a:p>
-            <a:pPr>
-              <a:spcBef>
-                <a:spcPts val="600"/>
-              </a:spcBef>
-              <a:spcAft>
-                <a:spcPts val="300"/>
-              </a:spcAft>
-            </a:pPr>
-            <a:r>
-              <a:rPr lang="en-US" sz="1800" dirty="0">
-                <a:solidFill>
-                  <a:srgbClr val="333333"/>
-                </a:solidFill>
-                <a:latin typeface="Open Sans" pitchFamily="34" charset="0"/>
-                <a:ea typeface="Open Sans" pitchFamily="34" charset="-122"/>
-                <a:cs typeface="Open Sans" pitchFamily="34" charset="-120"/>
-              </a:rPr>
-              <a:t>Ranking score bias</a:t>
-            </a:r>
-            <a:endParaRPr lang="en-US" sz="1800" dirty="0"/>
-          </a:p>
-          <a:p>
-            <a:pPr>
-              <a:spcBef>
-                <a:spcPts val="600"/>
-              </a:spcBef>
-              <a:spcAft>
-                <a:spcPts val="300"/>
-              </a:spcAft>
-            </a:pPr>
-            <a:r>
-              <a:rPr lang="en-US" sz="1800" dirty="0">
-                <a:solidFill>
-                  <a:srgbClr val="333333"/>
-                </a:solidFill>
-                <a:latin typeface="Open Sans" pitchFamily="34" charset="0"/>
-                <a:ea typeface="Open Sans" pitchFamily="34" charset="-122"/>
-                <a:cs typeface="Open Sans" pitchFamily="34" charset="-120"/>
-              </a:rPr>
-              <a:t>Critic review incompleteness</a:t>
-            </a:r>
-            <a:endParaRPr lang="en-US" sz="1800" dirty="0"/>
-          </a:p>
-        </p:txBody>
-      </p:sp>
-      <p:sp>
-        <p:nvSpPr>
-          <p:cNvPr id="5" name="Text 3"/>
-          <p:cNvSpPr/>
-          <p:nvPr/>
-        </p:nvSpPr>
-        <p:spPr>
-          <a:xfrm>
-            <a:off x="457200" y="4343400"/>
-            <a:ext cx="8229600" cy="228600"/>
-          </a:xfrm>
-          <a:prstGeom prst="rect">
-            <a:avLst/>
-          </a:prstGeom>
-          <a:noFill/>
-          <a:ln/>
-        </p:spPr>
-        <p:txBody>
-          <a:bodyPr wrap="square" rtlCol="0" anchor="t"/>
-          <a:lstStyle/>
-          <a:p>
-            <a:pPr indent="0" marL="0">
-              <a:buNone/>
-            </a:pPr>
-            <a:r>
-              <a:rPr lang="en-US" sz="1800" dirty="0">
-                <a:solidFill>
-                  <a:srgbClr val="333333"/>
-                </a:solidFill>
-                <a:latin typeface="Open Sans" pitchFamily="34" charset="0"/>
-                <a:ea typeface="Open Sans" pitchFamily="34" charset="-122"/>
-                <a:cs typeface="Open Sans" pitchFamily="34" charset="-120"/>
-              </a:rPr>
-              <a:t>분리된 agent trace는 오류 위치를 확인하고 재현성을 높입니다.</a:t>
+              <a:t>: 각 단계의 입력/출력/의도가 D1에 영구 기록되어 인간 연구자가 검증 가능.</a:t>
             </a:r>
             <a:endParaRPr lang="en-US" sz="1800" dirty="0"/>
           </a:p>
@@ -8576,7 +6709,7 @@
                 <a:ea typeface="Raleway" pitchFamily="34" charset="-122"/>
                 <a:cs typeface="Raleway" pitchFamily="34" charset="-120"/>
               </a:rPr>
-              <a:t>Cloudflare Deployment</a:t>
+              <a:t>Deployed Rigor (Cloudflare Stack)</a:t>
             </a:r>
             <a:endParaRPr lang="en-US" sz="2800" dirty="0"/>
           </a:p>
@@ -8808,7 +6941,7 @@
                             <a:srgbClr val="333333"/>
                           </a:solidFill>
                         </a:rPr>
-                        <a:t>Dashboard UI</a:t>
+                        <a:t>Interactive Research Studio UI</a:t>
                       </a:r>
                       <a:endParaRPr lang="en-US" sz="1400" dirty="0"/>
                     </a:p>
@@ -8932,7 +7065,7 @@
                             <a:srgbClr val="333333"/>
                           </a:solidFill>
                         </a:rPr>
-                        <a:t>Backend API and search workflow</a:t>
+                        <a:t>12-stage Multi-Agent Pipeline</a:t>
                       </a:r>
                       <a:endParaRPr lang="en-US" sz="1400" dirty="0"/>
                     </a:p>
@@ -9056,7 +7189,7 @@
                             <a:srgbClr val="333333"/>
                           </a:solidFill>
                         </a:rPr>
-                        <a:t>Jobs, papers, evaluations, traces</a:t>
+                        <a:t>Job Traces &amp; Metadata Persistence</a:t>
                       </a:r>
                       <a:endParaRPr lang="en-US" sz="1400" dirty="0"/>
                     </a:p>
@@ -9180,7 +7313,7 @@
                             <a:srgbClr val="333333"/>
                           </a:solidFill>
                         </a:rPr>
-                        <a:t>Report artifacts</a:t>
+                        <a:t>Narrative Report (PDF/XLSX) Storage</a:t>
                       </a:r>
                       <a:endParaRPr lang="en-US" sz="1400" dirty="0"/>
                     </a:p>
@@ -9243,7 +7376,7 @@
                             <a:srgbClr val="333333"/>
                           </a:solidFill>
                         </a:rPr>
-                        <a:t>Remote MCP Worker</a:t>
+                        <a:t>AI / Vectorize</a:t>
                       </a:r>
                       <a:endParaRPr lang="en-US" sz="1400" dirty="0"/>
                     </a:p>
@@ -9304,7 +7437,7 @@
                             <a:srgbClr val="333333"/>
                           </a:solidFill>
                         </a:rPr>
-                        <a:t>Read-only inspection tools</a:t>
+                        <a:t>Opt-in semantic scoring and qualitative critic paths</a:t>
                       </a:r>
                       <a:endParaRPr lang="en-US" sz="1400" dirty="0"/>
                     </a:p>
@@ -9356,177 +7489,6 @@
           </a:graphicData>
         </a:graphic>
       </p:graphicFrame>
-      <p:sp>
-        <p:nvSpPr>
-          <p:cNvPr id="4" name="Text 1"/>
-          <p:cNvSpPr/>
-          <p:nvPr/>
-        </p:nvSpPr>
-        <p:spPr>
-          <a:xfrm>
-            <a:off x="457200" y="3200400"/>
-            <a:ext cx="8229600" cy="1097280"/>
-          </a:xfrm>
-          <a:prstGeom prst="rect">
-            <a:avLst/>
-          </a:prstGeom>
-          <a:noFill/>
-          <a:ln/>
-        </p:spPr>
-        <p:txBody>
-          <a:bodyPr wrap="square" rtlCol="0" anchor="t"/>
-          <a:lstStyle/>
-          <a:p>
-            <a:pPr indent="0" marL="0">
-              <a:buNone/>
-            </a:pPr>
-            <a:r>
-              <a:rPr lang="en-US" sz="1800" dirty="0">
-                <a:solidFill>
-                  <a:srgbClr val="333333"/>
-                </a:solidFill>
-                <a:latin typeface="Open Sans" pitchFamily="34" charset="0"/>
-                <a:ea typeface="Open Sans" pitchFamily="34" charset="-122"/>
-                <a:cs typeface="Open Sans" pitchFamily="34" charset="-120"/>
-              </a:rPr>
-              <a:t>External tools:</a:t>
-            </a:r>
-            <a:endParaRPr lang="en-US" sz="1800" dirty="0"/>
-          </a:p>
-        </p:txBody>
-      </p:sp>
-      <p:sp>
-        <p:nvSpPr>
-          <p:cNvPr id="5" name="Text 2"/>
-          <p:cNvSpPr/>
-          <p:nvPr/>
-        </p:nvSpPr>
-        <p:spPr>
-          <a:xfrm>
-            <a:off x="457200" y="4389120"/>
-            <a:ext cx="8229600" cy="182880"/>
-          </a:xfrm>
-          <a:prstGeom prst="rect">
-            <a:avLst/>
-          </a:prstGeom>
-          <a:noFill/>
-          <a:ln/>
-        </p:spPr>
-        <p:txBody>
-          <a:bodyPr wrap="square" rtlCol="0" anchor="t"/>
-          <a:lstStyle/>
-          <a:p>
-            <a:pPr>
-              <a:spcBef>
-                <a:spcPts val="600"/>
-              </a:spcBef>
-              <a:spcAft>
-                <a:spcPts val="300"/>
-              </a:spcAft>
-            </a:pPr>
-            <a:r>
-              <a:rPr lang="en-US" sz="1800" dirty="0">
-                <a:solidFill>
-                  <a:srgbClr val="333333"/>
-                </a:solidFill>
-                <a:latin typeface="Open Sans" pitchFamily="34" charset="0"/>
-                <a:ea typeface="Open Sans" pitchFamily="34" charset="-122"/>
-                <a:cs typeface="Open Sans" pitchFamily="34" charset="-120"/>
-              </a:rPr>
-              <a:t>Web of Science</a:t>
-            </a:r>
-            <a:endParaRPr lang="en-US" sz="1800" dirty="0"/>
-          </a:p>
-          <a:p>
-            <a:pPr>
-              <a:spcBef>
-                <a:spcPts val="600"/>
-              </a:spcBef>
-              <a:spcAft>
-                <a:spcPts val="300"/>
-              </a:spcAft>
-            </a:pPr>
-            <a:r>
-              <a:rPr lang="en-US" sz="1800" dirty="0">
-                <a:solidFill>
-                  <a:srgbClr val="333333"/>
-                </a:solidFill>
-                <a:latin typeface="Open Sans" pitchFamily="34" charset="0"/>
-                <a:ea typeface="Open Sans" pitchFamily="34" charset="-122"/>
-                <a:cs typeface="Open Sans" pitchFamily="34" charset="-120"/>
-              </a:rPr>
-              <a:t>OpenAlex fallback</a:t>
-            </a:r>
-            <a:endParaRPr lang="en-US" sz="1800" dirty="0"/>
-          </a:p>
-          <a:p>
-            <a:pPr>
-              <a:spcBef>
-                <a:spcPts val="600"/>
-              </a:spcBef>
-              <a:spcAft>
-                <a:spcPts val="300"/>
-              </a:spcAft>
-            </a:pPr>
-            <a:r>
-              <a:rPr lang="en-US" sz="1800" dirty="0">
-                <a:solidFill>
-                  <a:srgbClr val="333333"/>
-                </a:solidFill>
-                <a:latin typeface="Open Sans" pitchFamily="34" charset="0"/>
-                <a:ea typeface="Open Sans" pitchFamily="34" charset="-122"/>
-                <a:cs typeface="Open Sans" pitchFamily="34" charset="-120"/>
-              </a:rPr>
-              <a:t>Crossref</a:t>
-            </a:r>
-            <a:endParaRPr lang="en-US" sz="1800" dirty="0"/>
-          </a:p>
-          <a:p>
-            <a:pPr>
-              <a:spcBef>
-                <a:spcPts val="600"/>
-              </a:spcBef>
-              <a:spcAft>
-                <a:spcPts val="300"/>
-              </a:spcAft>
-            </a:pPr>
-            <a:r>
-              <a:rPr lang="en-US" sz="1800" dirty="0">
-                <a:solidFill>
-                  <a:srgbClr val="333333"/>
-                </a:solidFill>
-                <a:latin typeface="Open Sans" pitchFamily="34" charset="0"/>
-                <a:ea typeface="Open Sans" pitchFamily="34" charset="-122"/>
-                <a:cs typeface="Open Sans" pitchFamily="34" charset="-120"/>
-              </a:rPr>
-              <a:t>Unpaywall</a:t>
-            </a:r>
-            <a:endParaRPr lang="en-US" sz="1800" dirty="0"/>
-          </a:p>
-          <a:p>
-            <a:pPr>
-              <a:spcBef>
-                <a:spcPts val="600"/>
-              </a:spcBef>
-              <a:spcAft>
-                <a:spcPts val="300"/>
-              </a:spcAft>
-            </a:pPr>
-            <a:r>
-              <a:rPr lang="en-US" sz="1800" dirty="0">
-                <a:solidFill>
-                  <a:srgbClr val="333333"/>
-                </a:solidFill>
-                <a:latin typeface="Open Sans" pitchFamily="34" charset="0"/>
-                <a:ea typeface="Open Sans" pitchFamily="34" charset="-122"/>
-                <a:cs typeface="Open Sans" pitchFamily="34" charset="-120"/>
-              </a:rPr>
-              <a:t>Google Drive conditional path</a:t>
-            </a:r>
-            <a:endParaRPr lang="en-US" sz="1800" dirty="0"/>
-          </a:p>
-        </p:txBody>
-      </p:sp>
     </p:spTree>
   </p:cSld>
   <p:clrMapOvr>

--- a/presentation/generated/paper-agent-final-presentation.pptx
+++ b/presentation/generated/paper-agent-final-presentation.pptx
@@ -2738,7 +2738,7 @@
                 <a:ea typeface="Open Sans" pitchFamily="34" charset="-122"/>
                 <a:cs typeface="Open Sans" pitchFamily="34" charset="-120"/>
               </a:rPr>
-              <a:t>Заняття Paper Agent: From Black-Box AI to Traceable Multi-Agent Research</a:t>
+              <a:t>Заняття Paper Agent: From Black-Box AI to Traceable and Trustworthy Research</a:t>
             </a:r>
             <a:endParaRPr lang="en-US" sz="2000" dirty="0"/>
           </a:p>
